--- a/marketing/decks/phase-04-agent-to-agent-future.pptx
+++ b/marketing/decks/phase-04-agent-to-agent-future.pptx
@@ -2,49 +2,49 @@
 <file path=ppt/presentation.xml><?xml version="1.0" encoding="utf-8"?>
 <p:presentation xmlns:p="http://schemas.openxmlformats.org/presentationml/2006/main">
   <p:sldMasterIdLst>
-    <p:sldMasterId xmlns:r="http://schemas.openxmlformats.org/officeDocument/2006/relationships" id="2147483648" r:id="Rce803d2b1a6443b5"/>
+    <p:sldMasterId xmlns:r="http://schemas.openxmlformats.org/officeDocument/2006/relationships" id="2147483648" r:id="R078d34c00a8c4f7b"/>
   </p:sldMasterIdLst>
   <p:notesMasterIdLst>
-    <p:notesMasterId xmlns:r="http://schemas.openxmlformats.org/officeDocument/2006/relationships" r:id="R2d7b91c9fba346c3"/>
+    <p:notesMasterId xmlns:r="http://schemas.openxmlformats.org/officeDocument/2006/relationships" r:id="R29e3a6f47b184920"/>
   </p:notesMasterIdLst>
   <p:sldIdLst>
-    <p:sldId xmlns:r="http://schemas.openxmlformats.org/officeDocument/2006/relationships" id="256" r:id="R0492daee1524439b"/>
-    <p:sldId xmlns:r="http://schemas.openxmlformats.org/officeDocument/2006/relationships" id="257" r:id="Rb44841b906e34414"/>
-    <p:sldId xmlns:r="http://schemas.openxmlformats.org/officeDocument/2006/relationships" id="258" r:id="R75edf8db4c404138"/>
-    <p:sldId xmlns:r="http://schemas.openxmlformats.org/officeDocument/2006/relationships" id="259" r:id="Rb6d64379e11f4a44"/>
-    <p:sldId xmlns:r="http://schemas.openxmlformats.org/officeDocument/2006/relationships" id="260" r:id="Rf66fa9c509bb4f89"/>
-    <p:sldId xmlns:r="http://schemas.openxmlformats.org/officeDocument/2006/relationships" id="261" r:id="R9c3a51400a5f415e"/>
-    <p:sldId xmlns:r="http://schemas.openxmlformats.org/officeDocument/2006/relationships" id="262" r:id="R163bdba543e444fc"/>
-    <p:sldId xmlns:r="http://schemas.openxmlformats.org/officeDocument/2006/relationships" id="263" r:id="R4b7c017dc7c14b8e"/>
-    <p:sldId xmlns:r="http://schemas.openxmlformats.org/officeDocument/2006/relationships" id="264" r:id="R26d40d02efd644a4"/>
-    <p:sldId xmlns:r="http://schemas.openxmlformats.org/officeDocument/2006/relationships" id="265" r:id="R481e04ae66674f56"/>
-    <p:sldId xmlns:r="http://schemas.openxmlformats.org/officeDocument/2006/relationships" id="266" r:id="Rd733ef64de2144c5"/>
-    <p:sldId xmlns:r="http://schemas.openxmlformats.org/officeDocument/2006/relationships" id="267" r:id="R6301a9d7899b463f"/>
-    <p:sldId xmlns:r="http://schemas.openxmlformats.org/officeDocument/2006/relationships" id="268" r:id="R5d3de7ab9de64085"/>
-    <p:sldId xmlns:r="http://schemas.openxmlformats.org/officeDocument/2006/relationships" id="269" r:id="R8a235e4479ac4adf"/>
-    <p:sldId xmlns:r="http://schemas.openxmlformats.org/officeDocument/2006/relationships" id="270" r:id="Re550e591f72d4cb6"/>
-    <p:sldId xmlns:r="http://schemas.openxmlformats.org/officeDocument/2006/relationships" id="271" r:id="R44c8c73b6b0b4ad7"/>
-    <p:sldId xmlns:r="http://schemas.openxmlformats.org/officeDocument/2006/relationships" id="272" r:id="R48553d60e7d844b3"/>
-    <p:sldId xmlns:r="http://schemas.openxmlformats.org/officeDocument/2006/relationships" id="273" r:id="R34868a39f61b4fbf"/>
-    <p:sldId xmlns:r="http://schemas.openxmlformats.org/officeDocument/2006/relationships" id="274" r:id="R83d049b963114d6b"/>
-    <p:sldId xmlns:r="http://schemas.openxmlformats.org/officeDocument/2006/relationships" id="275" r:id="Rbd03c7beb73d4a54"/>
-    <p:sldId xmlns:r="http://schemas.openxmlformats.org/officeDocument/2006/relationships" id="276" r:id="R97dfcb502ec647c7"/>
-    <p:sldId xmlns:r="http://schemas.openxmlformats.org/officeDocument/2006/relationships" id="277" r:id="R09ef5dcc2b884f23"/>
-    <p:sldId xmlns:r="http://schemas.openxmlformats.org/officeDocument/2006/relationships" id="278" r:id="Rec04d11fb6644a82"/>
-    <p:sldId xmlns:r="http://schemas.openxmlformats.org/officeDocument/2006/relationships" id="279" r:id="R8d61c06358934aaf"/>
-    <p:sldId xmlns:r="http://schemas.openxmlformats.org/officeDocument/2006/relationships" id="280" r:id="Rae6827b8a93d4315"/>
-    <p:sldId xmlns:r="http://schemas.openxmlformats.org/officeDocument/2006/relationships" id="281" r:id="R01067634bbba4e0f"/>
-    <p:sldId xmlns:r="http://schemas.openxmlformats.org/officeDocument/2006/relationships" id="282" r:id="Ref92170bedbd435b"/>
-    <p:sldId xmlns:r="http://schemas.openxmlformats.org/officeDocument/2006/relationships" id="283" r:id="Rbe264114883749a4"/>
-    <p:sldId xmlns:r="http://schemas.openxmlformats.org/officeDocument/2006/relationships" id="284" r:id="R498687cd356b42d4"/>
-    <p:sldId xmlns:r="http://schemas.openxmlformats.org/officeDocument/2006/relationships" id="285" r:id="Rcfc78880edae44c3"/>
-    <p:sldId xmlns:r="http://schemas.openxmlformats.org/officeDocument/2006/relationships" id="286" r:id="R503863c9f2094cbc"/>
-    <p:sldId xmlns:r="http://schemas.openxmlformats.org/officeDocument/2006/relationships" id="287" r:id="R451b247567e842a0"/>
-    <p:sldId xmlns:r="http://schemas.openxmlformats.org/officeDocument/2006/relationships" id="288" r:id="R759f888dd19c4869"/>
-    <p:sldId xmlns:r="http://schemas.openxmlformats.org/officeDocument/2006/relationships" id="289" r:id="Ra12132e2568e4b3f"/>
-    <p:sldId xmlns:r="http://schemas.openxmlformats.org/officeDocument/2006/relationships" id="290" r:id="Rfdd3e0f3cd65459a"/>
-    <p:sldId xmlns:r="http://schemas.openxmlformats.org/officeDocument/2006/relationships" id="291" r:id="R6f9ae0d4cfa9411a"/>
-    <p:sldId xmlns:r="http://schemas.openxmlformats.org/officeDocument/2006/relationships" id="292" r:id="R360dc86dfb134b77"/>
+    <p:sldId xmlns:r="http://schemas.openxmlformats.org/officeDocument/2006/relationships" id="256" r:id="Rec23c7c42f564963"/>
+    <p:sldId xmlns:r="http://schemas.openxmlformats.org/officeDocument/2006/relationships" id="257" r:id="R79cb1c69a8e6437e"/>
+    <p:sldId xmlns:r="http://schemas.openxmlformats.org/officeDocument/2006/relationships" id="258" r:id="R8d817944c69e4248"/>
+    <p:sldId xmlns:r="http://schemas.openxmlformats.org/officeDocument/2006/relationships" id="259" r:id="R9a76a146d40f48d1"/>
+    <p:sldId xmlns:r="http://schemas.openxmlformats.org/officeDocument/2006/relationships" id="260" r:id="R6dcd3f44901e4057"/>
+    <p:sldId xmlns:r="http://schemas.openxmlformats.org/officeDocument/2006/relationships" id="261" r:id="Ra8dac5a1ced042a4"/>
+    <p:sldId xmlns:r="http://schemas.openxmlformats.org/officeDocument/2006/relationships" id="262" r:id="R3fafa19a1fd642b9"/>
+    <p:sldId xmlns:r="http://schemas.openxmlformats.org/officeDocument/2006/relationships" id="263" r:id="R0075517ffa2a4d52"/>
+    <p:sldId xmlns:r="http://schemas.openxmlformats.org/officeDocument/2006/relationships" id="264" r:id="R8f131c9a39e24d9d"/>
+    <p:sldId xmlns:r="http://schemas.openxmlformats.org/officeDocument/2006/relationships" id="265" r:id="R87bf877d1def4fd6"/>
+    <p:sldId xmlns:r="http://schemas.openxmlformats.org/officeDocument/2006/relationships" id="266" r:id="Rce76f90034f54df3"/>
+    <p:sldId xmlns:r="http://schemas.openxmlformats.org/officeDocument/2006/relationships" id="267" r:id="R9187a1bb8b314ff3"/>
+    <p:sldId xmlns:r="http://schemas.openxmlformats.org/officeDocument/2006/relationships" id="268" r:id="Ra7609bd5db2b4a5b"/>
+    <p:sldId xmlns:r="http://schemas.openxmlformats.org/officeDocument/2006/relationships" id="269" r:id="Rffb83240a0314b70"/>
+    <p:sldId xmlns:r="http://schemas.openxmlformats.org/officeDocument/2006/relationships" id="270" r:id="R3107b42aab254cc8"/>
+    <p:sldId xmlns:r="http://schemas.openxmlformats.org/officeDocument/2006/relationships" id="271" r:id="R077b4de2decc47cf"/>
+    <p:sldId xmlns:r="http://schemas.openxmlformats.org/officeDocument/2006/relationships" id="272" r:id="R3f1ac92b01c1454f"/>
+    <p:sldId xmlns:r="http://schemas.openxmlformats.org/officeDocument/2006/relationships" id="273" r:id="R33abe2d247704534"/>
+    <p:sldId xmlns:r="http://schemas.openxmlformats.org/officeDocument/2006/relationships" id="274" r:id="R2f4fd0d305314264"/>
+    <p:sldId xmlns:r="http://schemas.openxmlformats.org/officeDocument/2006/relationships" id="275" r:id="Rd1e3c4118f344175"/>
+    <p:sldId xmlns:r="http://schemas.openxmlformats.org/officeDocument/2006/relationships" id="276" r:id="Rf21b91f3f6de4ff7"/>
+    <p:sldId xmlns:r="http://schemas.openxmlformats.org/officeDocument/2006/relationships" id="277" r:id="R2622a11759d04d8c"/>
+    <p:sldId xmlns:r="http://schemas.openxmlformats.org/officeDocument/2006/relationships" id="278" r:id="Rb568964de7b94aff"/>
+    <p:sldId xmlns:r="http://schemas.openxmlformats.org/officeDocument/2006/relationships" id="279" r:id="Re17f88ffba6245e4"/>
+    <p:sldId xmlns:r="http://schemas.openxmlformats.org/officeDocument/2006/relationships" id="280" r:id="R5ca4713716374a93"/>
+    <p:sldId xmlns:r="http://schemas.openxmlformats.org/officeDocument/2006/relationships" id="281" r:id="R88029d2917ef462b"/>
+    <p:sldId xmlns:r="http://schemas.openxmlformats.org/officeDocument/2006/relationships" id="282" r:id="Reda2f0fa003047cd"/>
+    <p:sldId xmlns:r="http://schemas.openxmlformats.org/officeDocument/2006/relationships" id="283" r:id="R8d64b26262214ed3"/>
+    <p:sldId xmlns:r="http://schemas.openxmlformats.org/officeDocument/2006/relationships" id="284" r:id="Re7b6882c3cfc41ca"/>
+    <p:sldId xmlns:r="http://schemas.openxmlformats.org/officeDocument/2006/relationships" id="285" r:id="Rd98820eeb6b04478"/>
+    <p:sldId xmlns:r="http://schemas.openxmlformats.org/officeDocument/2006/relationships" id="286" r:id="R0bdc663102074189"/>
+    <p:sldId xmlns:r="http://schemas.openxmlformats.org/officeDocument/2006/relationships" id="287" r:id="R40b9590d7762439e"/>
+    <p:sldId xmlns:r="http://schemas.openxmlformats.org/officeDocument/2006/relationships" id="288" r:id="R276a70ff20d74a79"/>
+    <p:sldId xmlns:r="http://schemas.openxmlformats.org/officeDocument/2006/relationships" id="289" r:id="R9e29757849b34fb9"/>
+    <p:sldId xmlns:r="http://schemas.openxmlformats.org/officeDocument/2006/relationships" id="290" r:id="R67cf6037432c4bf3"/>
+    <p:sldId xmlns:r="http://schemas.openxmlformats.org/officeDocument/2006/relationships" id="291" r:id="Re34621b07d2e4a62"/>
+    <p:sldId xmlns:r="http://schemas.openxmlformats.org/officeDocument/2006/relationships" id="292" r:id="R85ee994c9213441d"/>
   </p:sldIdLst>
   <p:sldSz cx="12192000" cy="6858000"/>
   <p:notesSz cx="6858000" cy="9144000"/>
@@ -4501,7 +4501,7 @@
   </p:cSld>
   <p:clrMap bg1="lt1" tx1="dk1" bg2="lt2" tx2="dk2" accent1="accent1" accent2="accent2" accent3="accent3" accent4="accent4" accent5="accent5" accent6="accent6" hlink="hlink" folHlink="folHlink"/>
   <p:sldLayoutIdLst>
-    <p:sldLayoutId xmlns:r="http://schemas.openxmlformats.org/officeDocument/2006/relationships" id="2147483649" r:id="R3a1e07c63e6c4227"/>
+    <p:sldLayoutId xmlns:r="http://schemas.openxmlformats.org/officeDocument/2006/relationships" id="2147483649" r:id="R556ffbb976e94fb4"/>
   </p:sldLayoutIdLst>
   <p:txStyles>
     <p:titleStyle>
@@ -5080,6 +5080,7 @@
           <a:lstStyle xmlns:a="http://schemas.openxmlformats.org/drawingml/2006/main"/>
           <a:p xmlns:a="http://schemas.openxmlformats.org/drawingml/2006/main">
             <a:pPr algn="l">
+              <a:buNone/>
               <a:defRPr sz="1350" b="1">
                 <a:solidFill>
                   <a:srgbClr val="77A7FF"/>
@@ -5136,6 +5137,7 @@
           <a:lstStyle xmlns:a="http://schemas.openxmlformats.org/drawingml/2006/main"/>
           <a:p xmlns:a="http://schemas.openxmlformats.org/drawingml/2006/main">
             <a:pPr algn="l">
+              <a:buNone/>
               <a:defRPr sz="5250" b="1">
                 <a:solidFill>
                   <a:srgbClr val="FFFFFF"/>
@@ -5159,6 +5161,7 @@
           </a:p>
           <a:p xmlns:a="http://schemas.openxmlformats.org/drawingml/2006/main">
             <a:pPr algn="l">
+              <a:buNone/>
               <a:defRPr sz="5250" b="1">
                 <a:solidFill>
                   <a:srgbClr val="FFFFFF"/>
@@ -5215,6 +5218,7 @@
           <a:lstStyle xmlns:a="http://schemas.openxmlformats.org/drawingml/2006/main"/>
           <a:p xmlns:a="http://schemas.openxmlformats.org/drawingml/2006/main">
             <a:pPr algn="l">
+              <a:buNone/>
               <a:defRPr sz="2100" b="0">
                 <a:solidFill>
                   <a:srgbClr val="C4D0E0"/>
@@ -5300,6 +5304,7 @@
           <a:lstStyle xmlns:a="http://schemas.openxmlformats.org/drawingml/2006/main"/>
           <a:p xmlns:a="http://schemas.openxmlformats.org/drawingml/2006/main">
             <a:pPr algn="l">
+              <a:buNone/>
               <a:defRPr sz="1200" b="1">
                 <a:solidFill>
                   <a:srgbClr val="526174"/>
@@ -5356,6 +5361,7 @@
           <a:lstStyle xmlns:a="http://schemas.openxmlformats.org/drawingml/2006/main"/>
           <a:p xmlns:a="http://schemas.openxmlformats.org/drawingml/2006/main">
             <a:pPr algn="r">
+              <a:buNone/>
               <a:defRPr sz="1050" b="0">
                 <a:solidFill>
                   <a:srgbClr val="526174"/>
@@ -5412,17 +5418,21 @@
           <a:lstStyle xmlns:a="http://schemas.openxmlformats.org/drawingml/2006/main"/>
           <a:p xmlns:a="http://schemas.openxmlformats.org/drawingml/2006/main">
             <a:pPr algn="l">
-              <a:defRPr sz="3600" b="1">
-                <a:solidFill>
-                  <a:srgbClr val="111827"/>
-                </a:solidFill>
-                <a:latin typeface="Aptos"/>
-                <a:ea typeface="Aptos"/>
-                <a:cs typeface="Aptos"/>
-              </a:defRPr>
-            </a:pPr>
-            <a:r>
-              <a:rPr sz="3600" b="1">
+              <a:lnSpc>
+                <a:spcPct val="98000"/>
+              </a:lnSpc>
+              <a:buNone/>
+              <a:defRPr sz="3000" b="1">
+                <a:solidFill>
+                  <a:srgbClr val="111827"/>
+                </a:solidFill>
+                <a:latin typeface="Aptos"/>
+                <a:ea typeface="Aptos"/>
+                <a:cs typeface="Aptos"/>
+              </a:defRPr>
+            </a:pPr>
+            <a:r>
+              <a:rPr sz="3000" b="1">
                 <a:solidFill>
                   <a:srgbClr val="111827"/>
                 </a:solidFill>
@@ -5503,17 +5513,21 @@
           <a:lstStyle xmlns:a="http://schemas.openxmlformats.org/drawingml/2006/main"/>
           <a:p xmlns:a="http://schemas.openxmlformats.org/drawingml/2006/main">
             <a:pPr algn="l">
-              <a:defRPr sz="2100" b="1">
-                <a:solidFill>
-                  <a:srgbClr val="111827"/>
-                </a:solidFill>
-                <a:latin typeface="Aptos"/>
-                <a:ea typeface="Aptos"/>
-                <a:cs typeface="Aptos"/>
-              </a:defRPr>
-            </a:pPr>
-            <a:r>
-              <a:rPr sz="2100" b="1">
+              <a:lnSpc>
+                <a:spcPct val="108000"/>
+              </a:lnSpc>
+              <a:buNone/>
+              <a:defRPr sz="1575" b="1">
+                <a:solidFill>
+                  <a:srgbClr val="111827"/>
+                </a:solidFill>
+                <a:latin typeface="Aptos"/>
+                <a:ea typeface="Aptos"/>
+                <a:cs typeface="Aptos"/>
+              </a:defRPr>
+            </a:pPr>
+            <a:r>
+              <a:rPr sz="1575" b="1">
                 <a:solidFill>
                   <a:srgbClr val="111827"/>
                 </a:solidFill>
@@ -5559,17 +5573,21 @@
           <a:lstStyle xmlns:a="http://schemas.openxmlformats.org/drawingml/2006/main"/>
           <a:p xmlns:a="http://schemas.openxmlformats.org/drawingml/2006/main">
             <a:pPr algn="l">
-              <a:defRPr sz="1500" b="0">
-                <a:solidFill>
-                  <a:srgbClr val="526174"/>
-                </a:solidFill>
-                <a:latin typeface="Aptos"/>
-                <a:ea typeface="Aptos"/>
-                <a:cs typeface="Aptos"/>
-              </a:defRPr>
-            </a:pPr>
-            <a:r>
-              <a:rPr sz="1500" b="0">
+              <a:lnSpc>
+                <a:spcPct val="112000"/>
+              </a:lnSpc>
+              <a:buNone/>
+              <a:defRPr sz="1350" b="0">
+                <a:solidFill>
+                  <a:srgbClr val="526174"/>
+                </a:solidFill>
+                <a:latin typeface="Aptos"/>
+                <a:ea typeface="Aptos"/>
+                <a:cs typeface="Aptos"/>
+              </a:defRPr>
+            </a:pPr>
+            <a:r>
+              <a:rPr sz="1350" b="0">
                 <a:solidFill>
                   <a:srgbClr val="526174"/>
                 </a:solidFill>
@@ -5582,17 +5600,21 @@
           </a:p>
           <a:p xmlns:a="http://schemas.openxmlformats.org/drawingml/2006/main">
             <a:pPr algn="l">
-              <a:defRPr sz="1500" b="0">
-                <a:solidFill>
-                  <a:srgbClr val="526174"/>
-                </a:solidFill>
-                <a:latin typeface="Aptos"/>
-                <a:ea typeface="Aptos"/>
-                <a:cs typeface="Aptos"/>
-              </a:defRPr>
-            </a:pPr>
-            <a:r>
-              <a:rPr sz="1500" b="0">
+              <a:lnSpc>
+                <a:spcPct val="112000"/>
+              </a:lnSpc>
+              <a:buNone/>
+              <a:defRPr sz="1350" b="0">
+                <a:solidFill>
+                  <a:srgbClr val="526174"/>
+                </a:solidFill>
+                <a:latin typeface="Aptos"/>
+                <a:ea typeface="Aptos"/>
+                <a:cs typeface="Aptos"/>
+              </a:defRPr>
+            </a:pPr>
+            <a:r>
+              <a:rPr sz="1350" b="0">
                 <a:solidFill>
                   <a:srgbClr val="526174"/>
                 </a:solidFill>
@@ -5605,17 +5627,21 @@
           </a:p>
           <a:p xmlns:a="http://schemas.openxmlformats.org/drawingml/2006/main">
             <a:pPr algn="l">
-              <a:defRPr sz="1500" b="0">
-                <a:solidFill>
-                  <a:srgbClr val="526174"/>
-                </a:solidFill>
-                <a:latin typeface="Aptos"/>
-                <a:ea typeface="Aptos"/>
-                <a:cs typeface="Aptos"/>
-              </a:defRPr>
-            </a:pPr>
-            <a:r>
-              <a:rPr sz="1500" b="0">
+              <a:lnSpc>
+                <a:spcPct val="112000"/>
+              </a:lnSpc>
+              <a:buNone/>
+              <a:defRPr sz="1350" b="0">
+                <a:solidFill>
+                  <a:srgbClr val="526174"/>
+                </a:solidFill>
+                <a:latin typeface="Aptos"/>
+                <a:ea typeface="Aptos"/>
+                <a:cs typeface="Aptos"/>
+              </a:defRPr>
+            </a:pPr>
+            <a:r>
+              <a:rPr sz="1350" b="0">
                 <a:solidFill>
                   <a:srgbClr val="526174"/>
                 </a:solidFill>
@@ -5729,17 +5755,21 @@
           <a:lstStyle xmlns:a="http://schemas.openxmlformats.org/drawingml/2006/main"/>
           <a:p xmlns:a="http://schemas.openxmlformats.org/drawingml/2006/main">
             <a:pPr algn="l">
-              <a:defRPr sz="2100" b="1">
-                <a:solidFill>
-                  <a:srgbClr val="111827"/>
-                </a:solidFill>
-                <a:latin typeface="Aptos"/>
-                <a:ea typeface="Aptos"/>
-                <a:cs typeface="Aptos"/>
-              </a:defRPr>
-            </a:pPr>
-            <a:r>
-              <a:rPr sz="2100" b="1">
+              <a:lnSpc>
+                <a:spcPct val="108000"/>
+              </a:lnSpc>
+              <a:buNone/>
+              <a:defRPr sz="1575" b="1">
+                <a:solidFill>
+                  <a:srgbClr val="111827"/>
+                </a:solidFill>
+                <a:latin typeface="Aptos"/>
+                <a:ea typeface="Aptos"/>
+                <a:cs typeface="Aptos"/>
+              </a:defRPr>
+            </a:pPr>
+            <a:r>
+              <a:rPr sz="1575" b="1">
                 <a:solidFill>
                   <a:srgbClr val="111827"/>
                 </a:solidFill>
@@ -5785,17 +5815,21 @@
           <a:lstStyle xmlns:a="http://schemas.openxmlformats.org/drawingml/2006/main"/>
           <a:p xmlns:a="http://schemas.openxmlformats.org/drawingml/2006/main">
             <a:pPr algn="l">
-              <a:defRPr sz="1500" b="0">
-                <a:solidFill>
-                  <a:srgbClr val="526174"/>
-                </a:solidFill>
-                <a:latin typeface="Aptos"/>
-                <a:ea typeface="Aptos"/>
-                <a:cs typeface="Aptos"/>
-              </a:defRPr>
-            </a:pPr>
-            <a:r>
-              <a:rPr sz="1500" b="0">
+              <a:lnSpc>
+                <a:spcPct val="112000"/>
+              </a:lnSpc>
+              <a:buNone/>
+              <a:defRPr sz="1350" b="0">
+                <a:solidFill>
+                  <a:srgbClr val="526174"/>
+                </a:solidFill>
+                <a:latin typeface="Aptos"/>
+                <a:ea typeface="Aptos"/>
+                <a:cs typeface="Aptos"/>
+              </a:defRPr>
+            </a:pPr>
+            <a:r>
+              <a:rPr sz="1350" b="0">
                 <a:solidFill>
                   <a:srgbClr val="526174"/>
                 </a:solidFill>
@@ -5808,17 +5842,21 @@
           </a:p>
           <a:p xmlns:a="http://schemas.openxmlformats.org/drawingml/2006/main">
             <a:pPr algn="l">
-              <a:defRPr sz="1500" b="0">
-                <a:solidFill>
-                  <a:srgbClr val="526174"/>
-                </a:solidFill>
-                <a:latin typeface="Aptos"/>
-                <a:ea typeface="Aptos"/>
-                <a:cs typeface="Aptos"/>
-              </a:defRPr>
-            </a:pPr>
-            <a:r>
-              <a:rPr sz="1500" b="0">
+              <a:lnSpc>
+                <a:spcPct val="112000"/>
+              </a:lnSpc>
+              <a:buNone/>
+              <a:defRPr sz="1350" b="0">
+                <a:solidFill>
+                  <a:srgbClr val="526174"/>
+                </a:solidFill>
+                <a:latin typeface="Aptos"/>
+                <a:ea typeface="Aptos"/>
+                <a:cs typeface="Aptos"/>
+              </a:defRPr>
+            </a:pPr>
+            <a:r>
+              <a:rPr sz="1350" b="0">
                 <a:solidFill>
                   <a:srgbClr val="526174"/>
                 </a:solidFill>
@@ -5831,17 +5869,21 @@
           </a:p>
           <a:p xmlns:a="http://schemas.openxmlformats.org/drawingml/2006/main">
             <a:pPr algn="l">
-              <a:defRPr sz="1500" b="0">
-                <a:solidFill>
-                  <a:srgbClr val="526174"/>
-                </a:solidFill>
-                <a:latin typeface="Aptos"/>
-                <a:ea typeface="Aptos"/>
-                <a:cs typeface="Aptos"/>
-              </a:defRPr>
-            </a:pPr>
-            <a:r>
-              <a:rPr sz="1500" b="0">
+              <a:lnSpc>
+                <a:spcPct val="112000"/>
+              </a:lnSpc>
+              <a:buNone/>
+              <a:defRPr sz="1350" b="0">
+                <a:solidFill>
+                  <a:srgbClr val="526174"/>
+                </a:solidFill>
+                <a:latin typeface="Aptos"/>
+                <a:ea typeface="Aptos"/>
+                <a:cs typeface="Aptos"/>
+              </a:defRPr>
+            </a:pPr>
+            <a:r>
+              <a:rPr sz="1350" b="0">
                 <a:solidFill>
                   <a:srgbClr val="526174"/>
                 </a:solidFill>
@@ -5854,17 +5896,21 @@
           </a:p>
           <a:p xmlns:a="http://schemas.openxmlformats.org/drawingml/2006/main">
             <a:pPr algn="l">
-              <a:defRPr sz="1500" b="0">
-                <a:solidFill>
-                  <a:srgbClr val="526174"/>
-                </a:solidFill>
-                <a:latin typeface="Aptos"/>
-                <a:ea typeface="Aptos"/>
-                <a:cs typeface="Aptos"/>
-              </a:defRPr>
-            </a:pPr>
-            <a:r>
-              <a:rPr sz="1500" b="0">
+              <a:lnSpc>
+                <a:spcPct val="112000"/>
+              </a:lnSpc>
+              <a:buNone/>
+              <a:defRPr sz="1350" b="0">
+                <a:solidFill>
+                  <a:srgbClr val="526174"/>
+                </a:solidFill>
+                <a:latin typeface="Aptos"/>
+                <a:ea typeface="Aptos"/>
+                <a:cs typeface="Aptos"/>
+              </a:defRPr>
+            </a:pPr>
+            <a:r>
+              <a:rPr sz="1350" b="0">
                 <a:solidFill>
                   <a:srgbClr val="526174"/>
                 </a:solidFill>
@@ -5877,17 +5923,21 @@
           </a:p>
           <a:p xmlns:a="http://schemas.openxmlformats.org/drawingml/2006/main">
             <a:pPr algn="l">
-              <a:defRPr sz="1500" b="0">
-                <a:solidFill>
-                  <a:srgbClr val="526174"/>
-                </a:solidFill>
-                <a:latin typeface="Aptos"/>
-                <a:ea typeface="Aptos"/>
-                <a:cs typeface="Aptos"/>
-              </a:defRPr>
-            </a:pPr>
-            <a:r>
-              <a:rPr sz="1500" b="0">
+              <a:lnSpc>
+                <a:spcPct val="112000"/>
+              </a:lnSpc>
+              <a:buNone/>
+              <a:defRPr sz="1350" b="0">
+                <a:solidFill>
+                  <a:srgbClr val="526174"/>
+                </a:solidFill>
+                <a:latin typeface="Aptos"/>
+                <a:ea typeface="Aptos"/>
+                <a:cs typeface="Aptos"/>
+              </a:defRPr>
+            </a:pPr>
+            <a:r>
+              <a:rPr sz="1350" b="0">
                 <a:solidFill>
                   <a:srgbClr val="526174"/>
                 </a:solidFill>
@@ -6001,17 +6051,21 @@
           <a:lstStyle xmlns:a="http://schemas.openxmlformats.org/drawingml/2006/main"/>
           <a:p xmlns:a="http://schemas.openxmlformats.org/drawingml/2006/main">
             <a:pPr algn="l">
-              <a:defRPr sz="2100" b="1">
-                <a:solidFill>
-                  <a:srgbClr val="111827"/>
-                </a:solidFill>
-                <a:latin typeface="Aptos"/>
-                <a:ea typeface="Aptos"/>
-                <a:cs typeface="Aptos"/>
-              </a:defRPr>
-            </a:pPr>
-            <a:r>
-              <a:rPr sz="2100" b="1">
+              <a:lnSpc>
+                <a:spcPct val="108000"/>
+              </a:lnSpc>
+              <a:buNone/>
+              <a:defRPr sz="1575" b="1">
+                <a:solidFill>
+                  <a:srgbClr val="111827"/>
+                </a:solidFill>
+                <a:latin typeface="Aptos"/>
+                <a:ea typeface="Aptos"/>
+                <a:cs typeface="Aptos"/>
+              </a:defRPr>
+            </a:pPr>
+            <a:r>
+              <a:rPr sz="1575" b="1">
                 <a:solidFill>
                   <a:srgbClr val="111827"/>
                 </a:solidFill>
@@ -6057,17 +6111,21 @@
           <a:lstStyle xmlns:a="http://schemas.openxmlformats.org/drawingml/2006/main"/>
           <a:p xmlns:a="http://schemas.openxmlformats.org/drawingml/2006/main">
             <a:pPr algn="l">
-              <a:defRPr sz="1500" b="0">
-                <a:solidFill>
-                  <a:srgbClr val="526174"/>
-                </a:solidFill>
-                <a:latin typeface="Aptos"/>
-                <a:ea typeface="Aptos"/>
-                <a:cs typeface="Aptos"/>
-              </a:defRPr>
-            </a:pPr>
-            <a:r>
-              <a:rPr sz="1500" b="0">
+              <a:lnSpc>
+                <a:spcPct val="112000"/>
+              </a:lnSpc>
+              <a:buNone/>
+              <a:defRPr sz="1350" b="0">
+                <a:solidFill>
+                  <a:srgbClr val="526174"/>
+                </a:solidFill>
+                <a:latin typeface="Aptos"/>
+                <a:ea typeface="Aptos"/>
+                <a:cs typeface="Aptos"/>
+              </a:defRPr>
+            </a:pPr>
+            <a:r>
+              <a:rPr sz="1350" b="0">
                 <a:solidFill>
                   <a:srgbClr val="526174"/>
                 </a:solidFill>
@@ -6080,17 +6138,21 @@
           </a:p>
           <a:p xmlns:a="http://schemas.openxmlformats.org/drawingml/2006/main">
             <a:pPr algn="l">
-              <a:defRPr sz="1500" b="0">
-                <a:solidFill>
-                  <a:srgbClr val="526174"/>
-                </a:solidFill>
-                <a:latin typeface="Aptos"/>
-                <a:ea typeface="Aptos"/>
-                <a:cs typeface="Aptos"/>
-              </a:defRPr>
-            </a:pPr>
-            <a:r>
-              <a:rPr sz="1500" b="0">
+              <a:lnSpc>
+                <a:spcPct val="112000"/>
+              </a:lnSpc>
+              <a:buNone/>
+              <a:defRPr sz="1350" b="0">
+                <a:solidFill>
+                  <a:srgbClr val="526174"/>
+                </a:solidFill>
+                <a:latin typeface="Aptos"/>
+                <a:ea typeface="Aptos"/>
+                <a:cs typeface="Aptos"/>
+              </a:defRPr>
+            </a:pPr>
+            <a:r>
+              <a:rPr sz="1350" b="0">
                 <a:solidFill>
                   <a:srgbClr val="526174"/>
                 </a:solidFill>
@@ -6103,17 +6165,21 @@
           </a:p>
           <a:p xmlns:a="http://schemas.openxmlformats.org/drawingml/2006/main">
             <a:pPr algn="l">
-              <a:defRPr sz="1500" b="0">
-                <a:solidFill>
-                  <a:srgbClr val="526174"/>
-                </a:solidFill>
-                <a:latin typeface="Aptos"/>
-                <a:ea typeface="Aptos"/>
-                <a:cs typeface="Aptos"/>
-              </a:defRPr>
-            </a:pPr>
-            <a:r>
-              <a:rPr sz="1500" b="0">
+              <a:lnSpc>
+                <a:spcPct val="112000"/>
+              </a:lnSpc>
+              <a:buNone/>
+              <a:defRPr sz="1350" b="0">
+                <a:solidFill>
+                  <a:srgbClr val="526174"/>
+                </a:solidFill>
+                <a:latin typeface="Aptos"/>
+                <a:ea typeface="Aptos"/>
+                <a:cs typeface="Aptos"/>
+              </a:defRPr>
+            </a:pPr>
+            <a:r>
+              <a:rPr sz="1350" b="0">
                 <a:solidFill>
                   <a:srgbClr val="526174"/>
                 </a:solidFill>
@@ -6126,17 +6192,21 @@
           </a:p>
           <a:p xmlns:a="http://schemas.openxmlformats.org/drawingml/2006/main">
             <a:pPr algn="l">
-              <a:defRPr sz="1500" b="0">
-                <a:solidFill>
-                  <a:srgbClr val="526174"/>
-                </a:solidFill>
-                <a:latin typeface="Aptos"/>
-                <a:ea typeface="Aptos"/>
-                <a:cs typeface="Aptos"/>
-              </a:defRPr>
-            </a:pPr>
-            <a:r>
-              <a:rPr sz="1500" b="0">
+              <a:lnSpc>
+                <a:spcPct val="112000"/>
+              </a:lnSpc>
+              <a:buNone/>
+              <a:defRPr sz="1350" b="0">
+                <a:solidFill>
+                  <a:srgbClr val="526174"/>
+                </a:solidFill>
+                <a:latin typeface="Aptos"/>
+                <a:ea typeface="Aptos"/>
+                <a:cs typeface="Aptos"/>
+              </a:defRPr>
+            </a:pPr>
+            <a:r>
+              <a:rPr sz="1350" b="0">
                 <a:solidFill>
                   <a:srgbClr val="526174"/>
                 </a:solidFill>
@@ -6182,7 +6252,11 @@
           <a:lstStyle xmlns:a="http://schemas.openxmlformats.org/drawingml/2006/main"/>
           <a:p xmlns:a="http://schemas.openxmlformats.org/drawingml/2006/main">
             <a:pPr algn="l">
-              <a:defRPr sz="1950" b="1">
+              <a:lnSpc>
+                <a:spcPct val="105000"/>
+              </a:lnSpc>
+              <a:buNone/>
+              <a:defRPr sz="1500" b="1">
                 <a:solidFill>
                   <a:srgbClr val="0891B2"/>
                 </a:solidFill>
@@ -6192,7 +6266,7 @@
               </a:defRPr>
             </a:pPr>
             <a:r>
-              <a:rPr sz="1950" b="1">
+              <a:rPr sz="1500" b="1">
                 <a:solidFill>
                   <a:srgbClr val="0891B2"/>
                 </a:solidFill>
@@ -6267,6 +6341,7 @@
           <a:lstStyle xmlns:a="http://schemas.openxmlformats.org/drawingml/2006/main"/>
           <a:p xmlns:a="http://schemas.openxmlformats.org/drawingml/2006/main">
             <a:pPr algn="l">
+              <a:buNone/>
               <a:defRPr sz="1200" b="1">
                 <a:solidFill>
                   <a:srgbClr val="526174"/>
@@ -6323,6 +6398,7 @@
           <a:lstStyle xmlns:a="http://schemas.openxmlformats.org/drawingml/2006/main"/>
           <a:p xmlns:a="http://schemas.openxmlformats.org/drawingml/2006/main">
             <a:pPr algn="r">
+              <a:buNone/>
               <a:defRPr sz="1050" b="0">
                 <a:solidFill>
                   <a:srgbClr val="526174"/>
@@ -6379,6 +6455,7 @@
           <a:lstStyle xmlns:a="http://schemas.openxmlformats.org/drawingml/2006/main"/>
           <a:p xmlns:a="http://schemas.openxmlformats.org/drawingml/2006/main">
             <a:pPr algn="l">
+              <a:buNone/>
               <a:defRPr sz="3600" b="1">
                 <a:solidFill>
                   <a:srgbClr val="111827"/>
@@ -6505,6 +6582,7 @@
           <a:lstStyle xmlns:a="http://schemas.openxmlformats.org/drawingml/2006/main"/>
           <a:p xmlns:a="http://schemas.openxmlformats.org/drawingml/2006/main">
             <a:pPr algn="l">
+              <a:buNone/>
               <a:defRPr sz="2250" b="1">
                 <a:solidFill>
                   <a:srgbClr val="111827"/>
@@ -6561,6 +6639,7 @@
           <a:lstStyle xmlns:a="http://schemas.openxmlformats.org/drawingml/2006/main"/>
           <a:p xmlns:a="http://schemas.openxmlformats.org/drawingml/2006/main">
             <a:pPr algn="l">
+              <a:buNone/>
               <a:defRPr sz="1800" b="0">
                 <a:solidFill>
                   <a:srgbClr val="111827"/>
@@ -6589,6 +6668,7 @@
           </a:p>
           <a:p xmlns:a="http://schemas.openxmlformats.org/drawingml/2006/main">
             <a:pPr algn="l">
+              <a:buNone/>
               <a:defRPr sz="1800" b="0">
                 <a:solidFill>
                   <a:srgbClr val="111827"/>
@@ -6645,6 +6725,7 @@
           <a:lstStyle xmlns:a="http://schemas.openxmlformats.org/drawingml/2006/main"/>
           <a:p xmlns:a="http://schemas.openxmlformats.org/drawingml/2006/main">
             <a:pPr algn="l">
+              <a:buNone/>
               <a:defRPr sz="2250" b="1">
                 <a:solidFill>
                   <a:srgbClr val="111827"/>
@@ -6701,6 +6782,7 @@
           <a:lstStyle xmlns:a="http://schemas.openxmlformats.org/drawingml/2006/main"/>
           <a:p xmlns:a="http://schemas.openxmlformats.org/drawingml/2006/main">
             <a:pPr algn="l">
+              <a:buNone/>
               <a:defRPr sz="1800" b="0">
                 <a:solidFill>
                   <a:srgbClr val="111827"/>
@@ -6757,6 +6839,7 @@
           <a:lstStyle xmlns:a="http://schemas.openxmlformats.org/drawingml/2006/main"/>
           <a:p xmlns:a="http://schemas.openxmlformats.org/drawingml/2006/main">
             <a:pPr algn="ctr">
+              <a:buNone/>
               <a:defRPr sz="1800" b="1">
                 <a:solidFill>
                   <a:srgbClr val="B91C1C"/>
@@ -6842,6 +6925,7 @@
           <a:lstStyle xmlns:a="http://schemas.openxmlformats.org/drawingml/2006/main"/>
           <a:p xmlns:a="http://schemas.openxmlformats.org/drawingml/2006/main">
             <a:pPr algn="l">
+              <a:buNone/>
               <a:defRPr sz="1350" b="1">
                 <a:solidFill>
                   <a:srgbClr val="A7F3D0"/>
@@ -6898,6 +6982,7 @@
           <a:lstStyle xmlns:a="http://schemas.openxmlformats.org/drawingml/2006/main"/>
           <a:p xmlns:a="http://schemas.openxmlformats.org/drawingml/2006/main">
             <a:pPr algn="l">
+              <a:buNone/>
               <a:defRPr sz="5100" b="1">
                 <a:solidFill>
                   <a:srgbClr val="FFFFFF"/>
@@ -6954,6 +7039,7 @@
           <a:lstStyle xmlns:a="http://schemas.openxmlformats.org/drawingml/2006/main"/>
           <a:p xmlns:a="http://schemas.openxmlformats.org/drawingml/2006/main">
             <a:pPr algn="l">
+              <a:buNone/>
               <a:defRPr sz="2100" b="0">
                 <a:solidFill>
                   <a:srgbClr val="B8C5D6"/>
@@ -7039,6 +7125,7 @@
           <a:lstStyle xmlns:a="http://schemas.openxmlformats.org/drawingml/2006/main"/>
           <a:p xmlns:a="http://schemas.openxmlformats.org/drawingml/2006/main">
             <a:pPr algn="l">
+              <a:buNone/>
               <a:defRPr sz="1200" b="1">
                 <a:solidFill>
                   <a:srgbClr val="526174"/>
@@ -7095,6 +7182,7 @@
           <a:lstStyle xmlns:a="http://schemas.openxmlformats.org/drawingml/2006/main"/>
           <a:p xmlns:a="http://schemas.openxmlformats.org/drawingml/2006/main">
             <a:pPr algn="r">
+              <a:buNone/>
               <a:defRPr sz="1050" b="0">
                 <a:solidFill>
                   <a:srgbClr val="526174"/>
@@ -7151,6 +7239,7 @@
           <a:lstStyle xmlns:a="http://schemas.openxmlformats.org/drawingml/2006/main"/>
           <a:p xmlns:a="http://schemas.openxmlformats.org/drawingml/2006/main">
             <a:pPr algn="l">
+              <a:buNone/>
               <a:defRPr sz="3600" b="1">
                 <a:solidFill>
                   <a:srgbClr val="111827"/>
@@ -7242,6 +7331,7 @@
           <a:lstStyle xmlns:a="http://schemas.openxmlformats.org/drawingml/2006/main"/>
           <a:p xmlns:a="http://schemas.openxmlformats.org/drawingml/2006/main">
             <a:pPr algn="l">
+              <a:buNone/>
               <a:defRPr sz="2100" b="1">
                 <a:solidFill>
                   <a:srgbClr val="111827"/>
@@ -7298,6 +7388,7 @@
           <a:lstStyle xmlns:a="http://schemas.openxmlformats.org/drawingml/2006/main"/>
           <a:p xmlns:a="http://schemas.openxmlformats.org/drawingml/2006/main">
             <a:pPr algn="l">
+              <a:buNone/>
               <a:defRPr sz="1500" b="0">
                 <a:solidFill>
                   <a:srgbClr val="526174"/>
@@ -7321,6 +7412,7 @@
           </a:p>
           <a:p xmlns:a="http://schemas.openxmlformats.org/drawingml/2006/main">
             <a:pPr algn="l">
+              <a:buNone/>
               <a:defRPr sz="1500" b="0">
                 <a:solidFill>
                   <a:srgbClr val="526174"/>
@@ -7344,6 +7436,7 @@
           </a:p>
           <a:p xmlns:a="http://schemas.openxmlformats.org/drawingml/2006/main">
             <a:pPr algn="l">
+              <a:buNone/>
               <a:defRPr sz="1500" b="0">
                 <a:solidFill>
                   <a:srgbClr val="526174"/>
@@ -7367,6 +7460,7 @@
           </a:p>
           <a:p xmlns:a="http://schemas.openxmlformats.org/drawingml/2006/main">
             <a:pPr algn="l">
+              <a:buNone/>
               <a:defRPr sz="1500" b="0">
                 <a:solidFill>
                   <a:srgbClr val="526174"/>
@@ -7390,6 +7484,7 @@
           </a:p>
           <a:p xmlns:a="http://schemas.openxmlformats.org/drawingml/2006/main">
             <a:pPr algn="l">
+              <a:buNone/>
               <a:defRPr sz="1500" b="0">
                 <a:solidFill>
                   <a:srgbClr val="526174"/>
@@ -7514,6 +7609,7 @@
           <a:lstStyle xmlns:a="http://schemas.openxmlformats.org/drawingml/2006/main"/>
           <a:p xmlns:a="http://schemas.openxmlformats.org/drawingml/2006/main">
             <a:pPr algn="l">
+              <a:buNone/>
               <a:defRPr sz="2100" b="1">
                 <a:solidFill>
                   <a:srgbClr val="111827"/>
@@ -7570,6 +7666,7 @@
           <a:lstStyle xmlns:a="http://schemas.openxmlformats.org/drawingml/2006/main"/>
           <a:p xmlns:a="http://schemas.openxmlformats.org/drawingml/2006/main">
             <a:pPr algn="l">
+              <a:buNone/>
               <a:defRPr sz="1500" b="0">
                 <a:solidFill>
                   <a:srgbClr val="526174"/>
@@ -7593,6 +7690,7 @@
           </a:p>
           <a:p xmlns:a="http://schemas.openxmlformats.org/drawingml/2006/main">
             <a:pPr algn="l">
+              <a:buNone/>
               <a:defRPr sz="1500" b="0">
                 <a:solidFill>
                   <a:srgbClr val="526174"/>
@@ -7616,6 +7714,7 @@
           </a:p>
           <a:p xmlns:a="http://schemas.openxmlformats.org/drawingml/2006/main">
             <a:pPr algn="l">
+              <a:buNone/>
               <a:defRPr sz="1500" b="0">
                 <a:solidFill>
                   <a:srgbClr val="526174"/>
@@ -7639,6 +7738,7 @@
           </a:p>
           <a:p xmlns:a="http://schemas.openxmlformats.org/drawingml/2006/main">
             <a:pPr algn="l">
+              <a:buNone/>
               <a:defRPr sz="1500" b="0">
                 <a:solidFill>
                   <a:srgbClr val="526174"/>
@@ -7662,6 +7762,7 @@
           </a:p>
           <a:p xmlns:a="http://schemas.openxmlformats.org/drawingml/2006/main">
             <a:pPr algn="l">
+              <a:buNone/>
               <a:defRPr sz="1500" b="0">
                 <a:solidFill>
                   <a:srgbClr val="526174"/>
@@ -7718,6 +7819,7 @@
           <a:lstStyle xmlns:a="http://schemas.openxmlformats.org/drawingml/2006/main"/>
           <a:p xmlns:a="http://schemas.openxmlformats.org/drawingml/2006/main">
             <a:pPr algn="ctr">
+              <a:buNone/>
               <a:defRPr sz="1875" b="1">
                 <a:solidFill>
                   <a:srgbClr val="111827"/>
@@ -7803,6 +7905,7 @@
           <a:lstStyle xmlns:a="http://schemas.openxmlformats.org/drawingml/2006/main"/>
           <a:p xmlns:a="http://schemas.openxmlformats.org/drawingml/2006/main">
             <a:pPr algn="l">
+              <a:buNone/>
               <a:defRPr sz="1200" b="1">
                 <a:solidFill>
                   <a:srgbClr val="526174"/>
@@ -7859,6 +7962,7 @@
           <a:lstStyle xmlns:a="http://schemas.openxmlformats.org/drawingml/2006/main"/>
           <a:p xmlns:a="http://schemas.openxmlformats.org/drawingml/2006/main">
             <a:pPr algn="r">
+              <a:buNone/>
               <a:defRPr sz="1050" b="0">
                 <a:solidFill>
                   <a:srgbClr val="526174"/>
@@ -7915,17 +8019,21 @@
           <a:lstStyle xmlns:a="http://schemas.openxmlformats.org/drawingml/2006/main"/>
           <a:p xmlns:a="http://schemas.openxmlformats.org/drawingml/2006/main">
             <a:pPr algn="l">
-              <a:defRPr sz="3600" b="1">
-                <a:solidFill>
-                  <a:srgbClr val="111827"/>
-                </a:solidFill>
-                <a:latin typeface="Aptos"/>
-                <a:ea typeface="Aptos"/>
-                <a:cs typeface="Aptos"/>
-              </a:defRPr>
-            </a:pPr>
-            <a:r>
-              <a:rPr sz="3600" b="1">
+              <a:lnSpc>
+                <a:spcPct val="98000"/>
+              </a:lnSpc>
+              <a:buNone/>
+              <a:defRPr sz="3375" b="1">
+                <a:solidFill>
+                  <a:srgbClr val="111827"/>
+                </a:solidFill>
+                <a:latin typeface="Aptos"/>
+                <a:ea typeface="Aptos"/>
+                <a:cs typeface="Aptos"/>
+              </a:defRPr>
+            </a:pPr>
+            <a:r>
+              <a:rPr sz="3375" b="1">
                 <a:solidFill>
                   <a:srgbClr val="111827"/>
                 </a:solidFill>
@@ -7977,7 +8085,11 @@
           <a:lstStyle xmlns:a="http://schemas.openxmlformats.org/drawingml/2006/main"/>
           <a:p xmlns:a="http://schemas.openxmlformats.org/drawingml/2006/main">
             <a:pPr algn="ctr">
-              <a:defRPr sz="1350" b="1">
+              <a:lnSpc>
+                <a:spcPct val="108000"/>
+              </a:lnSpc>
+              <a:buNone/>
+              <a:defRPr sz="1275" b="1">
                 <a:solidFill>
                   <a:srgbClr val="2563EB"/>
                 </a:solidFill>
@@ -7987,7 +8099,7 @@
               </a:defRPr>
             </a:pPr>
             <a:r>
-              <a:rPr sz="1350" b="1">
+              <a:rPr sz="1275" b="1">
                 <a:solidFill>
                   <a:srgbClr val="2563EB"/>
                 </a:solidFill>
@@ -8033,7 +8145,11 @@
           <a:lstStyle xmlns:a="http://schemas.openxmlformats.org/drawingml/2006/main"/>
           <a:p xmlns:a="http://schemas.openxmlformats.org/drawingml/2006/main">
             <a:pPr algn="l">
-              <a:defRPr sz="1650" b="1">
+              <a:lnSpc>
+                <a:spcPct val="108000"/>
+              </a:lnSpc>
+              <a:buNone/>
+              <a:defRPr sz="1575" b="1">
                 <a:solidFill>
                   <a:srgbClr val="2563EB"/>
                 </a:solidFill>
@@ -8043,7 +8159,7 @@
               </a:defRPr>
             </a:pPr>
             <a:r>
-              <a:rPr sz="1650" b="1">
+              <a:rPr sz="1575" b="1">
                 <a:solidFill>
                   <a:srgbClr val="2563EB"/>
                 </a:solidFill>
@@ -8089,6 +8205,7 @@
           <a:lstStyle xmlns:a="http://schemas.openxmlformats.org/drawingml/2006/main"/>
           <a:p xmlns:a="http://schemas.openxmlformats.org/drawingml/2006/main">
             <a:pPr algn="l">
+              <a:buNone/>
               <a:defRPr sz="1725" b="0">
                 <a:solidFill>
                   <a:srgbClr val="111827"/>
@@ -8151,7 +8268,11 @@
           <a:lstStyle xmlns:a="http://schemas.openxmlformats.org/drawingml/2006/main"/>
           <a:p xmlns:a="http://schemas.openxmlformats.org/drawingml/2006/main">
             <a:pPr algn="ctr">
-              <a:defRPr sz="1350" b="1">
+              <a:lnSpc>
+                <a:spcPct val="108000"/>
+              </a:lnSpc>
+              <a:buNone/>
+              <a:defRPr sz="1275" b="1">
                 <a:solidFill>
                   <a:srgbClr val="15803D"/>
                 </a:solidFill>
@@ -8161,7 +8282,7 @@
               </a:defRPr>
             </a:pPr>
             <a:r>
-              <a:rPr sz="1350" b="1">
+              <a:rPr sz="1275" b="1">
                 <a:solidFill>
                   <a:srgbClr val="15803D"/>
                 </a:solidFill>
@@ -8207,7 +8328,11 @@
           <a:lstStyle xmlns:a="http://schemas.openxmlformats.org/drawingml/2006/main"/>
           <a:p xmlns:a="http://schemas.openxmlformats.org/drawingml/2006/main">
             <a:pPr algn="l">
-              <a:defRPr sz="1650" b="1">
+              <a:lnSpc>
+                <a:spcPct val="108000"/>
+              </a:lnSpc>
+              <a:buNone/>
+              <a:defRPr sz="1575" b="1">
                 <a:solidFill>
                   <a:srgbClr val="15803D"/>
                 </a:solidFill>
@@ -8217,7 +8342,7 @@
               </a:defRPr>
             </a:pPr>
             <a:r>
-              <a:rPr sz="1650" b="1">
+              <a:rPr sz="1575" b="1">
                 <a:solidFill>
                   <a:srgbClr val="15803D"/>
                 </a:solidFill>
@@ -8263,6 +8388,7 @@
           <a:lstStyle xmlns:a="http://schemas.openxmlformats.org/drawingml/2006/main"/>
           <a:p xmlns:a="http://schemas.openxmlformats.org/drawingml/2006/main">
             <a:pPr algn="l">
+              <a:buNone/>
               <a:defRPr sz="1725" b="0">
                 <a:solidFill>
                   <a:srgbClr val="111827"/>
@@ -8325,7 +8451,11 @@
           <a:lstStyle xmlns:a="http://schemas.openxmlformats.org/drawingml/2006/main"/>
           <a:p xmlns:a="http://schemas.openxmlformats.org/drawingml/2006/main">
             <a:pPr algn="ctr">
-              <a:defRPr sz="1350" b="1">
+              <a:lnSpc>
+                <a:spcPct val="108000"/>
+              </a:lnSpc>
+              <a:buNone/>
+              <a:defRPr sz="1275" b="1">
                 <a:solidFill>
                   <a:srgbClr val="2563EB"/>
                 </a:solidFill>
@@ -8335,7 +8465,7 @@
               </a:defRPr>
             </a:pPr>
             <a:r>
-              <a:rPr sz="1350" b="1">
+              <a:rPr sz="1275" b="1">
                 <a:solidFill>
                   <a:srgbClr val="2563EB"/>
                 </a:solidFill>
@@ -8381,7 +8511,11 @@
           <a:lstStyle xmlns:a="http://schemas.openxmlformats.org/drawingml/2006/main"/>
           <a:p xmlns:a="http://schemas.openxmlformats.org/drawingml/2006/main">
             <a:pPr algn="l">
-              <a:defRPr sz="1650" b="1">
+              <a:lnSpc>
+                <a:spcPct val="108000"/>
+              </a:lnSpc>
+              <a:buNone/>
+              <a:defRPr sz="1575" b="1">
                 <a:solidFill>
                   <a:srgbClr val="2563EB"/>
                 </a:solidFill>
@@ -8391,7 +8525,7 @@
               </a:defRPr>
             </a:pPr>
             <a:r>
-              <a:rPr sz="1650" b="1">
+              <a:rPr sz="1575" b="1">
                 <a:solidFill>
                   <a:srgbClr val="2563EB"/>
                 </a:solidFill>
@@ -8437,6 +8571,7 @@
           <a:lstStyle xmlns:a="http://schemas.openxmlformats.org/drawingml/2006/main"/>
           <a:p xmlns:a="http://schemas.openxmlformats.org/drawingml/2006/main">
             <a:pPr algn="l">
+              <a:buNone/>
               <a:defRPr sz="1725" b="0">
                 <a:solidFill>
                   <a:srgbClr val="111827"/>
@@ -8499,7 +8634,11 @@
           <a:lstStyle xmlns:a="http://schemas.openxmlformats.org/drawingml/2006/main"/>
           <a:p xmlns:a="http://schemas.openxmlformats.org/drawingml/2006/main">
             <a:pPr algn="ctr">
-              <a:defRPr sz="1350" b="1">
+              <a:lnSpc>
+                <a:spcPct val="108000"/>
+              </a:lnSpc>
+              <a:buNone/>
+              <a:defRPr sz="1275" b="1">
                 <a:solidFill>
                   <a:srgbClr val="15803D"/>
                 </a:solidFill>
@@ -8509,7 +8648,7 @@
               </a:defRPr>
             </a:pPr>
             <a:r>
-              <a:rPr sz="1350" b="1">
+              <a:rPr sz="1275" b="1">
                 <a:solidFill>
                   <a:srgbClr val="15803D"/>
                 </a:solidFill>
@@ -8555,7 +8694,11 @@
           <a:lstStyle xmlns:a="http://schemas.openxmlformats.org/drawingml/2006/main"/>
           <a:p xmlns:a="http://schemas.openxmlformats.org/drawingml/2006/main">
             <a:pPr algn="l">
-              <a:defRPr sz="1650" b="1">
+              <a:lnSpc>
+                <a:spcPct val="108000"/>
+              </a:lnSpc>
+              <a:buNone/>
+              <a:defRPr sz="1575" b="1">
                 <a:solidFill>
                   <a:srgbClr val="15803D"/>
                 </a:solidFill>
@@ -8565,7 +8708,7 @@
               </a:defRPr>
             </a:pPr>
             <a:r>
-              <a:rPr sz="1650" b="1">
+              <a:rPr sz="1575" b="1">
                 <a:solidFill>
                   <a:srgbClr val="15803D"/>
                 </a:solidFill>
@@ -8611,6 +8754,7 @@
           <a:lstStyle xmlns:a="http://schemas.openxmlformats.org/drawingml/2006/main"/>
           <a:p xmlns:a="http://schemas.openxmlformats.org/drawingml/2006/main">
             <a:pPr algn="l">
+              <a:buNone/>
               <a:defRPr sz="1725" b="0">
                 <a:solidFill>
                   <a:srgbClr val="111827"/>
@@ -8696,6 +8840,7 @@
           <a:lstStyle xmlns:a="http://schemas.openxmlformats.org/drawingml/2006/main"/>
           <a:p xmlns:a="http://schemas.openxmlformats.org/drawingml/2006/main">
             <a:pPr algn="l">
+              <a:buNone/>
               <a:defRPr sz="1200" b="1">
                 <a:solidFill>
                   <a:srgbClr val="526174"/>
@@ -8752,6 +8897,7 @@
           <a:lstStyle xmlns:a="http://schemas.openxmlformats.org/drawingml/2006/main"/>
           <a:p xmlns:a="http://schemas.openxmlformats.org/drawingml/2006/main">
             <a:pPr algn="r">
+              <a:buNone/>
               <a:defRPr sz="1050" b="0">
                 <a:solidFill>
                   <a:srgbClr val="526174"/>
@@ -8808,6 +8954,7 @@
           <a:lstStyle xmlns:a="http://schemas.openxmlformats.org/drawingml/2006/main"/>
           <a:p xmlns:a="http://schemas.openxmlformats.org/drawingml/2006/main">
             <a:pPr algn="l">
+              <a:buNone/>
               <a:defRPr sz="3600" b="1">
                 <a:solidFill>
                   <a:srgbClr val="111827"/>
@@ -8934,6 +9081,7 @@
           <a:lstStyle xmlns:a="http://schemas.openxmlformats.org/drawingml/2006/main"/>
           <a:p xmlns:a="http://schemas.openxmlformats.org/drawingml/2006/main">
             <a:pPr algn="l">
+              <a:buNone/>
               <a:defRPr sz="2250" b="1">
                 <a:solidFill>
                   <a:srgbClr val="111827"/>
@@ -8990,6 +9138,7 @@
           <a:lstStyle xmlns:a="http://schemas.openxmlformats.org/drawingml/2006/main"/>
           <a:p xmlns:a="http://schemas.openxmlformats.org/drawingml/2006/main">
             <a:pPr algn="l">
+              <a:buNone/>
               <a:defRPr sz="1800" b="0">
                 <a:solidFill>
                   <a:srgbClr val="111827"/>
@@ -9013,6 +9162,7 @@
           </a:p>
           <a:p xmlns:a="http://schemas.openxmlformats.org/drawingml/2006/main">
             <a:pPr algn="l">
+              <a:buNone/>
               <a:defRPr sz="1800" b="0">
                 <a:solidFill>
                   <a:srgbClr val="111827"/>
@@ -9036,6 +9186,7 @@
           </a:p>
           <a:p xmlns:a="http://schemas.openxmlformats.org/drawingml/2006/main">
             <a:pPr algn="l">
+              <a:buNone/>
               <a:defRPr sz="1800" b="0">
                 <a:solidFill>
                   <a:srgbClr val="111827"/>
@@ -9059,6 +9210,7 @@
           </a:p>
           <a:p xmlns:a="http://schemas.openxmlformats.org/drawingml/2006/main">
             <a:pPr algn="l">
+              <a:buNone/>
               <a:defRPr sz="1800" b="0">
                 <a:solidFill>
                   <a:srgbClr val="111827"/>
@@ -9115,6 +9267,7 @@
           <a:lstStyle xmlns:a="http://schemas.openxmlformats.org/drawingml/2006/main"/>
           <a:p xmlns:a="http://schemas.openxmlformats.org/drawingml/2006/main">
             <a:pPr algn="l">
+              <a:buNone/>
               <a:defRPr sz="2250" b="1">
                 <a:solidFill>
                   <a:srgbClr val="111827"/>
@@ -9171,6 +9324,7 @@
           <a:lstStyle xmlns:a="http://schemas.openxmlformats.org/drawingml/2006/main"/>
           <a:p xmlns:a="http://schemas.openxmlformats.org/drawingml/2006/main">
             <a:pPr algn="l">
+              <a:buNone/>
               <a:defRPr sz="1800" b="0">
                 <a:solidFill>
                   <a:srgbClr val="111827"/>
@@ -9194,6 +9348,7 @@
           </a:p>
           <a:p xmlns:a="http://schemas.openxmlformats.org/drawingml/2006/main">
             <a:pPr algn="l">
+              <a:buNone/>
               <a:defRPr sz="1800" b="0">
                 <a:solidFill>
                   <a:srgbClr val="111827"/>
@@ -9217,6 +9372,7 @@
           </a:p>
           <a:p xmlns:a="http://schemas.openxmlformats.org/drawingml/2006/main">
             <a:pPr algn="l">
+              <a:buNone/>
               <a:defRPr sz="1800" b="0">
                 <a:solidFill>
                   <a:srgbClr val="111827"/>
@@ -9240,6 +9396,7 @@
           </a:p>
           <a:p xmlns:a="http://schemas.openxmlformats.org/drawingml/2006/main">
             <a:pPr algn="l">
+              <a:buNone/>
               <a:defRPr sz="1800" b="0">
                 <a:solidFill>
                   <a:srgbClr val="111827"/>
@@ -9263,6 +9420,7 @@
           </a:p>
           <a:p xmlns:a="http://schemas.openxmlformats.org/drawingml/2006/main">
             <a:pPr algn="l">
+              <a:buNone/>
               <a:defRPr sz="1800" b="0">
                 <a:solidFill>
                   <a:srgbClr val="111827"/>
@@ -9348,6 +9506,7 @@
           <a:lstStyle xmlns:a="http://schemas.openxmlformats.org/drawingml/2006/main"/>
           <a:p xmlns:a="http://schemas.openxmlformats.org/drawingml/2006/main">
             <a:pPr algn="l">
+              <a:buNone/>
               <a:defRPr sz="1200" b="1">
                 <a:solidFill>
                   <a:srgbClr val="526174"/>
@@ -9404,6 +9563,7 @@
           <a:lstStyle xmlns:a="http://schemas.openxmlformats.org/drawingml/2006/main"/>
           <a:p xmlns:a="http://schemas.openxmlformats.org/drawingml/2006/main">
             <a:pPr algn="r">
+              <a:buNone/>
               <a:defRPr sz="1050" b="0">
                 <a:solidFill>
                   <a:srgbClr val="526174"/>
@@ -9460,17 +9620,21 @@
           <a:lstStyle xmlns:a="http://schemas.openxmlformats.org/drawingml/2006/main"/>
           <a:p xmlns:a="http://schemas.openxmlformats.org/drawingml/2006/main">
             <a:pPr algn="l">
-              <a:defRPr sz="3600" b="1">
-                <a:solidFill>
-                  <a:srgbClr val="111827"/>
-                </a:solidFill>
-                <a:latin typeface="Aptos"/>
-                <a:ea typeface="Aptos"/>
-                <a:cs typeface="Aptos"/>
-              </a:defRPr>
-            </a:pPr>
-            <a:r>
-              <a:rPr sz="3600" b="1">
+              <a:lnSpc>
+                <a:spcPct val="98000"/>
+              </a:lnSpc>
+              <a:buNone/>
+              <a:defRPr sz="3000" b="1">
+                <a:solidFill>
+                  <a:srgbClr val="111827"/>
+                </a:solidFill>
+                <a:latin typeface="Aptos"/>
+                <a:ea typeface="Aptos"/>
+                <a:cs typeface="Aptos"/>
+              </a:defRPr>
+            </a:pPr>
+            <a:r>
+              <a:rPr sz="3000" b="1">
                 <a:solidFill>
                   <a:srgbClr val="111827"/>
                 </a:solidFill>
@@ -9516,6 +9680,7 @@
           <a:lstStyle xmlns:a="http://schemas.openxmlformats.org/drawingml/2006/main"/>
           <a:p xmlns:a="http://schemas.openxmlformats.org/drawingml/2006/main">
             <a:pPr algn="ctr">
+              <a:buNone/>
               <a:defRPr sz="9000" b="1">
                 <a:solidFill>
                   <a:srgbClr val="B91C1C"/>
@@ -9572,7 +9737,11 @@
           <a:lstStyle xmlns:a="http://schemas.openxmlformats.org/drawingml/2006/main"/>
           <a:p xmlns:a="http://schemas.openxmlformats.org/drawingml/2006/main">
             <a:pPr algn="ctr">
-              <a:defRPr sz="2100" b="1">
+              <a:lnSpc>
+                <a:spcPct val="108000"/>
+              </a:lnSpc>
+              <a:buNone/>
+              <a:defRPr sz="1575" b="1">
                 <a:solidFill>
                   <a:srgbClr val="B91C1C"/>
                 </a:solidFill>
@@ -9582,7 +9751,7 @@
               </a:defRPr>
             </a:pPr>
             <a:r>
-              <a:rPr sz="2100" b="1">
+              <a:rPr sz="1575" b="1">
                 <a:solidFill>
                   <a:srgbClr val="B91C1C"/>
                 </a:solidFill>
@@ -9661,6 +9830,7 @@
           <a:lstStyle xmlns:a="http://schemas.openxmlformats.org/drawingml/2006/main"/>
           <a:p xmlns:a="http://schemas.openxmlformats.org/drawingml/2006/main">
             <a:pPr algn="ctr">
+              <a:buNone/>
               <a:defRPr sz="9000" b="1">
                 <a:solidFill>
                   <a:srgbClr val="D97706"/>
@@ -9717,7 +9887,11 @@
           <a:lstStyle xmlns:a="http://schemas.openxmlformats.org/drawingml/2006/main"/>
           <a:p xmlns:a="http://schemas.openxmlformats.org/drawingml/2006/main">
             <a:pPr algn="ctr">
-              <a:defRPr sz="2100" b="1">
+              <a:lnSpc>
+                <a:spcPct val="108000"/>
+              </a:lnSpc>
+              <a:buNone/>
+              <a:defRPr sz="1575" b="1">
                 <a:solidFill>
                   <a:srgbClr val="D97706"/>
                 </a:solidFill>
@@ -9727,7 +9901,7 @@
               </a:defRPr>
             </a:pPr>
             <a:r>
-              <a:rPr sz="2100" b="1">
+              <a:rPr sz="1575" b="1">
                 <a:solidFill>
                   <a:srgbClr val="D97706"/>
                 </a:solidFill>
@@ -9808,17 +9982,21 @@
           <a:lstStyle xmlns:a="http://schemas.openxmlformats.org/drawingml/2006/main"/>
           <a:p xmlns:a="http://schemas.openxmlformats.org/drawingml/2006/main">
             <a:pPr algn="l">
-              <a:defRPr sz="2100" b="1">
-                <a:solidFill>
-                  <a:srgbClr val="111827"/>
-                </a:solidFill>
-                <a:latin typeface="Aptos"/>
-                <a:ea typeface="Aptos"/>
-                <a:cs typeface="Aptos"/>
-              </a:defRPr>
-            </a:pPr>
-            <a:r>
-              <a:rPr sz="2100" b="1">
+              <a:lnSpc>
+                <a:spcPct val="108000"/>
+              </a:lnSpc>
+              <a:buNone/>
+              <a:defRPr sz="1575" b="1">
+                <a:solidFill>
+                  <a:srgbClr val="111827"/>
+                </a:solidFill>
+                <a:latin typeface="Aptos"/>
+                <a:ea typeface="Aptos"/>
+                <a:cs typeface="Aptos"/>
+              </a:defRPr>
+            </a:pPr>
+            <a:r>
+              <a:rPr sz="1575" b="1">
                 <a:solidFill>
                   <a:srgbClr val="111827"/>
                 </a:solidFill>
@@ -9864,17 +10042,21 @@
           <a:lstStyle xmlns:a="http://schemas.openxmlformats.org/drawingml/2006/main"/>
           <a:p xmlns:a="http://schemas.openxmlformats.org/drawingml/2006/main">
             <a:pPr algn="l">
-              <a:defRPr sz="1500" b="0">
-                <a:solidFill>
-                  <a:srgbClr val="526174"/>
-                </a:solidFill>
-                <a:latin typeface="Aptos"/>
-                <a:ea typeface="Aptos"/>
-                <a:cs typeface="Aptos"/>
-              </a:defRPr>
-            </a:pPr>
-            <a:r>
-              <a:rPr sz="1500" b="0">
+              <a:lnSpc>
+                <a:spcPct val="112000"/>
+              </a:lnSpc>
+              <a:buNone/>
+              <a:defRPr sz="1350" b="0">
+                <a:solidFill>
+                  <a:srgbClr val="526174"/>
+                </a:solidFill>
+                <a:latin typeface="Aptos"/>
+                <a:ea typeface="Aptos"/>
+                <a:cs typeface="Aptos"/>
+              </a:defRPr>
+            </a:pPr>
+            <a:r>
+              <a:rPr sz="1350" b="0">
                 <a:solidFill>
                   <a:srgbClr val="526174"/>
                 </a:solidFill>
@@ -9920,17 +10102,21 @@
           <a:lstStyle xmlns:a="http://schemas.openxmlformats.org/drawingml/2006/main"/>
           <a:p xmlns:a="http://schemas.openxmlformats.org/drawingml/2006/main">
             <a:pPr algn="ctr">
-              <a:defRPr sz="2550" b="1">
-                <a:solidFill>
-                  <a:srgbClr val="111827"/>
-                </a:solidFill>
-                <a:latin typeface="Aptos"/>
-                <a:ea typeface="Aptos"/>
-                <a:cs typeface="Aptos"/>
-              </a:defRPr>
-            </a:pPr>
-            <a:r>
-              <a:rPr sz="2550" b="1">
+              <a:lnSpc>
+                <a:spcPct val="105000"/>
+              </a:lnSpc>
+              <a:buNone/>
+              <a:defRPr sz="1500" b="1">
+                <a:solidFill>
+                  <a:srgbClr val="111827"/>
+                </a:solidFill>
+                <a:latin typeface="Aptos"/>
+                <a:ea typeface="Aptos"/>
+                <a:cs typeface="Aptos"/>
+              </a:defRPr>
+            </a:pPr>
+            <a:r>
+              <a:rPr sz="1500" b="1">
                 <a:solidFill>
                   <a:srgbClr val="111827"/>
                 </a:solidFill>
@@ -10005,6 +10191,7 @@
           <a:lstStyle xmlns:a="http://schemas.openxmlformats.org/drawingml/2006/main"/>
           <a:p xmlns:a="http://schemas.openxmlformats.org/drawingml/2006/main">
             <a:pPr algn="l">
+              <a:buNone/>
               <a:defRPr sz="1200" b="1">
                 <a:solidFill>
                   <a:srgbClr val="526174"/>
@@ -10061,6 +10248,7 @@
           <a:lstStyle xmlns:a="http://schemas.openxmlformats.org/drawingml/2006/main"/>
           <a:p xmlns:a="http://schemas.openxmlformats.org/drawingml/2006/main">
             <a:pPr algn="r">
+              <a:buNone/>
               <a:defRPr sz="1050" b="0">
                 <a:solidFill>
                   <a:srgbClr val="526174"/>
@@ -10117,6 +10305,7 @@
           <a:lstStyle xmlns:a="http://schemas.openxmlformats.org/drawingml/2006/main"/>
           <a:p xmlns:a="http://schemas.openxmlformats.org/drawingml/2006/main">
             <a:pPr algn="l">
+              <a:buNone/>
               <a:defRPr sz="3600" b="1">
                 <a:solidFill>
                   <a:srgbClr val="111827"/>
@@ -10208,6 +10397,7 @@
           <a:lstStyle xmlns:a="http://schemas.openxmlformats.org/drawingml/2006/main"/>
           <a:p xmlns:a="http://schemas.openxmlformats.org/drawingml/2006/main">
             <a:pPr algn="l">
+              <a:buNone/>
               <a:defRPr sz="2100" b="1">
                 <a:solidFill>
                   <a:srgbClr val="2563EB"/>
@@ -10264,6 +10454,7 @@
           <a:lstStyle xmlns:a="http://schemas.openxmlformats.org/drawingml/2006/main"/>
           <a:p xmlns:a="http://schemas.openxmlformats.org/drawingml/2006/main">
             <a:pPr algn="l">
+              <a:buNone/>
               <a:defRPr sz="1575" b="0">
                 <a:solidFill>
                   <a:srgbClr val="111827"/>
@@ -10355,6 +10546,7 @@
           <a:lstStyle xmlns:a="http://schemas.openxmlformats.org/drawingml/2006/main"/>
           <a:p xmlns:a="http://schemas.openxmlformats.org/drawingml/2006/main">
             <a:pPr algn="l">
+              <a:buNone/>
               <a:defRPr sz="2100" b="1">
                 <a:solidFill>
                   <a:srgbClr val="15803D"/>
@@ -10411,6 +10603,7 @@
           <a:lstStyle xmlns:a="http://schemas.openxmlformats.org/drawingml/2006/main"/>
           <a:p xmlns:a="http://schemas.openxmlformats.org/drawingml/2006/main">
             <a:pPr algn="l">
+              <a:buNone/>
               <a:defRPr sz="1575" b="0">
                 <a:solidFill>
                   <a:srgbClr val="111827"/>
@@ -10502,6 +10695,7 @@
           <a:lstStyle xmlns:a="http://schemas.openxmlformats.org/drawingml/2006/main"/>
           <a:p xmlns:a="http://schemas.openxmlformats.org/drawingml/2006/main">
             <a:pPr algn="l">
+              <a:buNone/>
               <a:defRPr sz="2100" b="1">
                 <a:solidFill>
                   <a:srgbClr val="D97706"/>
@@ -10558,6 +10752,7 @@
           <a:lstStyle xmlns:a="http://schemas.openxmlformats.org/drawingml/2006/main"/>
           <a:p xmlns:a="http://schemas.openxmlformats.org/drawingml/2006/main">
             <a:pPr algn="l">
+              <a:buNone/>
               <a:defRPr sz="1575" b="0">
                 <a:solidFill>
                   <a:srgbClr val="111827"/>
@@ -10649,6 +10844,7 @@
           <a:lstStyle xmlns:a="http://schemas.openxmlformats.org/drawingml/2006/main"/>
           <a:p xmlns:a="http://schemas.openxmlformats.org/drawingml/2006/main">
             <a:pPr algn="l">
+              <a:buNone/>
               <a:defRPr sz="2100" b="1">
                 <a:solidFill>
                   <a:srgbClr val="7C3AED"/>
@@ -10705,6 +10901,7 @@
           <a:lstStyle xmlns:a="http://schemas.openxmlformats.org/drawingml/2006/main"/>
           <a:p xmlns:a="http://schemas.openxmlformats.org/drawingml/2006/main">
             <a:pPr algn="l">
+              <a:buNone/>
               <a:defRPr sz="1575" b="0">
                 <a:solidFill>
                   <a:srgbClr val="111827"/>
@@ -10790,6 +10987,7 @@
           <a:lstStyle xmlns:a="http://schemas.openxmlformats.org/drawingml/2006/main"/>
           <a:p xmlns:a="http://schemas.openxmlformats.org/drawingml/2006/main">
             <a:pPr algn="l">
+              <a:buNone/>
               <a:defRPr sz="1200" b="1">
                 <a:solidFill>
                   <a:srgbClr val="526174"/>
@@ -10846,6 +11044,7 @@
           <a:lstStyle xmlns:a="http://schemas.openxmlformats.org/drawingml/2006/main"/>
           <a:p xmlns:a="http://schemas.openxmlformats.org/drawingml/2006/main">
             <a:pPr algn="r">
+              <a:buNone/>
               <a:defRPr sz="1050" b="0">
                 <a:solidFill>
                   <a:srgbClr val="526174"/>
@@ -10902,6 +11101,7 @@
           <a:lstStyle xmlns:a="http://schemas.openxmlformats.org/drawingml/2006/main"/>
           <a:p xmlns:a="http://schemas.openxmlformats.org/drawingml/2006/main">
             <a:pPr algn="l">
+              <a:buNone/>
               <a:defRPr sz="3600" b="1">
                 <a:solidFill>
                   <a:srgbClr val="111827"/>
@@ -10993,6 +11193,7 @@
           <a:lstStyle xmlns:a="http://schemas.openxmlformats.org/drawingml/2006/main"/>
           <a:p xmlns:a="http://schemas.openxmlformats.org/drawingml/2006/main">
             <a:pPr algn="ctr">
+              <a:buNone/>
               <a:defRPr sz="1950" b="1">
                 <a:solidFill>
                   <a:srgbClr val="2563EB"/>
@@ -11049,6 +11250,7 @@
           <a:lstStyle xmlns:a="http://schemas.openxmlformats.org/drawingml/2006/main"/>
           <a:p xmlns:a="http://schemas.openxmlformats.org/drawingml/2006/main">
             <a:pPr algn="ctr">
+              <a:buNone/>
               <a:defRPr sz="1500" b="0">
                 <a:solidFill>
                   <a:srgbClr val="111827"/>
@@ -11140,6 +11342,7 @@
           <a:lstStyle xmlns:a="http://schemas.openxmlformats.org/drawingml/2006/main"/>
           <a:p xmlns:a="http://schemas.openxmlformats.org/drawingml/2006/main">
             <a:pPr algn="ctr">
+              <a:buNone/>
               <a:defRPr sz="1950" b="1">
                 <a:solidFill>
                   <a:srgbClr val="0891B2"/>
@@ -11196,6 +11399,7 @@
           <a:lstStyle xmlns:a="http://schemas.openxmlformats.org/drawingml/2006/main"/>
           <a:p xmlns:a="http://schemas.openxmlformats.org/drawingml/2006/main">
             <a:pPr algn="ctr">
+              <a:buNone/>
               <a:defRPr sz="1500" b="0">
                 <a:solidFill>
                   <a:srgbClr val="111827"/>
@@ -11287,6 +11491,7 @@
           <a:lstStyle xmlns:a="http://schemas.openxmlformats.org/drawingml/2006/main"/>
           <a:p xmlns:a="http://schemas.openxmlformats.org/drawingml/2006/main">
             <a:pPr algn="ctr">
+              <a:buNone/>
               <a:defRPr sz="1950" b="1">
                 <a:solidFill>
                   <a:srgbClr val="7C3AED"/>
@@ -11343,6 +11548,7 @@
           <a:lstStyle xmlns:a="http://schemas.openxmlformats.org/drawingml/2006/main"/>
           <a:p xmlns:a="http://schemas.openxmlformats.org/drawingml/2006/main">
             <a:pPr algn="ctr">
+              <a:buNone/>
               <a:defRPr sz="1500" b="0">
                 <a:solidFill>
                   <a:srgbClr val="111827"/>
@@ -11434,6 +11640,7 @@
           <a:lstStyle xmlns:a="http://schemas.openxmlformats.org/drawingml/2006/main"/>
           <a:p xmlns:a="http://schemas.openxmlformats.org/drawingml/2006/main">
             <a:pPr algn="ctr">
+              <a:buNone/>
               <a:defRPr sz="1950" b="1">
                 <a:solidFill>
                   <a:srgbClr val="15803D"/>
@@ -11490,6 +11697,7 @@
           <a:lstStyle xmlns:a="http://schemas.openxmlformats.org/drawingml/2006/main"/>
           <a:p xmlns:a="http://schemas.openxmlformats.org/drawingml/2006/main">
             <a:pPr algn="ctr">
+              <a:buNone/>
               <a:defRPr sz="1500" b="0">
                 <a:solidFill>
                   <a:srgbClr val="111827"/>
@@ -11546,6 +11754,7 @@
           <a:lstStyle xmlns:a="http://schemas.openxmlformats.org/drawingml/2006/main"/>
           <a:p xmlns:a="http://schemas.openxmlformats.org/drawingml/2006/main">
             <a:pPr algn="ctr">
+              <a:buNone/>
               <a:defRPr sz="1950" b="1">
                 <a:solidFill>
                   <a:srgbClr val="111827"/>
@@ -11631,6 +11840,7 @@
           <a:lstStyle xmlns:a="http://schemas.openxmlformats.org/drawingml/2006/main"/>
           <a:p xmlns:a="http://schemas.openxmlformats.org/drawingml/2006/main">
             <a:pPr algn="l">
+              <a:buNone/>
               <a:defRPr sz="1350" b="1">
                 <a:solidFill>
                   <a:srgbClr val="FDE68A"/>
@@ -11687,6 +11897,7 @@
           <a:lstStyle xmlns:a="http://schemas.openxmlformats.org/drawingml/2006/main"/>
           <a:p xmlns:a="http://schemas.openxmlformats.org/drawingml/2006/main">
             <a:pPr algn="l">
+              <a:buNone/>
               <a:defRPr sz="5100" b="1">
                 <a:solidFill>
                   <a:srgbClr val="FFFFFF"/>
@@ -11743,6 +11954,7 @@
           <a:lstStyle xmlns:a="http://schemas.openxmlformats.org/drawingml/2006/main"/>
           <a:p xmlns:a="http://schemas.openxmlformats.org/drawingml/2006/main">
             <a:pPr algn="l">
+              <a:buNone/>
               <a:defRPr sz="2100" b="0">
                 <a:solidFill>
                   <a:srgbClr val="B8C5D6"/>
@@ -11828,6 +12040,7 @@
           <a:lstStyle xmlns:a="http://schemas.openxmlformats.org/drawingml/2006/main"/>
           <a:p xmlns:a="http://schemas.openxmlformats.org/drawingml/2006/main">
             <a:pPr algn="l">
+              <a:buNone/>
               <a:defRPr sz="1200" b="1">
                 <a:solidFill>
                   <a:srgbClr val="526174"/>
@@ -11884,6 +12097,7 @@
           <a:lstStyle xmlns:a="http://schemas.openxmlformats.org/drawingml/2006/main"/>
           <a:p xmlns:a="http://schemas.openxmlformats.org/drawingml/2006/main">
             <a:pPr algn="r">
+              <a:buNone/>
               <a:defRPr sz="1050" b="0">
                 <a:solidFill>
                   <a:srgbClr val="526174"/>
@@ -11940,6 +12154,7 @@
           <a:lstStyle xmlns:a="http://schemas.openxmlformats.org/drawingml/2006/main"/>
           <a:p xmlns:a="http://schemas.openxmlformats.org/drawingml/2006/main">
             <a:pPr algn="l">
+              <a:buNone/>
               <a:defRPr sz="3600" b="1">
                 <a:solidFill>
                   <a:srgbClr val="111827"/>
@@ -12002,6 +12217,7 @@
           <a:lstStyle xmlns:a="http://schemas.openxmlformats.org/drawingml/2006/main"/>
           <a:p xmlns:a="http://schemas.openxmlformats.org/drawingml/2006/main">
             <a:pPr algn="ctr">
+              <a:buNone/>
               <a:defRPr sz="1350" b="1">
                 <a:solidFill>
                   <a:srgbClr val="2563EB"/>
@@ -12058,6 +12274,7 @@
           <a:lstStyle xmlns:a="http://schemas.openxmlformats.org/drawingml/2006/main"/>
           <a:p xmlns:a="http://schemas.openxmlformats.org/drawingml/2006/main">
             <a:pPr algn="l">
+              <a:buNone/>
               <a:defRPr sz="1875" b="1">
                 <a:solidFill>
                   <a:srgbClr val="111827"/>
@@ -12114,6 +12331,7 @@
           <a:lstStyle xmlns:a="http://schemas.openxmlformats.org/drawingml/2006/main"/>
           <a:p xmlns:a="http://schemas.openxmlformats.org/drawingml/2006/main">
             <a:pPr algn="l">
+              <a:buNone/>
               <a:defRPr sz="1650" b="0">
                 <a:solidFill>
                   <a:srgbClr val="526174"/>
@@ -12176,6 +12394,7 @@
           <a:lstStyle xmlns:a="http://schemas.openxmlformats.org/drawingml/2006/main"/>
           <a:p xmlns:a="http://schemas.openxmlformats.org/drawingml/2006/main">
             <a:pPr algn="ctr">
+              <a:buNone/>
               <a:defRPr sz="1350" b="1">
                 <a:solidFill>
                   <a:srgbClr val="2563EB"/>
@@ -12232,6 +12451,7 @@
           <a:lstStyle xmlns:a="http://schemas.openxmlformats.org/drawingml/2006/main"/>
           <a:p xmlns:a="http://schemas.openxmlformats.org/drawingml/2006/main">
             <a:pPr algn="l">
+              <a:buNone/>
               <a:defRPr sz="1875" b="1">
                 <a:solidFill>
                   <a:srgbClr val="111827"/>
@@ -12288,6 +12508,7 @@
           <a:lstStyle xmlns:a="http://schemas.openxmlformats.org/drawingml/2006/main"/>
           <a:p xmlns:a="http://schemas.openxmlformats.org/drawingml/2006/main">
             <a:pPr algn="l">
+              <a:buNone/>
               <a:defRPr sz="1650" b="0">
                 <a:solidFill>
                   <a:srgbClr val="526174"/>
@@ -12350,6 +12571,7 @@
           <a:lstStyle xmlns:a="http://schemas.openxmlformats.org/drawingml/2006/main"/>
           <a:p xmlns:a="http://schemas.openxmlformats.org/drawingml/2006/main">
             <a:pPr algn="ctr">
+              <a:buNone/>
               <a:defRPr sz="1350" b="1">
                 <a:solidFill>
                   <a:srgbClr val="2563EB"/>
@@ -12406,6 +12628,7 @@
           <a:lstStyle xmlns:a="http://schemas.openxmlformats.org/drawingml/2006/main"/>
           <a:p xmlns:a="http://schemas.openxmlformats.org/drawingml/2006/main">
             <a:pPr algn="l">
+              <a:buNone/>
               <a:defRPr sz="1875" b="1">
                 <a:solidFill>
                   <a:srgbClr val="111827"/>
@@ -12462,6 +12685,7 @@
           <a:lstStyle xmlns:a="http://schemas.openxmlformats.org/drawingml/2006/main"/>
           <a:p xmlns:a="http://schemas.openxmlformats.org/drawingml/2006/main">
             <a:pPr algn="l">
+              <a:buNone/>
               <a:defRPr sz="1650" b="0">
                 <a:solidFill>
                   <a:srgbClr val="526174"/>
@@ -12524,6 +12748,7 @@
           <a:lstStyle xmlns:a="http://schemas.openxmlformats.org/drawingml/2006/main"/>
           <a:p xmlns:a="http://schemas.openxmlformats.org/drawingml/2006/main">
             <a:pPr algn="ctr">
+              <a:buNone/>
               <a:defRPr sz="1350" b="1">
                 <a:solidFill>
                   <a:srgbClr val="2563EB"/>
@@ -12580,6 +12805,7 @@
           <a:lstStyle xmlns:a="http://schemas.openxmlformats.org/drawingml/2006/main"/>
           <a:p xmlns:a="http://schemas.openxmlformats.org/drawingml/2006/main">
             <a:pPr algn="l">
+              <a:buNone/>
               <a:defRPr sz="1875" b="1">
                 <a:solidFill>
                   <a:srgbClr val="111827"/>
@@ -12636,6 +12862,7 @@
           <a:lstStyle xmlns:a="http://schemas.openxmlformats.org/drawingml/2006/main"/>
           <a:p xmlns:a="http://schemas.openxmlformats.org/drawingml/2006/main">
             <a:pPr algn="l">
+              <a:buNone/>
               <a:defRPr sz="1650" b="0">
                 <a:solidFill>
                   <a:srgbClr val="526174"/>
@@ -12698,6 +12925,7 @@
           <a:lstStyle xmlns:a="http://schemas.openxmlformats.org/drawingml/2006/main"/>
           <a:p xmlns:a="http://schemas.openxmlformats.org/drawingml/2006/main">
             <a:pPr algn="ctr">
+              <a:buNone/>
               <a:defRPr sz="1350" b="1">
                 <a:solidFill>
                   <a:srgbClr val="FFFFFF"/>
@@ -12754,6 +12982,7 @@
           <a:lstStyle xmlns:a="http://schemas.openxmlformats.org/drawingml/2006/main"/>
           <a:p xmlns:a="http://schemas.openxmlformats.org/drawingml/2006/main">
             <a:pPr algn="l">
+              <a:buNone/>
               <a:defRPr sz="1875" b="1">
                 <a:solidFill>
                   <a:srgbClr val="111827"/>
@@ -12810,6 +13039,7 @@
           <a:lstStyle xmlns:a="http://schemas.openxmlformats.org/drawingml/2006/main"/>
           <a:p xmlns:a="http://schemas.openxmlformats.org/drawingml/2006/main">
             <a:pPr algn="l">
+              <a:buNone/>
               <a:defRPr sz="1650" b="0">
                 <a:solidFill>
                   <a:srgbClr val="526174"/>
@@ -12895,6 +13125,7 @@
           <a:lstStyle xmlns:a="http://schemas.openxmlformats.org/drawingml/2006/main"/>
           <a:p xmlns:a="http://schemas.openxmlformats.org/drawingml/2006/main">
             <a:pPr algn="l">
+              <a:buNone/>
               <a:defRPr sz="1200" b="1">
                 <a:solidFill>
                   <a:srgbClr val="526174"/>
@@ -12951,6 +13182,7 @@
           <a:lstStyle xmlns:a="http://schemas.openxmlformats.org/drawingml/2006/main"/>
           <a:p xmlns:a="http://schemas.openxmlformats.org/drawingml/2006/main">
             <a:pPr algn="r">
+              <a:buNone/>
               <a:defRPr sz="1050" b="0">
                 <a:solidFill>
                   <a:srgbClr val="526174"/>
@@ -13007,6 +13239,7 @@
           <a:lstStyle xmlns:a="http://schemas.openxmlformats.org/drawingml/2006/main"/>
           <a:p xmlns:a="http://schemas.openxmlformats.org/drawingml/2006/main">
             <a:pPr algn="l">
+              <a:buNone/>
               <a:defRPr sz="3600" b="1">
                 <a:solidFill>
                   <a:srgbClr val="111827"/>
@@ -13069,6 +13302,7 @@
           <a:lstStyle xmlns:a="http://schemas.openxmlformats.org/drawingml/2006/main"/>
           <a:p xmlns:a="http://schemas.openxmlformats.org/drawingml/2006/main">
             <a:pPr algn="ctr">
+              <a:buNone/>
               <a:defRPr sz="1350" b="1">
                 <a:solidFill>
                   <a:srgbClr val="15803D"/>
@@ -13125,6 +13359,7 @@
           <a:lstStyle xmlns:a="http://schemas.openxmlformats.org/drawingml/2006/main"/>
           <a:p xmlns:a="http://schemas.openxmlformats.org/drawingml/2006/main">
             <a:pPr algn="l">
+              <a:buNone/>
               <a:defRPr sz="1650" b="0">
                 <a:solidFill>
                   <a:srgbClr val="111827"/>
@@ -13187,6 +13422,7 @@
           <a:lstStyle xmlns:a="http://schemas.openxmlformats.org/drawingml/2006/main"/>
           <a:p xmlns:a="http://schemas.openxmlformats.org/drawingml/2006/main">
             <a:pPr algn="ctr">
+              <a:buNone/>
               <a:defRPr sz="1350" b="1">
                 <a:solidFill>
                   <a:srgbClr val="2563EB"/>
@@ -13243,6 +13479,7 @@
           <a:lstStyle xmlns:a="http://schemas.openxmlformats.org/drawingml/2006/main"/>
           <a:p xmlns:a="http://schemas.openxmlformats.org/drawingml/2006/main">
             <a:pPr algn="l">
+              <a:buNone/>
               <a:defRPr sz="1650" b="0">
                 <a:solidFill>
                   <a:srgbClr val="111827"/>
@@ -13305,6 +13542,7 @@
           <a:lstStyle xmlns:a="http://schemas.openxmlformats.org/drawingml/2006/main"/>
           <a:p xmlns:a="http://schemas.openxmlformats.org/drawingml/2006/main">
             <a:pPr algn="ctr">
+              <a:buNone/>
               <a:defRPr sz="1350" b="1">
                 <a:solidFill>
                   <a:srgbClr val="15803D"/>
@@ -13361,6 +13599,7 @@
           <a:lstStyle xmlns:a="http://schemas.openxmlformats.org/drawingml/2006/main"/>
           <a:p xmlns:a="http://schemas.openxmlformats.org/drawingml/2006/main">
             <a:pPr algn="l">
+              <a:buNone/>
               <a:defRPr sz="1650" b="0">
                 <a:solidFill>
                   <a:srgbClr val="111827"/>
@@ -13423,6 +13662,7 @@
           <a:lstStyle xmlns:a="http://schemas.openxmlformats.org/drawingml/2006/main"/>
           <a:p xmlns:a="http://schemas.openxmlformats.org/drawingml/2006/main">
             <a:pPr algn="ctr">
+              <a:buNone/>
               <a:defRPr sz="1350" b="1">
                 <a:solidFill>
                   <a:srgbClr val="2563EB"/>
@@ -13479,6 +13719,7 @@
           <a:lstStyle xmlns:a="http://schemas.openxmlformats.org/drawingml/2006/main"/>
           <a:p xmlns:a="http://schemas.openxmlformats.org/drawingml/2006/main">
             <a:pPr algn="l">
+              <a:buNone/>
               <a:defRPr sz="1650" b="0">
                 <a:solidFill>
                   <a:srgbClr val="111827"/>
@@ -13541,6 +13782,7 @@
           <a:lstStyle xmlns:a="http://schemas.openxmlformats.org/drawingml/2006/main"/>
           <a:p xmlns:a="http://schemas.openxmlformats.org/drawingml/2006/main">
             <a:pPr algn="ctr">
+              <a:buNone/>
               <a:defRPr sz="1350" b="1">
                 <a:solidFill>
                   <a:srgbClr val="2563EB"/>
@@ -13597,6 +13839,7 @@
           <a:lstStyle xmlns:a="http://schemas.openxmlformats.org/drawingml/2006/main"/>
           <a:p xmlns:a="http://schemas.openxmlformats.org/drawingml/2006/main">
             <a:pPr algn="l">
+              <a:buNone/>
               <a:defRPr sz="1650" b="0">
                 <a:solidFill>
                   <a:srgbClr val="111827"/>
@@ -13659,6 +13902,7 @@
           <a:lstStyle xmlns:a="http://schemas.openxmlformats.org/drawingml/2006/main"/>
           <a:p xmlns:a="http://schemas.openxmlformats.org/drawingml/2006/main">
             <a:pPr algn="ctr">
+              <a:buNone/>
               <a:defRPr sz="1350" b="1">
                 <a:solidFill>
                   <a:srgbClr val="15803D"/>
@@ -13715,6 +13959,7 @@
           <a:lstStyle xmlns:a="http://schemas.openxmlformats.org/drawingml/2006/main"/>
           <a:p xmlns:a="http://schemas.openxmlformats.org/drawingml/2006/main">
             <a:pPr algn="l">
+              <a:buNone/>
               <a:defRPr sz="1650" b="0">
                 <a:solidFill>
                   <a:srgbClr val="111827"/>
@@ -13777,6 +14022,7 @@
           <a:lstStyle xmlns:a="http://schemas.openxmlformats.org/drawingml/2006/main"/>
           <a:p xmlns:a="http://schemas.openxmlformats.org/drawingml/2006/main">
             <a:pPr algn="ctr">
+              <a:buNone/>
               <a:defRPr sz="1350" b="1">
                 <a:solidFill>
                   <a:srgbClr val="2563EB"/>
@@ -13833,6 +14079,7 @@
           <a:lstStyle xmlns:a="http://schemas.openxmlformats.org/drawingml/2006/main"/>
           <a:p xmlns:a="http://schemas.openxmlformats.org/drawingml/2006/main">
             <a:pPr algn="l">
+              <a:buNone/>
               <a:defRPr sz="1650" b="0">
                 <a:solidFill>
                   <a:srgbClr val="111827"/>
@@ -13895,6 +14142,7 @@
           <a:lstStyle xmlns:a="http://schemas.openxmlformats.org/drawingml/2006/main"/>
           <a:p xmlns:a="http://schemas.openxmlformats.org/drawingml/2006/main">
             <a:pPr algn="ctr">
+              <a:buNone/>
               <a:defRPr sz="1350" b="1">
                 <a:solidFill>
                   <a:srgbClr val="15803D"/>
@@ -13951,6 +14199,7 @@
           <a:lstStyle xmlns:a="http://schemas.openxmlformats.org/drawingml/2006/main"/>
           <a:p xmlns:a="http://schemas.openxmlformats.org/drawingml/2006/main">
             <a:pPr algn="l">
+              <a:buNone/>
               <a:defRPr sz="1650" b="0">
                 <a:solidFill>
                   <a:srgbClr val="111827"/>
@@ -14036,6 +14285,7 @@
           <a:lstStyle xmlns:a="http://schemas.openxmlformats.org/drawingml/2006/main"/>
           <a:p xmlns:a="http://schemas.openxmlformats.org/drawingml/2006/main">
             <a:pPr algn="l">
+              <a:buNone/>
               <a:defRPr sz="1200" b="1">
                 <a:solidFill>
                   <a:srgbClr val="526174"/>
@@ -14092,6 +14342,7 @@
           <a:lstStyle xmlns:a="http://schemas.openxmlformats.org/drawingml/2006/main"/>
           <a:p xmlns:a="http://schemas.openxmlformats.org/drawingml/2006/main">
             <a:pPr algn="r">
+              <a:buNone/>
               <a:defRPr sz="1050" b="0">
                 <a:solidFill>
                   <a:srgbClr val="526174"/>
@@ -14148,17 +14399,21 @@
           <a:lstStyle xmlns:a="http://schemas.openxmlformats.org/drawingml/2006/main"/>
           <a:p xmlns:a="http://schemas.openxmlformats.org/drawingml/2006/main">
             <a:pPr algn="l">
-              <a:defRPr sz="3600" b="1">
-                <a:solidFill>
-                  <a:srgbClr val="111827"/>
-                </a:solidFill>
-                <a:latin typeface="Aptos"/>
-                <a:ea typeface="Aptos"/>
-                <a:cs typeface="Aptos"/>
-              </a:defRPr>
-            </a:pPr>
-            <a:r>
-              <a:rPr sz="3600" b="1">
+              <a:lnSpc>
+                <a:spcPct val="98000"/>
+              </a:lnSpc>
+              <a:buNone/>
+              <a:defRPr sz="3375" b="1">
+                <a:solidFill>
+                  <a:srgbClr val="111827"/>
+                </a:solidFill>
+                <a:latin typeface="Aptos"/>
+                <a:ea typeface="Aptos"/>
+                <a:cs typeface="Aptos"/>
+              </a:defRPr>
+            </a:pPr>
+            <a:r>
+              <a:rPr sz="3375" b="1">
                 <a:solidFill>
                   <a:srgbClr val="111827"/>
                 </a:solidFill>
@@ -14239,7 +14494,11 @@
           <a:lstStyle xmlns:a="http://schemas.openxmlformats.org/drawingml/2006/main"/>
           <a:p xmlns:a="http://schemas.openxmlformats.org/drawingml/2006/main">
             <a:pPr algn="l">
-              <a:defRPr sz="1500" b="1">
+              <a:lnSpc>
+                <a:spcPct val="108000"/>
+              </a:lnSpc>
+              <a:buNone/>
+              <a:defRPr sz="1575" b="1">
                 <a:solidFill>
                   <a:srgbClr val="2563EB"/>
                 </a:solidFill>
@@ -14249,7 +14508,7 @@
               </a:defRPr>
             </a:pPr>
             <a:r>
-              <a:rPr sz="1500" b="1">
+              <a:rPr sz="1575" b="1">
                 <a:solidFill>
                   <a:srgbClr val="2563EB"/>
                 </a:solidFill>
@@ -14295,17 +14554,21 @@
           <a:lstStyle xmlns:a="http://schemas.openxmlformats.org/drawingml/2006/main"/>
           <a:p xmlns:a="http://schemas.openxmlformats.org/drawingml/2006/main">
             <a:pPr algn="l">
-              <a:defRPr sz="1650" b="0">
-                <a:solidFill>
-                  <a:srgbClr val="111827"/>
-                </a:solidFill>
-                <a:latin typeface="Aptos"/>
-                <a:ea typeface="Aptos"/>
-                <a:cs typeface="Aptos"/>
-              </a:defRPr>
-            </a:pPr>
-            <a:r>
-              <a:rPr sz="1650" b="0">
+              <a:lnSpc>
+                <a:spcPct val="108000"/>
+              </a:lnSpc>
+              <a:buNone/>
+              <a:defRPr sz="1575" b="1">
+                <a:solidFill>
+                  <a:srgbClr val="111827"/>
+                </a:solidFill>
+                <a:latin typeface="Aptos"/>
+                <a:ea typeface="Aptos"/>
+                <a:cs typeface="Aptos"/>
+              </a:defRPr>
+            </a:pPr>
+            <a:r>
+              <a:rPr sz="1575" b="1">
                 <a:solidFill>
                   <a:srgbClr val="111827"/>
                 </a:solidFill>
@@ -14386,7 +14649,11 @@
           <a:lstStyle xmlns:a="http://schemas.openxmlformats.org/drawingml/2006/main"/>
           <a:p xmlns:a="http://schemas.openxmlformats.org/drawingml/2006/main">
             <a:pPr algn="l">
-              <a:defRPr sz="1500" b="1">
+              <a:lnSpc>
+                <a:spcPct val="108000"/>
+              </a:lnSpc>
+              <a:buNone/>
+              <a:defRPr sz="1575" b="1">
                 <a:solidFill>
                   <a:srgbClr val="D97706"/>
                 </a:solidFill>
@@ -14396,7 +14663,7 @@
               </a:defRPr>
             </a:pPr>
             <a:r>
-              <a:rPr sz="1500" b="1">
+              <a:rPr sz="1575" b="1">
                 <a:solidFill>
                   <a:srgbClr val="D97706"/>
                 </a:solidFill>
@@ -14442,17 +14709,21 @@
           <a:lstStyle xmlns:a="http://schemas.openxmlformats.org/drawingml/2006/main"/>
           <a:p xmlns:a="http://schemas.openxmlformats.org/drawingml/2006/main">
             <a:pPr algn="l">
-              <a:defRPr sz="1650" b="0">
-                <a:solidFill>
-                  <a:srgbClr val="111827"/>
-                </a:solidFill>
-                <a:latin typeface="Aptos"/>
-                <a:ea typeface="Aptos"/>
-                <a:cs typeface="Aptos"/>
-              </a:defRPr>
-            </a:pPr>
-            <a:r>
-              <a:rPr sz="1650" b="0">
+              <a:lnSpc>
+                <a:spcPct val="108000"/>
+              </a:lnSpc>
+              <a:buNone/>
+              <a:defRPr sz="1575" b="1">
+                <a:solidFill>
+                  <a:srgbClr val="111827"/>
+                </a:solidFill>
+                <a:latin typeface="Aptos"/>
+                <a:ea typeface="Aptos"/>
+                <a:cs typeface="Aptos"/>
+              </a:defRPr>
+            </a:pPr>
+            <a:r>
+              <a:rPr sz="1575" b="1">
                 <a:solidFill>
                   <a:srgbClr val="111827"/>
                 </a:solidFill>
@@ -14533,7 +14804,11 @@
           <a:lstStyle xmlns:a="http://schemas.openxmlformats.org/drawingml/2006/main"/>
           <a:p xmlns:a="http://schemas.openxmlformats.org/drawingml/2006/main">
             <a:pPr algn="l">
-              <a:defRPr sz="1500" b="1">
+              <a:lnSpc>
+                <a:spcPct val="108000"/>
+              </a:lnSpc>
+              <a:buNone/>
+              <a:defRPr sz="1575" b="1">
                 <a:solidFill>
                   <a:srgbClr val="0891B2"/>
                 </a:solidFill>
@@ -14543,7 +14818,7 @@
               </a:defRPr>
             </a:pPr>
             <a:r>
-              <a:rPr sz="1500" b="1">
+              <a:rPr sz="1575" b="1">
                 <a:solidFill>
                   <a:srgbClr val="0891B2"/>
                 </a:solidFill>
@@ -14589,17 +14864,21 @@
           <a:lstStyle xmlns:a="http://schemas.openxmlformats.org/drawingml/2006/main"/>
           <a:p xmlns:a="http://schemas.openxmlformats.org/drawingml/2006/main">
             <a:pPr algn="l">
-              <a:defRPr sz="1650" b="0">
-                <a:solidFill>
-                  <a:srgbClr val="111827"/>
-                </a:solidFill>
-                <a:latin typeface="Aptos"/>
-                <a:ea typeface="Aptos"/>
-                <a:cs typeface="Aptos"/>
-              </a:defRPr>
-            </a:pPr>
-            <a:r>
-              <a:rPr sz="1650" b="0">
+              <a:lnSpc>
+                <a:spcPct val="108000"/>
+              </a:lnSpc>
+              <a:buNone/>
+              <a:defRPr sz="1575" b="1">
+                <a:solidFill>
+                  <a:srgbClr val="111827"/>
+                </a:solidFill>
+                <a:latin typeface="Aptos"/>
+                <a:ea typeface="Aptos"/>
+                <a:cs typeface="Aptos"/>
+              </a:defRPr>
+            </a:pPr>
+            <a:r>
+              <a:rPr sz="1575" b="1">
                 <a:solidFill>
                   <a:srgbClr val="111827"/>
                 </a:solidFill>
@@ -14680,7 +14959,11 @@
           <a:lstStyle xmlns:a="http://schemas.openxmlformats.org/drawingml/2006/main"/>
           <a:p xmlns:a="http://schemas.openxmlformats.org/drawingml/2006/main">
             <a:pPr algn="l">
-              <a:defRPr sz="1500" b="1">
+              <a:lnSpc>
+                <a:spcPct val="108000"/>
+              </a:lnSpc>
+              <a:buNone/>
+              <a:defRPr sz="1575" b="1">
                 <a:solidFill>
                   <a:srgbClr val="15803D"/>
                 </a:solidFill>
@@ -14690,7 +14973,7 @@
               </a:defRPr>
             </a:pPr>
             <a:r>
-              <a:rPr sz="1500" b="1">
+              <a:rPr sz="1575" b="1">
                 <a:solidFill>
                   <a:srgbClr val="15803D"/>
                 </a:solidFill>
@@ -14736,17 +15019,21 @@
           <a:lstStyle xmlns:a="http://schemas.openxmlformats.org/drawingml/2006/main"/>
           <a:p xmlns:a="http://schemas.openxmlformats.org/drawingml/2006/main">
             <a:pPr algn="l">
-              <a:defRPr sz="1650" b="0">
-                <a:solidFill>
-                  <a:srgbClr val="111827"/>
-                </a:solidFill>
-                <a:latin typeface="Aptos"/>
-                <a:ea typeface="Aptos"/>
-                <a:cs typeface="Aptos"/>
-              </a:defRPr>
-            </a:pPr>
-            <a:r>
-              <a:rPr sz="1650" b="0">
+              <a:lnSpc>
+                <a:spcPct val="108000"/>
+              </a:lnSpc>
+              <a:buNone/>
+              <a:defRPr sz="1575" b="1">
+                <a:solidFill>
+                  <a:srgbClr val="111827"/>
+                </a:solidFill>
+                <a:latin typeface="Aptos"/>
+                <a:ea typeface="Aptos"/>
+                <a:cs typeface="Aptos"/>
+              </a:defRPr>
+            </a:pPr>
+            <a:r>
+              <a:rPr sz="1575" b="1">
                 <a:solidFill>
                   <a:srgbClr val="111827"/>
                 </a:solidFill>
@@ -14810,8 +15097,8 @@
         </p:nvSpPr>
         <p:spPr>
           <a:xfrm xmlns:a="http://schemas.openxmlformats.org/drawingml/2006/main">
-            <a:off x="2228850" y="5276850"/>
-            <a:ext cx="1905000" cy="247650"/>
+            <a:off x="2076450" y="5276850"/>
+            <a:ext cx="2247900" cy="247650"/>
           </a:xfrm>
           <a:prstGeom xmlns:a="http://schemas.openxmlformats.org/drawingml/2006/main" prst="rect">
             <a:avLst/>
@@ -14827,7 +15114,11 @@
           <a:lstStyle xmlns:a="http://schemas.openxmlformats.org/drawingml/2006/main"/>
           <a:p xmlns:a="http://schemas.openxmlformats.org/drawingml/2006/main">
             <a:pPr algn="l">
-              <a:defRPr sz="1500" b="1">
+              <a:lnSpc>
+                <a:spcPct val="106000"/>
+              </a:lnSpc>
+              <a:buNone/>
+              <a:defRPr sz="1125" b="1">
                 <a:solidFill>
                   <a:srgbClr val="7C3AED"/>
                 </a:solidFill>
@@ -14837,7 +15128,7 @@
               </a:defRPr>
             </a:pPr>
             <a:r>
-              <a:rPr sz="1500" b="1">
+              <a:rPr sz="1125" b="1">
                 <a:solidFill>
                   <a:srgbClr val="7C3AED"/>
                 </a:solidFill>
@@ -14866,8 +15157,8 @@
         </p:nvSpPr>
         <p:spPr>
           <a:xfrm xmlns:a="http://schemas.openxmlformats.org/drawingml/2006/main">
-            <a:off x="4095750" y="5257800"/>
-            <a:ext cx="5524500" cy="304800"/>
+            <a:off x="4324350" y="5257800"/>
+            <a:ext cx="5295900" cy="304800"/>
           </a:xfrm>
           <a:prstGeom xmlns:a="http://schemas.openxmlformats.org/drawingml/2006/main" prst="rect">
             <a:avLst/>
@@ -14883,17 +15174,21 @@
           <a:lstStyle xmlns:a="http://schemas.openxmlformats.org/drawingml/2006/main"/>
           <a:p xmlns:a="http://schemas.openxmlformats.org/drawingml/2006/main">
             <a:pPr algn="l">
-              <a:defRPr sz="1650" b="0">
-                <a:solidFill>
-                  <a:srgbClr val="111827"/>
-                </a:solidFill>
-                <a:latin typeface="Aptos"/>
-                <a:ea typeface="Aptos"/>
-                <a:cs typeface="Aptos"/>
-              </a:defRPr>
-            </a:pPr>
-            <a:r>
-              <a:rPr sz="1650" b="0">
+              <a:lnSpc>
+                <a:spcPct val="108000"/>
+              </a:lnSpc>
+              <a:buNone/>
+              <a:defRPr sz="1575" b="1">
+                <a:solidFill>
+                  <a:srgbClr val="111827"/>
+                </a:solidFill>
+                <a:latin typeface="Aptos"/>
+                <a:ea typeface="Aptos"/>
+                <a:cs typeface="Aptos"/>
+              </a:defRPr>
+            </a:pPr>
+            <a:r>
+              <a:rPr sz="1575" b="1">
                 <a:solidFill>
                   <a:srgbClr val="111827"/>
                 </a:solidFill>
@@ -14968,6 +15263,7 @@
           <a:lstStyle xmlns:a="http://schemas.openxmlformats.org/drawingml/2006/main"/>
           <a:p xmlns:a="http://schemas.openxmlformats.org/drawingml/2006/main">
             <a:pPr algn="l">
+              <a:buNone/>
               <a:defRPr sz="1350" b="1">
                 <a:solidFill>
                   <a:srgbClr val="C4B5FD"/>
@@ -15024,6 +15320,7 @@
           <a:lstStyle xmlns:a="http://schemas.openxmlformats.org/drawingml/2006/main"/>
           <a:p xmlns:a="http://schemas.openxmlformats.org/drawingml/2006/main">
             <a:pPr algn="l">
+              <a:buNone/>
               <a:defRPr sz="5100" b="1">
                 <a:solidFill>
                   <a:srgbClr val="FFFFFF"/>
@@ -15080,6 +15377,7 @@
           <a:lstStyle xmlns:a="http://schemas.openxmlformats.org/drawingml/2006/main"/>
           <a:p xmlns:a="http://schemas.openxmlformats.org/drawingml/2006/main">
             <a:pPr algn="l">
+              <a:buNone/>
               <a:defRPr sz="2100" b="0">
                 <a:solidFill>
                   <a:srgbClr val="B8C5D6"/>
@@ -15165,6 +15463,7 @@
           <a:lstStyle xmlns:a="http://schemas.openxmlformats.org/drawingml/2006/main"/>
           <a:p xmlns:a="http://schemas.openxmlformats.org/drawingml/2006/main">
             <a:pPr algn="l">
+              <a:buNone/>
               <a:defRPr sz="1200" b="1">
                 <a:solidFill>
                   <a:srgbClr val="526174"/>
@@ -15221,6 +15520,7 @@
           <a:lstStyle xmlns:a="http://schemas.openxmlformats.org/drawingml/2006/main"/>
           <a:p xmlns:a="http://schemas.openxmlformats.org/drawingml/2006/main">
             <a:pPr algn="r">
+              <a:buNone/>
               <a:defRPr sz="1050" b="0">
                 <a:solidFill>
                   <a:srgbClr val="526174"/>
@@ -15277,6 +15577,7 @@
           <a:lstStyle xmlns:a="http://schemas.openxmlformats.org/drawingml/2006/main"/>
           <a:p xmlns:a="http://schemas.openxmlformats.org/drawingml/2006/main">
             <a:pPr algn="l">
+              <a:buNone/>
               <a:defRPr sz="3600" b="1">
                 <a:solidFill>
                   <a:srgbClr val="111827"/>
@@ -15343,6 +15644,7 @@
           <a:lstStyle xmlns:a="http://schemas.openxmlformats.org/drawingml/2006/main"/>
           <a:p xmlns:a="http://schemas.openxmlformats.org/drawingml/2006/main">
             <a:pPr algn="ctr">
+              <a:buNone/>
               <a:defRPr sz="1350" b="1">
                 <a:solidFill>
                   <a:srgbClr val="0891B2"/>
@@ -15399,6 +15701,7 @@
           <a:lstStyle xmlns:a="http://schemas.openxmlformats.org/drawingml/2006/main"/>
           <a:p xmlns:a="http://schemas.openxmlformats.org/drawingml/2006/main">
             <a:pPr algn="l">
+              <a:buNone/>
               <a:defRPr sz="1650" b="1">
                 <a:solidFill>
                   <a:srgbClr val="526174"/>
@@ -15455,6 +15758,7 @@
           <a:lstStyle xmlns:a="http://schemas.openxmlformats.org/drawingml/2006/main"/>
           <a:p xmlns:a="http://schemas.openxmlformats.org/drawingml/2006/main">
             <a:pPr algn="l">
+              <a:buNone/>
               <a:defRPr sz="1875" b="0">
                 <a:solidFill>
                   <a:srgbClr val="111827"/>
@@ -15521,6 +15825,7 @@
           <a:lstStyle xmlns:a="http://schemas.openxmlformats.org/drawingml/2006/main"/>
           <a:p xmlns:a="http://schemas.openxmlformats.org/drawingml/2006/main">
             <a:pPr algn="ctr">
+              <a:buNone/>
               <a:defRPr sz="1350" b="1">
                 <a:solidFill>
                   <a:srgbClr val="7C3AED"/>
@@ -15577,6 +15882,7 @@
           <a:lstStyle xmlns:a="http://schemas.openxmlformats.org/drawingml/2006/main"/>
           <a:p xmlns:a="http://schemas.openxmlformats.org/drawingml/2006/main">
             <a:pPr algn="l">
+              <a:buNone/>
               <a:defRPr sz="1650" b="1">
                 <a:solidFill>
                   <a:srgbClr val="526174"/>
@@ -15633,6 +15939,7 @@
           <a:lstStyle xmlns:a="http://schemas.openxmlformats.org/drawingml/2006/main"/>
           <a:p xmlns:a="http://schemas.openxmlformats.org/drawingml/2006/main">
             <a:pPr algn="l">
+              <a:buNone/>
               <a:defRPr sz="1875" b="0">
                 <a:solidFill>
                   <a:srgbClr val="111827"/>
@@ -15699,6 +16006,7 @@
           <a:lstStyle xmlns:a="http://schemas.openxmlformats.org/drawingml/2006/main"/>
           <a:p xmlns:a="http://schemas.openxmlformats.org/drawingml/2006/main">
             <a:pPr algn="ctr">
+              <a:buNone/>
               <a:defRPr sz="1350" b="1">
                 <a:solidFill>
                   <a:srgbClr val="D97706"/>
@@ -15755,6 +16063,7 @@
           <a:lstStyle xmlns:a="http://schemas.openxmlformats.org/drawingml/2006/main"/>
           <a:p xmlns:a="http://schemas.openxmlformats.org/drawingml/2006/main">
             <a:pPr algn="l">
+              <a:buNone/>
               <a:defRPr sz="1650" b="1">
                 <a:solidFill>
                   <a:srgbClr val="526174"/>
@@ -15811,6 +16120,7 @@
           <a:lstStyle xmlns:a="http://schemas.openxmlformats.org/drawingml/2006/main"/>
           <a:p xmlns:a="http://schemas.openxmlformats.org/drawingml/2006/main">
             <a:pPr algn="l">
+              <a:buNone/>
               <a:defRPr sz="1875" b="0">
                 <a:solidFill>
                   <a:srgbClr val="111827"/>
@@ -15877,6 +16187,7 @@
           <a:lstStyle xmlns:a="http://schemas.openxmlformats.org/drawingml/2006/main"/>
           <a:p xmlns:a="http://schemas.openxmlformats.org/drawingml/2006/main">
             <a:pPr algn="ctr">
+              <a:buNone/>
               <a:defRPr sz="1350" b="1">
                 <a:solidFill>
                   <a:srgbClr val="15803D"/>
@@ -15933,6 +16244,7 @@
           <a:lstStyle xmlns:a="http://schemas.openxmlformats.org/drawingml/2006/main"/>
           <a:p xmlns:a="http://schemas.openxmlformats.org/drawingml/2006/main">
             <a:pPr algn="l">
+              <a:buNone/>
               <a:defRPr sz="1650" b="1">
                 <a:solidFill>
                   <a:srgbClr val="526174"/>
@@ -15989,6 +16301,7 @@
           <a:lstStyle xmlns:a="http://schemas.openxmlformats.org/drawingml/2006/main"/>
           <a:p xmlns:a="http://schemas.openxmlformats.org/drawingml/2006/main">
             <a:pPr algn="l">
+              <a:buNone/>
               <a:defRPr sz="1875" b="0">
                 <a:solidFill>
                   <a:srgbClr val="111827"/>
@@ -16055,6 +16368,7 @@
           <a:lstStyle xmlns:a="http://schemas.openxmlformats.org/drawingml/2006/main"/>
           <a:p xmlns:a="http://schemas.openxmlformats.org/drawingml/2006/main">
             <a:pPr algn="ctr">
+              <a:buNone/>
               <a:defRPr sz="1350" b="1">
                 <a:solidFill>
                   <a:srgbClr val="2563EB"/>
@@ -16111,6 +16425,7 @@
           <a:lstStyle xmlns:a="http://schemas.openxmlformats.org/drawingml/2006/main"/>
           <a:p xmlns:a="http://schemas.openxmlformats.org/drawingml/2006/main">
             <a:pPr algn="l">
+              <a:buNone/>
               <a:defRPr sz="1650" b="1">
                 <a:solidFill>
                   <a:srgbClr val="526174"/>
@@ -16167,6 +16482,7 @@
           <a:lstStyle xmlns:a="http://schemas.openxmlformats.org/drawingml/2006/main"/>
           <a:p xmlns:a="http://schemas.openxmlformats.org/drawingml/2006/main">
             <a:pPr algn="l">
+              <a:buNone/>
               <a:defRPr sz="1875" b="0">
                 <a:solidFill>
                   <a:srgbClr val="111827"/>
@@ -16252,6 +16568,7 @@
           <a:lstStyle xmlns:a="http://schemas.openxmlformats.org/drawingml/2006/main"/>
           <a:p xmlns:a="http://schemas.openxmlformats.org/drawingml/2006/main">
             <a:pPr algn="l">
+              <a:buNone/>
               <a:defRPr sz="1200" b="1">
                 <a:solidFill>
                   <a:srgbClr val="526174"/>
@@ -16308,6 +16625,7 @@
           <a:lstStyle xmlns:a="http://schemas.openxmlformats.org/drawingml/2006/main"/>
           <a:p xmlns:a="http://schemas.openxmlformats.org/drawingml/2006/main">
             <a:pPr algn="r">
+              <a:buNone/>
               <a:defRPr sz="1050" b="0">
                 <a:solidFill>
                   <a:srgbClr val="526174"/>
@@ -16364,6 +16682,7 @@
           <a:lstStyle xmlns:a="http://schemas.openxmlformats.org/drawingml/2006/main"/>
           <a:p xmlns:a="http://schemas.openxmlformats.org/drawingml/2006/main">
             <a:pPr algn="l">
+              <a:buNone/>
               <a:defRPr sz="3600" b="1">
                 <a:solidFill>
                   <a:srgbClr val="111827"/>
@@ -16455,6 +16774,7 @@
           <a:lstStyle xmlns:a="http://schemas.openxmlformats.org/drawingml/2006/main"/>
           <a:p xmlns:a="http://schemas.openxmlformats.org/drawingml/2006/main">
             <a:pPr algn="l">
+              <a:buNone/>
               <a:defRPr sz="2100" b="1">
                 <a:solidFill>
                   <a:srgbClr val="111827"/>
@@ -16511,6 +16831,7 @@
           <a:lstStyle xmlns:a="http://schemas.openxmlformats.org/drawingml/2006/main"/>
           <a:p xmlns:a="http://schemas.openxmlformats.org/drawingml/2006/main">
             <a:pPr algn="l">
+              <a:buNone/>
               <a:defRPr sz="1500" b="0">
                 <a:solidFill>
                   <a:srgbClr val="526174"/>
@@ -16534,6 +16855,7 @@
           </a:p>
           <a:p xmlns:a="http://schemas.openxmlformats.org/drawingml/2006/main">
             <a:pPr algn="l">
+              <a:buNone/>
               <a:defRPr sz="1500" b="0">
                 <a:solidFill>
                   <a:srgbClr val="526174"/>
@@ -16557,6 +16879,7 @@
           </a:p>
           <a:p xmlns:a="http://schemas.openxmlformats.org/drawingml/2006/main">
             <a:pPr algn="l">
+              <a:buNone/>
               <a:defRPr sz="1500" b="0">
                 <a:solidFill>
                   <a:srgbClr val="526174"/>
@@ -16580,6 +16903,7 @@
           </a:p>
           <a:p xmlns:a="http://schemas.openxmlformats.org/drawingml/2006/main">
             <a:pPr algn="l">
+              <a:buNone/>
               <a:defRPr sz="1500" b="0">
                 <a:solidFill>
                   <a:srgbClr val="526174"/>
@@ -16603,6 +16927,7 @@
           </a:p>
           <a:p xmlns:a="http://schemas.openxmlformats.org/drawingml/2006/main">
             <a:pPr algn="l">
+              <a:buNone/>
               <a:defRPr sz="1500" b="0">
                 <a:solidFill>
                   <a:srgbClr val="526174"/>
@@ -16727,6 +17052,7 @@
           <a:lstStyle xmlns:a="http://schemas.openxmlformats.org/drawingml/2006/main"/>
           <a:p xmlns:a="http://schemas.openxmlformats.org/drawingml/2006/main">
             <a:pPr algn="l">
+              <a:buNone/>
               <a:defRPr sz="2100" b="1">
                 <a:solidFill>
                   <a:srgbClr val="111827"/>
@@ -16783,6 +17109,7 @@
           <a:lstStyle xmlns:a="http://schemas.openxmlformats.org/drawingml/2006/main"/>
           <a:p xmlns:a="http://schemas.openxmlformats.org/drawingml/2006/main">
             <a:pPr algn="l">
+              <a:buNone/>
               <a:defRPr sz="1500" b="0">
                 <a:solidFill>
                   <a:srgbClr val="526174"/>
@@ -16806,6 +17133,7 @@
           </a:p>
           <a:p xmlns:a="http://schemas.openxmlformats.org/drawingml/2006/main">
             <a:pPr algn="l">
+              <a:buNone/>
               <a:defRPr sz="1500" b="0">
                 <a:solidFill>
                   <a:srgbClr val="526174"/>
@@ -16829,6 +17157,7 @@
           </a:p>
           <a:p xmlns:a="http://schemas.openxmlformats.org/drawingml/2006/main">
             <a:pPr algn="l">
+              <a:buNone/>
               <a:defRPr sz="1500" b="0">
                 <a:solidFill>
                   <a:srgbClr val="526174"/>
@@ -16852,6 +17181,7 @@
           </a:p>
           <a:p xmlns:a="http://schemas.openxmlformats.org/drawingml/2006/main">
             <a:pPr algn="l">
+              <a:buNone/>
               <a:defRPr sz="1500" b="0">
                 <a:solidFill>
                   <a:srgbClr val="526174"/>
@@ -16875,6 +17205,7 @@
           </a:p>
           <a:p xmlns:a="http://schemas.openxmlformats.org/drawingml/2006/main">
             <a:pPr algn="l">
+              <a:buNone/>
               <a:defRPr sz="1500" b="0">
                 <a:solidFill>
                   <a:srgbClr val="526174"/>
@@ -16999,6 +17330,7 @@
           <a:lstStyle xmlns:a="http://schemas.openxmlformats.org/drawingml/2006/main"/>
           <a:p xmlns:a="http://schemas.openxmlformats.org/drawingml/2006/main">
             <a:pPr algn="l">
+              <a:buNone/>
               <a:defRPr sz="2100" b="1">
                 <a:solidFill>
                   <a:srgbClr val="111827"/>
@@ -17055,6 +17387,7 @@
           <a:lstStyle xmlns:a="http://schemas.openxmlformats.org/drawingml/2006/main"/>
           <a:p xmlns:a="http://schemas.openxmlformats.org/drawingml/2006/main">
             <a:pPr algn="l">
+              <a:buNone/>
               <a:defRPr sz="1500" b="0">
                 <a:solidFill>
                   <a:srgbClr val="526174"/>
@@ -17078,6 +17411,7 @@
           </a:p>
           <a:p xmlns:a="http://schemas.openxmlformats.org/drawingml/2006/main">
             <a:pPr algn="l">
+              <a:buNone/>
               <a:defRPr sz="1500" b="0">
                 <a:solidFill>
                   <a:srgbClr val="526174"/>
@@ -17101,6 +17435,7 @@
           </a:p>
           <a:p xmlns:a="http://schemas.openxmlformats.org/drawingml/2006/main">
             <a:pPr algn="l">
+              <a:buNone/>
               <a:defRPr sz="1500" b="0">
                 <a:solidFill>
                   <a:srgbClr val="526174"/>
@@ -17124,6 +17459,7 @@
           </a:p>
           <a:p xmlns:a="http://schemas.openxmlformats.org/drawingml/2006/main">
             <a:pPr algn="l">
+              <a:buNone/>
               <a:defRPr sz="1500" b="0">
                 <a:solidFill>
                   <a:srgbClr val="526174"/>
@@ -17147,6 +17483,7 @@
           </a:p>
           <a:p xmlns:a="http://schemas.openxmlformats.org/drawingml/2006/main">
             <a:pPr algn="l">
+              <a:buNone/>
               <a:defRPr sz="1500" b="0">
                 <a:solidFill>
                   <a:srgbClr val="526174"/>
@@ -17232,6 +17569,7 @@
           <a:lstStyle xmlns:a="http://schemas.openxmlformats.org/drawingml/2006/main"/>
           <a:p xmlns:a="http://schemas.openxmlformats.org/drawingml/2006/main">
             <a:pPr algn="l">
+              <a:buNone/>
               <a:defRPr sz="1200" b="1">
                 <a:solidFill>
                   <a:srgbClr val="526174"/>
@@ -17288,6 +17626,7 @@
           <a:lstStyle xmlns:a="http://schemas.openxmlformats.org/drawingml/2006/main"/>
           <a:p xmlns:a="http://schemas.openxmlformats.org/drawingml/2006/main">
             <a:pPr algn="r">
+              <a:buNone/>
               <a:defRPr sz="1050" b="0">
                 <a:solidFill>
                   <a:srgbClr val="526174"/>
@@ -17344,6 +17683,7 @@
           <a:lstStyle xmlns:a="http://schemas.openxmlformats.org/drawingml/2006/main"/>
           <a:p xmlns:a="http://schemas.openxmlformats.org/drawingml/2006/main">
             <a:pPr algn="l">
+              <a:buNone/>
               <a:defRPr sz="3600" b="1">
                 <a:solidFill>
                   <a:srgbClr val="111827"/>
@@ -17468,6 +17808,7 @@
           <a:lstStyle xmlns:a="http://schemas.openxmlformats.org/drawingml/2006/main"/>
           <a:p xmlns:a="http://schemas.openxmlformats.org/drawingml/2006/main">
             <a:pPr algn="ctr">
+              <a:buNone/>
               <a:defRPr sz="1725" b="1">
                 <a:solidFill>
                   <a:srgbClr val="2563EB"/>
@@ -17524,6 +17865,7 @@
           <a:lstStyle xmlns:a="http://schemas.openxmlformats.org/drawingml/2006/main"/>
           <a:p xmlns:a="http://schemas.openxmlformats.org/drawingml/2006/main">
             <a:pPr algn="ctr">
+              <a:buNone/>
               <a:defRPr sz="1500" b="0">
                 <a:solidFill>
                   <a:srgbClr val="111827"/>
@@ -17648,6 +17990,7 @@
           <a:lstStyle xmlns:a="http://schemas.openxmlformats.org/drawingml/2006/main"/>
           <a:p xmlns:a="http://schemas.openxmlformats.org/drawingml/2006/main">
             <a:pPr algn="ctr">
+              <a:buNone/>
               <a:defRPr sz="1725" b="1">
                 <a:solidFill>
                   <a:srgbClr val="0891B2"/>
@@ -17704,6 +18047,7 @@
           <a:lstStyle xmlns:a="http://schemas.openxmlformats.org/drawingml/2006/main"/>
           <a:p xmlns:a="http://schemas.openxmlformats.org/drawingml/2006/main">
             <a:pPr algn="ctr">
+              <a:buNone/>
               <a:defRPr sz="1500" b="0">
                 <a:solidFill>
                   <a:srgbClr val="111827"/>
@@ -17828,6 +18172,7 @@
           <a:lstStyle xmlns:a="http://schemas.openxmlformats.org/drawingml/2006/main"/>
           <a:p xmlns:a="http://schemas.openxmlformats.org/drawingml/2006/main">
             <a:pPr algn="ctr">
+              <a:buNone/>
               <a:defRPr sz="1725" b="1">
                 <a:solidFill>
                   <a:srgbClr val="D97706"/>
@@ -17884,6 +18229,7 @@
           <a:lstStyle xmlns:a="http://schemas.openxmlformats.org/drawingml/2006/main"/>
           <a:p xmlns:a="http://schemas.openxmlformats.org/drawingml/2006/main">
             <a:pPr algn="ctr">
+              <a:buNone/>
               <a:defRPr sz="1500" b="0">
                 <a:solidFill>
                   <a:srgbClr val="111827"/>
@@ -17975,6 +18321,7 @@
           <a:lstStyle xmlns:a="http://schemas.openxmlformats.org/drawingml/2006/main"/>
           <a:p xmlns:a="http://schemas.openxmlformats.org/drawingml/2006/main">
             <a:pPr algn="ctr">
+              <a:buNone/>
               <a:defRPr sz="1725" b="1">
                 <a:solidFill>
                   <a:srgbClr val="15803D"/>
@@ -18031,6 +18378,7 @@
           <a:lstStyle xmlns:a="http://schemas.openxmlformats.org/drawingml/2006/main"/>
           <a:p xmlns:a="http://schemas.openxmlformats.org/drawingml/2006/main">
             <a:pPr algn="ctr">
+              <a:buNone/>
               <a:defRPr sz="1500" b="0">
                 <a:solidFill>
                   <a:srgbClr val="111827"/>
@@ -18087,6 +18435,7 @@
           <a:lstStyle xmlns:a="http://schemas.openxmlformats.org/drawingml/2006/main"/>
           <a:p xmlns:a="http://schemas.openxmlformats.org/drawingml/2006/main">
             <a:pPr algn="ctr">
+              <a:buNone/>
               <a:defRPr sz="2025" b="1">
                 <a:solidFill>
                   <a:srgbClr val="111827"/>
@@ -18172,6 +18521,7 @@
           <a:lstStyle xmlns:a="http://schemas.openxmlformats.org/drawingml/2006/main"/>
           <a:p xmlns:a="http://schemas.openxmlformats.org/drawingml/2006/main">
             <a:pPr algn="l">
+              <a:buNone/>
               <a:defRPr sz="1200" b="1">
                 <a:solidFill>
                   <a:srgbClr val="526174"/>
@@ -18228,6 +18578,7 @@
           <a:lstStyle xmlns:a="http://schemas.openxmlformats.org/drawingml/2006/main"/>
           <a:p xmlns:a="http://schemas.openxmlformats.org/drawingml/2006/main">
             <a:pPr algn="r">
+              <a:buNone/>
               <a:defRPr sz="1050" b="0">
                 <a:solidFill>
                   <a:srgbClr val="526174"/>
@@ -18284,17 +18635,21 @@
           <a:lstStyle xmlns:a="http://schemas.openxmlformats.org/drawingml/2006/main"/>
           <a:p xmlns:a="http://schemas.openxmlformats.org/drawingml/2006/main">
             <a:pPr algn="l">
-              <a:defRPr sz="3600" b="1">
-                <a:solidFill>
-                  <a:srgbClr val="111827"/>
-                </a:solidFill>
-                <a:latin typeface="Aptos"/>
-                <a:ea typeface="Aptos"/>
-                <a:cs typeface="Aptos"/>
-              </a:defRPr>
-            </a:pPr>
-            <a:r>
-              <a:rPr sz="3600" b="1">
+              <a:lnSpc>
+                <a:spcPct val="98000"/>
+              </a:lnSpc>
+              <a:buNone/>
+              <a:defRPr sz="3375" b="1">
+                <a:solidFill>
+                  <a:srgbClr val="111827"/>
+                </a:solidFill>
+                <a:latin typeface="Aptos"/>
+                <a:ea typeface="Aptos"/>
+                <a:cs typeface="Aptos"/>
+              </a:defRPr>
+            </a:pPr>
+            <a:r>
+              <a:rPr sz="3375" b="1">
                 <a:solidFill>
                   <a:srgbClr val="111827"/>
                 </a:solidFill>
@@ -18375,17 +18730,21 @@
           <a:lstStyle xmlns:a="http://schemas.openxmlformats.org/drawingml/2006/main"/>
           <a:p xmlns:a="http://schemas.openxmlformats.org/drawingml/2006/main">
             <a:pPr algn="l">
-              <a:defRPr sz="2100" b="1">
-                <a:solidFill>
-                  <a:srgbClr val="111827"/>
-                </a:solidFill>
-                <a:latin typeface="Aptos"/>
-                <a:ea typeface="Aptos"/>
-                <a:cs typeface="Aptos"/>
-              </a:defRPr>
-            </a:pPr>
-            <a:r>
-              <a:rPr sz="2100" b="1">
+              <a:lnSpc>
+                <a:spcPct val="108000"/>
+              </a:lnSpc>
+              <a:buNone/>
+              <a:defRPr sz="1575" b="1">
+                <a:solidFill>
+                  <a:srgbClr val="111827"/>
+                </a:solidFill>
+                <a:latin typeface="Aptos"/>
+                <a:ea typeface="Aptos"/>
+                <a:cs typeface="Aptos"/>
+              </a:defRPr>
+            </a:pPr>
+            <a:r>
+              <a:rPr sz="1575" b="1">
                 <a:solidFill>
                   <a:srgbClr val="111827"/>
                 </a:solidFill>
@@ -18431,17 +18790,21 @@
           <a:lstStyle xmlns:a="http://schemas.openxmlformats.org/drawingml/2006/main"/>
           <a:p xmlns:a="http://schemas.openxmlformats.org/drawingml/2006/main">
             <a:pPr algn="l">
-              <a:defRPr sz="1500" b="0">
-                <a:solidFill>
-                  <a:srgbClr val="526174"/>
-                </a:solidFill>
-                <a:latin typeface="Aptos"/>
-                <a:ea typeface="Aptos"/>
-                <a:cs typeface="Aptos"/>
-              </a:defRPr>
-            </a:pPr>
-            <a:r>
-              <a:rPr sz="1500" b="0">
+              <a:lnSpc>
+                <a:spcPct val="112000"/>
+              </a:lnSpc>
+              <a:buNone/>
+              <a:defRPr sz="1350" b="0">
+                <a:solidFill>
+                  <a:srgbClr val="526174"/>
+                </a:solidFill>
+                <a:latin typeface="Aptos"/>
+                <a:ea typeface="Aptos"/>
+                <a:cs typeface="Aptos"/>
+              </a:defRPr>
+            </a:pPr>
+            <a:r>
+              <a:rPr sz="1350" b="0">
                 <a:solidFill>
                   <a:srgbClr val="526174"/>
                 </a:solidFill>
@@ -18538,8 +18901,8 @@
         </p:nvSpPr>
         <p:spPr>
           <a:xfrm xmlns:a="http://schemas.openxmlformats.org/drawingml/2006/main">
-            <a:off x="5753100" y="2162175"/>
-            <a:ext cx="2971800" cy="361950"/>
+            <a:off x="5334000" y="2162175"/>
+            <a:ext cx="3429000" cy="361950"/>
           </a:xfrm>
           <a:prstGeom xmlns:a="http://schemas.openxmlformats.org/drawingml/2006/main" prst="rect">
             <a:avLst/>
@@ -18555,17 +18918,21 @@
           <a:lstStyle xmlns:a="http://schemas.openxmlformats.org/drawingml/2006/main"/>
           <a:p xmlns:a="http://schemas.openxmlformats.org/drawingml/2006/main">
             <a:pPr algn="l">
-              <a:defRPr sz="2100" b="1">
-                <a:solidFill>
-                  <a:srgbClr val="111827"/>
-                </a:solidFill>
-                <a:latin typeface="Aptos"/>
-                <a:ea typeface="Aptos"/>
-                <a:cs typeface="Aptos"/>
-              </a:defRPr>
-            </a:pPr>
-            <a:r>
-              <a:rPr sz="2100" b="1">
+              <a:lnSpc>
+                <a:spcPct val="108000"/>
+              </a:lnSpc>
+              <a:buNone/>
+              <a:defRPr sz="1575" b="1">
+                <a:solidFill>
+                  <a:srgbClr val="111827"/>
+                </a:solidFill>
+                <a:latin typeface="Aptos"/>
+                <a:ea typeface="Aptos"/>
+                <a:cs typeface="Aptos"/>
+              </a:defRPr>
+            </a:pPr>
+            <a:r>
+              <a:rPr sz="1575" b="1">
                 <a:solidFill>
                   <a:srgbClr val="111827"/>
                 </a:solidFill>
@@ -18594,8 +18961,8 @@
         </p:nvSpPr>
         <p:spPr>
           <a:xfrm xmlns:a="http://schemas.openxmlformats.org/drawingml/2006/main">
-            <a:off x="5753100" y="2619375"/>
-            <a:ext cx="2971800" cy="2019300"/>
+            <a:off x="5334000" y="2619375"/>
+            <a:ext cx="3429000" cy="2019300"/>
           </a:xfrm>
           <a:prstGeom xmlns:a="http://schemas.openxmlformats.org/drawingml/2006/main" prst="rect">
             <a:avLst/>
@@ -18611,17 +18978,21 @@
           <a:lstStyle xmlns:a="http://schemas.openxmlformats.org/drawingml/2006/main"/>
           <a:p xmlns:a="http://schemas.openxmlformats.org/drawingml/2006/main">
             <a:pPr algn="l">
-              <a:defRPr sz="1500" b="0">
-                <a:solidFill>
-                  <a:srgbClr val="526174"/>
-                </a:solidFill>
-                <a:latin typeface="Aptos"/>
-                <a:ea typeface="Aptos"/>
-                <a:cs typeface="Aptos"/>
-              </a:defRPr>
-            </a:pPr>
-            <a:r>
-              <a:rPr sz="1500" b="0">
+              <a:lnSpc>
+                <a:spcPct val="112000"/>
+              </a:lnSpc>
+              <a:buNone/>
+              <a:defRPr sz="1350" b="0">
+                <a:solidFill>
+                  <a:srgbClr val="526174"/>
+                </a:solidFill>
+                <a:latin typeface="Aptos"/>
+                <a:ea typeface="Aptos"/>
+                <a:cs typeface="Aptos"/>
+              </a:defRPr>
+            </a:pPr>
+            <a:r>
+              <a:rPr sz="1350" b="0">
                 <a:solidFill>
                   <a:srgbClr val="526174"/>
                 </a:solidFill>
@@ -18650,8 +19021,8 @@
         </p:nvSpPr>
         <p:spPr>
           <a:xfrm xmlns:a="http://schemas.openxmlformats.org/drawingml/2006/main">
-            <a:off x="9334500" y="3143250"/>
-            <a:ext cx="857250" cy="400050"/>
+            <a:off x="8858250" y="3143250"/>
+            <a:ext cx="476250" cy="400050"/>
           </a:xfrm>
           <a:prstGeom xmlns:a="http://schemas.openxmlformats.org/drawingml/2006/main" prst="rightArrow">
             <a:avLst/>
@@ -18683,8 +19054,8 @@
         </p:nvSpPr>
         <p:spPr>
           <a:xfrm xmlns:a="http://schemas.openxmlformats.org/drawingml/2006/main">
-            <a:off x="10382250" y="2190750"/>
-            <a:ext cx="1333500" cy="2381250"/>
+            <a:off x="9429750" y="2190750"/>
+            <a:ext cx="1962150" cy="2381250"/>
           </a:xfrm>
           <a:prstGeom xmlns:a="http://schemas.openxmlformats.org/drawingml/2006/main" prst="roundRect">
             <a:avLst>
@@ -18718,8 +19089,8 @@
         </p:nvSpPr>
         <p:spPr>
           <a:xfrm xmlns:a="http://schemas.openxmlformats.org/drawingml/2006/main">
-            <a:off x="10610850" y="2400300"/>
-            <a:ext cx="876300" cy="361950"/>
+            <a:off x="9525000" y="2400300"/>
+            <a:ext cx="1771650" cy="361950"/>
           </a:xfrm>
           <a:prstGeom xmlns:a="http://schemas.openxmlformats.org/drawingml/2006/main" prst="rect">
             <a:avLst/>
@@ -18735,17 +19106,21 @@
           <a:lstStyle xmlns:a="http://schemas.openxmlformats.org/drawingml/2006/main"/>
           <a:p xmlns:a="http://schemas.openxmlformats.org/drawingml/2006/main">
             <a:pPr algn="l">
-              <a:defRPr sz="2100" b="1">
-                <a:solidFill>
-                  <a:srgbClr val="111827"/>
-                </a:solidFill>
-                <a:latin typeface="Aptos"/>
-                <a:ea typeface="Aptos"/>
-                <a:cs typeface="Aptos"/>
-              </a:defRPr>
-            </a:pPr>
-            <a:r>
-              <a:rPr sz="2100" b="1">
+              <a:lnSpc>
+                <a:spcPct val="106000"/>
+              </a:lnSpc>
+              <a:buNone/>
+              <a:defRPr sz="1275" b="1">
+                <a:solidFill>
+                  <a:srgbClr val="111827"/>
+                </a:solidFill>
+                <a:latin typeface="Aptos"/>
+                <a:ea typeface="Aptos"/>
+                <a:cs typeface="Aptos"/>
+              </a:defRPr>
+            </a:pPr>
+            <a:r>
+              <a:rPr sz="1275" b="1">
                 <a:solidFill>
                   <a:srgbClr val="111827"/>
                 </a:solidFill>
@@ -18774,8 +19149,8 @@
         </p:nvSpPr>
         <p:spPr>
           <a:xfrm xmlns:a="http://schemas.openxmlformats.org/drawingml/2006/main">
-            <a:off x="10610850" y="2857500"/>
-            <a:ext cx="876300" cy="1543050"/>
+            <a:off x="9525000" y="2857500"/>
+            <a:ext cx="1771650" cy="1543050"/>
           </a:xfrm>
           <a:prstGeom xmlns:a="http://schemas.openxmlformats.org/drawingml/2006/main" prst="rect">
             <a:avLst/>
@@ -18791,17 +19166,21 @@
           <a:lstStyle xmlns:a="http://schemas.openxmlformats.org/drawingml/2006/main"/>
           <a:p xmlns:a="http://schemas.openxmlformats.org/drawingml/2006/main">
             <a:pPr algn="l">
-              <a:defRPr sz="1500" b="0">
-                <a:solidFill>
-                  <a:srgbClr val="526174"/>
-                </a:solidFill>
-                <a:latin typeface="Aptos"/>
-                <a:ea typeface="Aptos"/>
-                <a:cs typeface="Aptos"/>
-              </a:defRPr>
-            </a:pPr>
-            <a:r>
-              <a:rPr sz="1500" b="0">
+              <a:lnSpc>
+                <a:spcPct val="106000"/>
+              </a:lnSpc>
+              <a:buNone/>
+              <a:defRPr sz="1125" b="0">
+                <a:solidFill>
+                  <a:srgbClr val="526174"/>
+                </a:solidFill>
+                <a:latin typeface="Aptos"/>
+                <a:ea typeface="Aptos"/>
+                <a:cs typeface="Aptos"/>
+              </a:defRPr>
+            </a:pPr>
+            <a:r>
+              <a:rPr sz="1125" b="0">
                 <a:solidFill>
                   <a:srgbClr val="526174"/>
                 </a:solidFill>
@@ -18814,17 +19193,21 @@
           </a:p>
           <a:p xmlns:a="http://schemas.openxmlformats.org/drawingml/2006/main">
             <a:pPr algn="l">
-              <a:defRPr sz="1500" b="0">
-                <a:solidFill>
-                  <a:srgbClr val="526174"/>
-                </a:solidFill>
-                <a:latin typeface="Aptos"/>
-                <a:ea typeface="Aptos"/>
-                <a:cs typeface="Aptos"/>
-              </a:defRPr>
-            </a:pPr>
-            <a:r>
-              <a:rPr sz="1500" b="0">
+              <a:lnSpc>
+                <a:spcPct val="106000"/>
+              </a:lnSpc>
+              <a:buNone/>
+              <a:defRPr sz="1125" b="0">
+                <a:solidFill>
+                  <a:srgbClr val="526174"/>
+                </a:solidFill>
+                <a:latin typeface="Aptos"/>
+                <a:ea typeface="Aptos"/>
+                <a:cs typeface="Aptos"/>
+              </a:defRPr>
+            </a:pPr>
+            <a:r>
+              <a:rPr sz="1125" b="0">
                 <a:solidFill>
                   <a:srgbClr val="526174"/>
                 </a:solidFill>
@@ -18837,17 +19220,21 @@
           </a:p>
           <a:p xmlns:a="http://schemas.openxmlformats.org/drawingml/2006/main">
             <a:pPr algn="l">
-              <a:defRPr sz="1500" b="0">
-                <a:solidFill>
-                  <a:srgbClr val="526174"/>
-                </a:solidFill>
-                <a:latin typeface="Aptos"/>
-                <a:ea typeface="Aptos"/>
-                <a:cs typeface="Aptos"/>
-              </a:defRPr>
-            </a:pPr>
-            <a:r>
-              <a:rPr sz="1500" b="0">
+              <a:lnSpc>
+                <a:spcPct val="106000"/>
+              </a:lnSpc>
+              <a:buNone/>
+              <a:defRPr sz="1125" b="0">
+                <a:solidFill>
+                  <a:srgbClr val="526174"/>
+                </a:solidFill>
+                <a:latin typeface="Aptos"/>
+                <a:ea typeface="Aptos"/>
+                <a:cs typeface="Aptos"/>
+              </a:defRPr>
+            </a:pPr>
+            <a:r>
+              <a:rPr sz="1125" b="0">
                 <a:solidFill>
                   <a:srgbClr val="526174"/>
                 </a:solidFill>
@@ -18893,17 +19280,21 @@
           <a:lstStyle xmlns:a="http://schemas.openxmlformats.org/drawingml/2006/main"/>
           <a:p xmlns:a="http://schemas.openxmlformats.org/drawingml/2006/main">
             <a:pPr algn="ctr">
-              <a:defRPr sz="2100" b="1">
-                <a:solidFill>
-                  <a:srgbClr val="111827"/>
-                </a:solidFill>
-                <a:latin typeface="Aptos"/>
-                <a:ea typeface="Aptos"/>
-                <a:cs typeface="Aptos"/>
-              </a:defRPr>
-            </a:pPr>
-            <a:r>
-              <a:rPr sz="2100" b="1">
+              <a:lnSpc>
+                <a:spcPct val="108000"/>
+              </a:lnSpc>
+              <a:buNone/>
+              <a:defRPr sz="1575" b="1">
+                <a:solidFill>
+                  <a:srgbClr val="111827"/>
+                </a:solidFill>
+                <a:latin typeface="Aptos"/>
+                <a:ea typeface="Aptos"/>
+                <a:cs typeface="Aptos"/>
+              </a:defRPr>
+            </a:pPr>
+            <a:r>
+              <a:rPr sz="1575" b="1">
                 <a:solidFill>
                   <a:srgbClr val="111827"/>
                 </a:solidFill>
@@ -18978,6 +19369,7 @@
           <a:lstStyle xmlns:a="http://schemas.openxmlformats.org/drawingml/2006/main"/>
           <a:p xmlns:a="http://schemas.openxmlformats.org/drawingml/2006/main">
             <a:pPr algn="l">
+              <a:buNone/>
               <a:defRPr sz="1200" b="1">
                 <a:solidFill>
                   <a:srgbClr val="526174"/>
@@ -19034,6 +19426,7 @@
           <a:lstStyle xmlns:a="http://schemas.openxmlformats.org/drawingml/2006/main"/>
           <a:p xmlns:a="http://schemas.openxmlformats.org/drawingml/2006/main">
             <a:pPr algn="r">
+              <a:buNone/>
               <a:defRPr sz="1050" b="0">
                 <a:solidFill>
                   <a:srgbClr val="526174"/>
@@ -19090,6 +19483,7 @@
           <a:lstStyle xmlns:a="http://schemas.openxmlformats.org/drawingml/2006/main"/>
           <a:p xmlns:a="http://schemas.openxmlformats.org/drawingml/2006/main">
             <a:pPr algn="l">
+              <a:buNone/>
               <a:defRPr sz="3600" b="1">
                 <a:solidFill>
                   <a:srgbClr val="111827"/>
@@ -19216,6 +19610,7 @@
           <a:lstStyle xmlns:a="http://schemas.openxmlformats.org/drawingml/2006/main"/>
           <a:p xmlns:a="http://schemas.openxmlformats.org/drawingml/2006/main">
             <a:pPr algn="l">
+              <a:buNone/>
               <a:defRPr sz="2250" b="1">
                 <a:solidFill>
                   <a:srgbClr val="111827"/>
@@ -19272,6 +19667,7 @@
           <a:lstStyle xmlns:a="http://schemas.openxmlformats.org/drawingml/2006/main"/>
           <a:p xmlns:a="http://schemas.openxmlformats.org/drawingml/2006/main">
             <a:pPr algn="l">
+              <a:buNone/>
               <a:defRPr sz="1800" b="0">
                 <a:solidFill>
                   <a:srgbClr val="111827"/>
@@ -19300,6 +19696,7 @@
           </a:p>
           <a:p xmlns:a="http://schemas.openxmlformats.org/drawingml/2006/main">
             <a:pPr algn="l">
+              <a:buNone/>
               <a:defRPr sz="1800" b="0">
                 <a:solidFill>
                   <a:srgbClr val="111827"/>
@@ -19323,6 +19720,7 @@
           </a:p>
           <a:p xmlns:a="http://schemas.openxmlformats.org/drawingml/2006/main">
             <a:pPr algn="l">
+              <a:buNone/>
               <a:defRPr sz="1800" b="0">
                 <a:solidFill>
                   <a:srgbClr val="111827"/>
@@ -19346,6 +19744,7 @@
           </a:p>
           <a:p xmlns:a="http://schemas.openxmlformats.org/drawingml/2006/main">
             <a:pPr algn="l">
+              <a:buNone/>
               <a:defRPr sz="1800" b="0">
                 <a:solidFill>
                   <a:srgbClr val="111827"/>
@@ -19369,6 +19768,7 @@
           </a:p>
           <a:p xmlns:a="http://schemas.openxmlformats.org/drawingml/2006/main">
             <a:pPr algn="l">
+              <a:buNone/>
               <a:defRPr sz="1800" b="0">
                 <a:solidFill>
                   <a:srgbClr val="111827"/>
@@ -19392,6 +19792,7 @@
           </a:p>
           <a:p xmlns:a="http://schemas.openxmlformats.org/drawingml/2006/main">
             <a:pPr algn="l">
+              <a:buNone/>
               <a:defRPr sz="1800" b="0">
                 <a:solidFill>
                   <a:srgbClr val="111827"/>
@@ -19448,6 +19849,7 @@
           <a:lstStyle xmlns:a="http://schemas.openxmlformats.org/drawingml/2006/main"/>
           <a:p xmlns:a="http://schemas.openxmlformats.org/drawingml/2006/main">
             <a:pPr algn="l">
+              <a:buNone/>
               <a:defRPr sz="2250" b="1">
                 <a:solidFill>
                   <a:srgbClr val="111827"/>
@@ -19504,6 +19906,7 @@
           <a:lstStyle xmlns:a="http://schemas.openxmlformats.org/drawingml/2006/main"/>
           <a:p xmlns:a="http://schemas.openxmlformats.org/drawingml/2006/main">
             <a:pPr algn="l">
+              <a:buNone/>
               <a:defRPr sz="1800" b="0">
                 <a:solidFill>
                   <a:srgbClr val="111827"/>
@@ -19532,6 +19935,7 @@
           </a:p>
           <a:p xmlns:a="http://schemas.openxmlformats.org/drawingml/2006/main">
             <a:pPr algn="l">
+              <a:buNone/>
               <a:defRPr sz="1800" b="0">
                 <a:solidFill>
                   <a:srgbClr val="111827"/>
@@ -19555,6 +19959,7 @@
           </a:p>
           <a:p xmlns:a="http://schemas.openxmlformats.org/drawingml/2006/main">
             <a:pPr algn="l">
+              <a:buNone/>
               <a:defRPr sz="1800" b="0">
                 <a:solidFill>
                   <a:srgbClr val="111827"/>
@@ -19578,6 +19983,7 @@
           </a:p>
           <a:p xmlns:a="http://schemas.openxmlformats.org/drawingml/2006/main">
             <a:pPr algn="l">
+              <a:buNone/>
               <a:defRPr sz="1800" b="0">
                 <a:solidFill>
                   <a:srgbClr val="111827"/>
@@ -19601,6 +20007,7 @@
           </a:p>
           <a:p xmlns:a="http://schemas.openxmlformats.org/drawingml/2006/main">
             <a:pPr algn="l">
+              <a:buNone/>
               <a:defRPr sz="1800" b="0">
                 <a:solidFill>
                   <a:srgbClr val="111827"/>
@@ -19624,6 +20031,7 @@
           </a:p>
           <a:p xmlns:a="http://schemas.openxmlformats.org/drawingml/2006/main">
             <a:pPr algn="l">
+              <a:buNone/>
               <a:defRPr sz="1800" b="0">
                 <a:solidFill>
                   <a:srgbClr val="111827"/>
@@ -19680,6 +20088,7 @@
           <a:lstStyle xmlns:a="http://schemas.openxmlformats.org/drawingml/2006/main"/>
           <a:p xmlns:a="http://schemas.openxmlformats.org/drawingml/2006/main">
             <a:pPr algn="ctr">
+              <a:buNone/>
               <a:defRPr sz="1950" b="1">
                 <a:solidFill>
                   <a:srgbClr val="111827"/>
@@ -19765,6 +20174,7 @@
           <a:lstStyle xmlns:a="http://schemas.openxmlformats.org/drawingml/2006/main"/>
           <a:p xmlns:a="http://schemas.openxmlformats.org/drawingml/2006/main">
             <a:pPr algn="l">
+              <a:buNone/>
               <a:defRPr sz="1200" b="1">
                 <a:solidFill>
                   <a:srgbClr val="526174"/>
@@ -19821,6 +20231,7 @@
           <a:lstStyle xmlns:a="http://schemas.openxmlformats.org/drawingml/2006/main"/>
           <a:p xmlns:a="http://schemas.openxmlformats.org/drawingml/2006/main">
             <a:pPr algn="r">
+              <a:buNone/>
               <a:defRPr sz="1050" b="0">
                 <a:solidFill>
                   <a:srgbClr val="526174"/>
@@ -19877,6 +20288,7 @@
           <a:lstStyle xmlns:a="http://schemas.openxmlformats.org/drawingml/2006/main"/>
           <a:p xmlns:a="http://schemas.openxmlformats.org/drawingml/2006/main">
             <a:pPr algn="l">
+              <a:buNone/>
               <a:defRPr sz="3600" b="1">
                 <a:solidFill>
                   <a:srgbClr val="111827"/>
@@ -19943,6 +20355,7 @@
           <a:lstStyle xmlns:a="http://schemas.openxmlformats.org/drawingml/2006/main"/>
           <a:p xmlns:a="http://schemas.openxmlformats.org/drawingml/2006/main">
             <a:pPr algn="ctr">
+              <a:buNone/>
               <a:defRPr sz="1350" b="1">
                 <a:solidFill>
                   <a:srgbClr val="2563EB"/>
@@ -19999,6 +20412,7 @@
           <a:lstStyle xmlns:a="http://schemas.openxmlformats.org/drawingml/2006/main"/>
           <a:p xmlns:a="http://schemas.openxmlformats.org/drawingml/2006/main">
             <a:pPr algn="l">
+              <a:buNone/>
               <a:defRPr sz="1650" b="1">
                 <a:solidFill>
                   <a:srgbClr val="2563EB"/>
@@ -20055,6 +20469,7 @@
           <a:lstStyle xmlns:a="http://schemas.openxmlformats.org/drawingml/2006/main"/>
           <a:p xmlns:a="http://schemas.openxmlformats.org/drawingml/2006/main">
             <a:pPr algn="l">
+              <a:buNone/>
               <a:defRPr sz="1725" b="0">
                 <a:solidFill>
                   <a:srgbClr val="111827"/>
@@ -20121,6 +20536,7 @@
           <a:lstStyle xmlns:a="http://schemas.openxmlformats.org/drawingml/2006/main"/>
           <a:p xmlns:a="http://schemas.openxmlformats.org/drawingml/2006/main">
             <a:pPr algn="ctr">
+              <a:buNone/>
               <a:defRPr sz="1350" b="1">
                 <a:solidFill>
                   <a:srgbClr val="B91C1C"/>
@@ -20177,6 +20593,7 @@
           <a:lstStyle xmlns:a="http://schemas.openxmlformats.org/drawingml/2006/main"/>
           <a:p xmlns:a="http://schemas.openxmlformats.org/drawingml/2006/main">
             <a:pPr algn="l">
+              <a:buNone/>
               <a:defRPr sz="1650" b="1">
                 <a:solidFill>
                   <a:srgbClr val="B91C1C"/>
@@ -20233,6 +20650,7 @@
           <a:lstStyle xmlns:a="http://schemas.openxmlformats.org/drawingml/2006/main"/>
           <a:p xmlns:a="http://schemas.openxmlformats.org/drawingml/2006/main">
             <a:pPr algn="l">
+              <a:buNone/>
               <a:defRPr sz="1725" b="0">
                 <a:solidFill>
                   <a:srgbClr val="111827"/>
@@ -20299,6 +20717,7 @@
           <a:lstStyle xmlns:a="http://schemas.openxmlformats.org/drawingml/2006/main"/>
           <a:p xmlns:a="http://schemas.openxmlformats.org/drawingml/2006/main">
             <a:pPr algn="ctr">
+              <a:buNone/>
               <a:defRPr sz="1350" b="1">
                 <a:solidFill>
                   <a:srgbClr val="D97706"/>
@@ -20355,6 +20774,7 @@
           <a:lstStyle xmlns:a="http://schemas.openxmlformats.org/drawingml/2006/main"/>
           <a:p xmlns:a="http://schemas.openxmlformats.org/drawingml/2006/main">
             <a:pPr algn="l">
+              <a:buNone/>
               <a:defRPr sz="1650" b="1">
                 <a:solidFill>
                   <a:srgbClr val="D97706"/>
@@ -20411,6 +20831,7 @@
           <a:lstStyle xmlns:a="http://schemas.openxmlformats.org/drawingml/2006/main"/>
           <a:p xmlns:a="http://schemas.openxmlformats.org/drawingml/2006/main">
             <a:pPr algn="l">
+              <a:buNone/>
               <a:defRPr sz="1725" b="0">
                 <a:solidFill>
                   <a:srgbClr val="111827"/>
@@ -20477,6 +20898,7 @@
           <a:lstStyle xmlns:a="http://schemas.openxmlformats.org/drawingml/2006/main"/>
           <a:p xmlns:a="http://schemas.openxmlformats.org/drawingml/2006/main">
             <a:pPr algn="ctr">
+              <a:buNone/>
               <a:defRPr sz="1350" b="1">
                 <a:solidFill>
                   <a:srgbClr val="15803D"/>
@@ -20533,6 +20955,7 @@
           <a:lstStyle xmlns:a="http://schemas.openxmlformats.org/drawingml/2006/main"/>
           <a:p xmlns:a="http://schemas.openxmlformats.org/drawingml/2006/main">
             <a:pPr algn="l">
+              <a:buNone/>
               <a:defRPr sz="1650" b="1">
                 <a:solidFill>
                   <a:srgbClr val="15803D"/>
@@ -20589,6 +21012,7 @@
           <a:lstStyle xmlns:a="http://schemas.openxmlformats.org/drawingml/2006/main"/>
           <a:p xmlns:a="http://schemas.openxmlformats.org/drawingml/2006/main">
             <a:pPr algn="l">
+              <a:buNone/>
               <a:defRPr sz="1725" b="0">
                 <a:solidFill>
                   <a:srgbClr val="111827"/>
@@ -20655,6 +21079,7 @@
           <a:lstStyle xmlns:a="http://schemas.openxmlformats.org/drawingml/2006/main"/>
           <a:p xmlns:a="http://schemas.openxmlformats.org/drawingml/2006/main">
             <a:pPr algn="ctr">
+              <a:buNone/>
               <a:defRPr sz="1350" b="1">
                 <a:solidFill>
                   <a:srgbClr val="0891B2"/>
@@ -20711,6 +21136,7 @@
           <a:lstStyle xmlns:a="http://schemas.openxmlformats.org/drawingml/2006/main"/>
           <a:p xmlns:a="http://schemas.openxmlformats.org/drawingml/2006/main">
             <a:pPr algn="l">
+              <a:buNone/>
               <a:defRPr sz="1650" b="1">
                 <a:solidFill>
                   <a:srgbClr val="0891B2"/>
@@ -20767,6 +21193,7 @@
           <a:lstStyle xmlns:a="http://schemas.openxmlformats.org/drawingml/2006/main"/>
           <a:p xmlns:a="http://schemas.openxmlformats.org/drawingml/2006/main">
             <a:pPr algn="l">
+              <a:buNone/>
               <a:defRPr sz="1725" b="0">
                 <a:solidFill>
                   <a:srgbClr val="111827"/>
@@ -20852,6 +21279,7 @@
           <a:lstStyle xmlns:a="http://schemas.openxmlformats.org/drawingml/2006/main"/>
           <a:p xmlns:a="http://schemas.openxmlformats.org/drawingml/2006/main">
             <a:pPr algn="l">
+              <a:buNone/>
               <a:defRPr sz="1200" b="1">
                 <a:solidFill>
                   <a:srgbClr val="526174"/>
@@ -20908,6 +21336,7 @@
           <a:lstStyle xmlns:a="http://schemas.openxmlformats.org/drawingml/2006/main"/>
           <a:p xmlns:a="http://schemas.openxmlformats.org/drawingml/2006/main">
             <a:pPr algn="r">
+              <a:buNone/>
               <a:defRPr sz="1050" b="0">
                 <a:solidFill>
                   <a:srgbClr val="526174"/>
@@ -20964,6 +21393,7 @@
           <a:lstStyle xmlns:a="http://schemas.openxmlformats.org/drawingml/2006/main"/>
           <a:p xmlns:a="http://schemas.openxmlformats.org/drawingml/2006/main">
             <a:pPr algn="l">
+              <a:buNone/>
               <a:defRPr sz="3600" b="1">
                 <a:solidFill>
                   <a:srgbClr val="111827"/>
@@ -21055,6 +21485,7 @@
           <a:lstStyle xmlns:a="http://schemas.openxmlformats.org/drawingml/2006/main"/>
           <a:p xmlns:a="http://schemas.openxmlformats.org/drawingml/2006/main">
             <a:pPr algn="l">
+              <a:buNone/>
               <a:defRPr sz="2100" b="1">
                 <a:solidFill>
                   <a:srgbClr val="111827"/>
@@ -21111,6 +21542,7 @@
           <a:lstStyle xmlns:a="http://schemas.openxmlformats.org/drawingml/2006/main"/>
           <a:p xmlns:a="http://schemas.openxmlformats.org/drawingml/2006/main">
             <a:pPr algn="l">
+              <a:buNone/>
               <a:defRPr sz="1500" b="0">
                 <a:solidFill>
                   <a:srgbClr val="526174"/>
@@ -21134,6 +21566,7 @@
           </a:p>
           <a:p xmlns:a="http://schemas.openxmlformats.org/drawingml/2006/main">
             <a:pPr algn="l">
+              <a:buNone/>
               <a:defRPr sz="1500" b="0">
                 <a:solidFill>
                   <a:srgbClr val="526174"/>
@@ -21157,6 +21590,7 @@
           </a:p>
           <a:p xmlns:a="http://schemas.openxmlformats.org/drawingml/2006/main">
             <a:pPr algn="l">
+              <a:buNone/>
               <a:defRPr sz="1500" b="0">
                 <a:solidFill>
                   <a:srgbClr val="526174"/>
@@ -21180,6 +21614,7 @@
           </a:p>
           <a:p xmlns:a="http://schemas.openxmlformats.org/drawingml/2006/main">
             <a:pPr algn="l">
+              <a:buNone/>
               <a:defRPr sz="1500" b="0">
                 <a:solidFill>
                   <a:srgbClr val="526174"/>
@@ -21203,6 +21638,7 @@
           </a:p>
           <a:p xmlns:a="http://schemas.openxmlformats.org/drawingml/2006/main">
             <a:pPr algn="l">
+              <a:buNone/>
               <a:defRPr sz="1500" b="0">
                 <a:solidFill>
                   <a:srgbClr val="526174"/>
@@ -21327,6 +21763,7 @@
           <a:lstStyle xmlns:a="http://schemas.openxmlformats.org/drawingml/2006/main"/>
           <a:p xmlns:a="http://schemas.openxmlformats.org/drawingml/2006/main">
             <a:pPr algn="l">
+              <a:buNone/>
               <a:defRPr sz="2100" b="1">
                 <a:solidFill>
                   <a:srgbClr val="111827"/>
@@ -21383,6 +21820,7 @@
           <a:lstStyle xmlns:a="http://schemas.openxmlformats.org/drawingml/2006/main"/>
           <a:p xmlns:a="http://schemas.openxmlformats.org/drawingml/2006/main">
             <a:pPr algn="l">
+              <a:buNone/>
               <a:defRPr sz="1500" b="0">
                 <a:solidFill>
                   <a:srgbClr val="526174"/>
@@ -21406,6 +21844,7 @@
           </a:p>
           <a:p xmlns:a="http://schemas.openxmlformats.org/drawingml/2006/main">
             <a:pPr algn="l">
+              <a:buNone/>
               <a:defRPr sz="1500" b="0">
                 <a:solidFill>
                   <a:srgbClr val="526174"/>
@@ -21429,6 +21868,7 @@
           </a:p>
           <a:p xmlns:a="http://schemas.openxmlformats.org/drawingml/2006/main">
             <a:pPr algn="l">
+              <a:buNone/>
               <a:defRPr sz="1500" b="0">
                 <a:solidFill>
                   <a:srgbClr val="526174"/>
@@ -21452,6 +21892,7 @@
           </a:p>
           <a:p xmlns:a="http://schemas.openxmlformats.org/drawingml/2006/main">
             <a:pPr algn="l">
+              <a:buNone/>
               <a:defRPr sz="1500" b="0">
                 <a:solidFill>
                   <a:srgbClr val="526174"/>
@@ -21475,6 +21916,7 @@
           </a:p>
           <a:p xmlns:a="http://schemas.openxmlformats.org/drawingml/2006/main">
             <a:pPr algn="l">
+              <a:buNone/>
               <a:defRPr sz="1500" b="0">
                 <a:solidFill>
                   <a:srgbClr val="526174"/>
@@ -21599,6 +22041,7 @@
           <a:lstStyle xmlns:a="http://schemas.openxmlformats.org/drawingml/2006/main"/>
           <a:p xmlns:a="http://schemas.openxmlformats.org/drawingml/2006/main">
             <a:pPr algn="l">
+              <a:buNone/>
               <a:defRPr sz="2100" b="1">
                 <a:solidFill>
                   <a:srgbClr val="111827"/>
@@ -21655,6 +22098,7 @@
           <a:lstStyle xmlns:a="http://schemas.openxmlformats.org/drawingml/2006/main"/>
           <a:p xmlns:a="http://schemas.openxmlformats.org/drawingml/2006/main">
             <a:pPr algn="l">
+              <a:buNone/>
               <a:defRPr sz="1500" b="0">
                 <a:solidFill>
                   <a:srgbClr val="526174"/>
@@ -21678,6 +22122,7 @@
           </a:p>
           <a:p xmlns:a="http://schemas.openxmlformats.org/drawingml/2006/main">
             <a:pPr algn="l">
+              <a:buNone/>
               <a:defRPr sz="1500" b="0">
                 <a:solidFill>
                   <a:srgbClr val="526174"/>
@@ -21701,6 +22146,7 @@
           </a:p>
           <a:p xmlns:a="http://schemas.openxmlformats.org/drawingml/2006/main">
             <a:pPr algn="l">
+              <a:buNone/>
               <a:defRPr sz="1500" b="0">
                 <a:solidFill>
                   <a:srgbClr val="526174"/>
@@ -21724,6 +22170,7 @@
           </a:p>
           <a:p xmlns:a="http://schemas.openxmlformats.org/drawingml/2006/main">
             <a:pPr algn="l">
+              <a:buNone/>
               <a:defRPr sz="1500" b="0">
                 <a:solidFill>
                   <a:srgbClr val="526174"/>
@@ -21747,6 +22194,7 @@
           </a:p>
           <a:p xmlns:a="http://schemas.openxmlformats.org/drawingml/2006/main">
             <a:pPr algn="l">
+              <a:buNone/>
               <a:defRPr sz="1500" b="0">
                 <a:solidFill>
                   <a:srgbClr val="526174"/>
@@ -21803,6 +22251,7 @@
           <a:lstStyle xmlns:a="http://schemas.openxmlformats.org/drawingml/2006/main"/>
           <a:p xmlns:a="http://schemas.openxmlformats.org/drawingml/2006/main">
             <a:pPr algn="ctr">
+              <a:buNone/>
               <a:defRPr sz="2100" b="1">
                 <a:solidFill>
                   <a:srgbClr val="111827"/>
@@ -21888,6 +22337,7 @@
           <a:lstStyle xmlns:a="http://schemas.openxmlformats.org/drawingml/2006/main"/>
           <a:p xmlns:a="http://schemas.openxmlformats.org/drawingml/2006/main">
             <a:pPr algn="l">
+              <a:buNone/>
               <a:defRPr sz="1350" b="1">
                 <a:solidFill>
                   <a:srgbClr val="77A7FF"/>
@@ -21944,6 +22394,7 @@
           <a:lstStyle xmlns:a="http://schemas.openxmlformats.org/drawingml/2006/main"/>
           <a:p xmlns:a="http://schemas.openxmlformats.org/drawingml/2006/main">
             <a:pPr algn="l">
+              <a:buNone/>
               <a:defRPr sz="5100" b="1">
                 <a:solidFill>
                   <a:srgbClr val="FFFFFF"/>
@@ -22000,6 +22451,7 @@
           <a:lstStyle xmlns:a="http://schemas.openxmlformats.org/drawingml/2006/main"/>
           <a:p xmlns:a="http://schemas.openxmlformats.org/drawingml/2006/main">
             <a:pPr algn="l">
+              <a:buNone/>
               <a:defRPr sz="2100" b="0">
                 <a:solidFill>
                   <a:srgbClr val="B8C5D6"/>
@@ -22085,6 +22537,7 @@
           <a:lstStyle xmlns:a="http://schemas.openxmlformats.org/drawingml/2006/main"/>
           <a:p xmlns:a="http://schemas.openxmlformats.org/drawingml/2006/main">
             <a:pPr algn="l">
+              <a:buNone/>
               <a:defRPr sz="1350" b="1">
                 <a:solidFill>
                   <a:srgbClr val="93C5FD"/>
@@ -22141,6 +22594,7 @@
           <a:lstStyle xmlns:a="http://schemas.openxmlformats.org/drawingml/2006/main"/>
           <a:p xmlns:a="http://schemas.openxmlformats.org/drawingml/2006/main">
             <a:pPr algn="l">
+              <a:buNone/>
               <a:defRPr sz="5100" b="1">
                 <a:solidFill>
                   <a:srgbClr val="FFFFFF"/>
@@ -22197,6 +22651,7 @@
           <a:lstStyle xmlns:a="http://schemas.openxmlformats.org/drawingml/2006/main"/>
           <a:p xmlns:a="http://schemas.openxmlformats.org/drawingml/2006/main">
             <a:pPr algn="l">
+              <a:buNone/>
               <a:defRPr sz="2100" b="0">
                 <a:solidFill>
                   <a:srgbClr val="B8C5D6"/>
@@ -22282,6 +22737,7 @@
           <a:lstStyle xmlns:a="http://schemas.openxmlformats.org/drawingml/2006/main"/>
           <a:p xmlns:a="http://schemas.openxmlformats.org/drawingml/2006/main">
             <a:pPr algn="l">
+              <a:buNone/>
               <a:defRPr sz="1200" b="1">
                 <a:solidFill>
                   <a:srgbClr val="526174"/>
@@ -22338,6 +22794,7 @@
           <a:lstStyle xmlns:a="http://schemas.openxmlformats.org/drawingml/2006/main"/>
           <a:p xmlns:a="http://schemas.openxmlformats.org/drawingml/2006/main">
             <a:pPr algn="r">
+              <a:buNone/>
               <a:defRPr sz="1050" b="0">
                 <a:solidFill>
                   <a:srgbClr val="526174"/>
@@ -22394,6 +22851,7 @@
           <a:lstStyle xmlns:a="http://schemas.openxmlformats.org/drawingml/2006/main"/>
           <a:p xmlns:a="http://schemas.openxmlformats.org/drawingml/2006/main">
             <a:pPr algn="l">
+              <a:buNone/>
               <a:defRPr sz="3600" b="1">
                 <a:solidFill>
                   <a:srgbClr val="111827"/>
@@ -22485,6 +22943,7 @@
           <a:lstStyle xmlns:a="http://schemas.openxmlformats.org/drawingml/2006/main"/>
           <a:p xmlns:a="http://schemas.openxmlformats.org/drawingml/2006/main">
             <a:pPr algn="l">
+              <a:buNone/>
               <a:defRPr sz="2100" b="1">
                 <a:solidFill>
                   <a:srgbClr val="111827"/>
@@ -22541,6 +23000,7 @@
           <a:lstStyle xmlns:a="http://schemas.openxmlformats.org/drawingml/2006/main"/>
           <a:p xmlns:a="http://schemas.openxmlformats.org/drawingml/2006/main">
             <a:pPr algn="l">
+              <a:buNone/>
               <a:defRPr sz="1500" b="0">
                 <a:solidFill>
                   <a:srgbClr val="526174"/>
@@ -22665,6 +23125,7 @@
           <a:lstStyle xmlns:a="http://schemas.openxmlformats.org/drawingml/2006/main"/>
           <a:p xmlns:a="http://schemas.openxmlformats.org/drawingml/2006/main">
             <a:pPr algn="l">
+              <a:buNone/>
               <a:defRPr sz="2100" b="1">
                 <a:solidFill>
                   <a:srgbClr val="111827"/>
@@ -22721,6 +23182,7 @@
           <a:lstStyle xmlns:a="http://schemas.openxmlformats.org/drawingml/2006/main"/>
           <a:p xmlns:a="http://schemas.openxmlformats.org/drawingml/2006/main">
             <a:pPr algn="l">
+              <a:buNone/>
               <a:defRPr sz="1500" b="0">
                 <a:solidFill>
                   <a:srgbClr val="526174"/>
@@ -22812,6 +23274,7 @@
           <a:lstStyle xmlns:a="http://schemas.openxmlformats.org/drawingml/2006/main"/>
           <a:p xmlns:a="http://schemas.openxmlformats.org/drawingml/2006/main">
             <a:pPr algn="l">
+              <a:buNone/>
               <a:defRPr sz="2100" b="1">
                 <a:solidFill>
                   <a:srgbClr val="111827"/>
@@ -22868,6 +23331,7 @@
           <a:lstStyle xmlns:a="http://schemas.openxmlformats.org/drawingml/2006/main"/>
           <a:p xmlns:a="http://schemas.openxmlformats.org/drawingml/2006/main">
             <a:pPr algn="l">
+              <a:buNone/>
               <a:defRPr sz="1500" b="0">
                 <a:solidFill>
                   <a:srgbClr val="526174"/>
@@ -22959,6 +23423,7 @@
           <a:lstStyle xmlns:a="http://schemas.openxmlformats.org/drawingml/2006/main"/>
           <a:p xmlns:a="http://schemas.openxmlformats.org/drawingml/2006/main">
             <a:pPr algn="l">
+              <a:buNone/>
               <a:defRPr sz="2100" b="1">
                 <a:solidFill>
                   <a:srgbClr val="111827"/>
@@ -23015,6 +23480,7 @@
           <a:lstStyle xmlns:a="http://schemas.openxmlformats.org/drawingml/2006/main"/>
           <a:p xmlns:a="http://schemas.openxmlformats.org/drawingml/2006/main">
             <a:pPr algn="l">
+              <a:buNone/>
               <a:defRPr sz="1500" b="0">
                 <a:solidFill>
                   <a:srgbClr val="526174"/>
@@ -23106,6 +23572,7 @@
           <a:lstStyle xmlns:a="http://schemas.openxmlformats.org/drawingml/2006/main"/>
           <a:p xmlns:a="http://schemas.openxmlformats.org/drawingml/2006/main">
             <a:pPr algn="l">
+              <a:buNone/>
               <a:defRPr sz="2100" b="1">
                 <a:solidFill>
                   <a:srgbClr val="111827"/>
@@ -23162,6 +23629,7 @@
           <a:lstStyle xmlns:a="http://schemas.openxmlformats.org/drawingml/2006/main"/>
           <a:p xmlns:a="http://schemas.openxmlformats.org/drawingml/2006/main">
             <a:pPr algn="l">
+              <a:buNone/>
               <a:defRPr sz="1500" b="0">
                 <a:solidFill>
                   <a:srgbClr val="526174"/>
@@ -23185,6 +23653,7 @@
           </a:p>
           <a:p xmlns:a="http://schemas.openxmlformats.org/drawingml/2006/main">
             <a:pPr algn="l">
+              <a:buNone/>
               <a:defRPr sz="1500" b="0">
                 <a:solidFill>
                   <a:srgbClr val="526174"/>
@@ -23208,6 +23677,7 @@
           </a:p>
           <a:p xmlns:a="http://schemas.openxmlformats.org/drawingml/2006/main">
             <a:pPr algn="l">
+              <a:buNone/>
               <a:defRPr sz="1500" b="0">
                 <a:solidFill>
                   <a:srgbClr val="526174"/>
@@ -23293,6 +23763,7 @@
           <a:lstStyle xmlns:a="http://schemas.openxmlformats.org/drawingml/2006/main"/>
           <a:p xmlns:a="http://schemas.openxmlformats.org/drawingml/2006/main">
             <a:pPr algn="l">
+              <a:buNone/>
               <a:defRPr sz="1200" b="1">
                 <a:solidFill>
                   <a:srgbClr val="526174"/>
@@ -23349,6 +23820,7 @@
           <a:lstStyle xmlns:a="http://schemas.openxmlformats.org/drawingml/2006/main"/>
           <a:p xmlns:a="http://schemas.openxmlformats.org/drawingml/2006/main">
             <a:pPr algn="r">
+              <a:buNone/>
               <a:defRPr sz="1050" b="0">
                 <a:solidFill>
                   <a:srgbClr val="526174"/>
@@ -23405,6 +23877,7 @@
           <a:lstStyle xmlns:a="http://schemas.openxmlformats.org/drawingml/2006/main"/>
           <a:p xmlns:a="http://schemas.openxmlformats.org/drawingml/2006/main">
             <a:pPr algn="l">
+              <a:buNone/>
               <a:defRPr sz="3600" b="1">
                 <a:solidFill>
                   <a:srgbClr val="111827"/>
@@ -23496,6 +23969,7 @@
           <a:lstStyle xmlns:a="http://schemas.openxmlformats.org/drawingml/2006/main"/>
           <a:p xmlns:a="http://schemas.openxmlformats.org/drawingml/2006/main">
             <a:pPr algn="l">
+              <a:buNone/>
               <a:defRPr sz="2100" b="1">
                 <a:solidFill>
                   <a:srgbClr val="111827"/>
@@ -23552,6 +24026,7 @@
           <a:lstStyle xmlns:a="http://schemas.openxmlformats.org/drawingml/2006/main"/>
           <a:p xmlns:a="http://schemas.openxmlformats.org/drawingml/2006/main">
             <a:pPr algn="l">
+              <a:buNone/>
               <a:defRPr sz="1500" b="0">
                 <a:solidFill>
                   <a:srgbClr val="526174"/>
@@ -23676,6 +24151,7 @@
           <a:lstStyle xmlns:a="http://schemas.openxmlformats.org/drawingml/2006/main"/>
           <a:p xmlns:a="http://schemas.openxmlformats.org/drawingml/2006/main">
             <a:pPr algn="l">
+              <a:buNone/>
               <a:defRPr sz="2100" b="1">
                 <a:solidFill>
                   <a:srgbClr val="111827"/>
@@ -23732,6 +24208,7 @@
           <a:lstStyle xmlns:a="http://schemas.openxmlformats.org/drawingml/2006/main"/>
           <a:p xmlns:a="http://schemas.openxmlformats.org/drawingml/2006/main">
             <a:pPr algn="l">
+              <a:buNone/>
               <a:defRPr sz="1500" b="0">
                 <a:solidFill>
                   <a:srgbClr val="526174"/>
@@ -23760,6 +24237,7 @@
           </a:p>
           <a:p xmlns:a="http://schemas.openxmlformats.org/drawingml/2006/main">
             <a:pPr algn="l">
+              <a:buNone/>
               <a:defRPr sz="1500" b="0">
                 <a:solidFill>
                   <a:srgbClr val="526174"/>
@@ -23783,6 +24261,7 @@
           </a:p>
           <a:p xmlns:a="http://schemas.openxmlformats.org/drawingml/2006/main">
             <a:pPr algn="l">
+              <a:buNone/>
               <a:defRPr sz="1500" b="0">
                 <a:solidFill>
                   <a:srgbClr val="526174"/>
@@ -23806,6 +24285,7 @@
           </a:p>
           <a:p xmlns:a="http://schemas.openxmlformats.org/drawingml/2006/main">
             <a:pPr algn="l">
+              <a:buNone/>
               <a:defRPr sz="1500" b="0">
                 <a:solidFill>
                   <a:srgbClr val="526174"/>
@@ -23930,6 +24410,7 @@
           <a:lstStyle xmlns:a="http://schemas.openxmlformats.org/drawingml/2006/main"/>
           <a:p xmlns:a="http://schemas.openxmlformats.org/drawingml/2006/main">
             <a:pPr algn="l">
+              <a:buNone/>
               <a:defRPr sz="2100" b="1">
                 <a:solidFill>
                   <a:srgbClr val="111827"/>
@@ -23986,6 +24467,7 @@
           <a:lstStyle xmlns:a="http://schemas.openxmlformats.org/drawingml/2006/main"/>
           <a:p xmlns:a="http://schemas.openxmlformats.org/drawingml/2006/main">
             <a:pPr algn="l">
+              <a:buNone/>
               <a:defRPr sz="1500" b="0">
                 <a:solidFill>
                   <a:srgbClr val="526174"/>
@@ -24071,6 +24553,7 @@
           <a:lstStyle xmlns:a="http://schemas.openxmlformats.org/drawingml/2006/main"/>
           <a:p xmlns:a="http://schemas.openxmlformats.org/drawingml/2006/main">
             <a:pPr algn="l">
+              <a:buNone/>
               <a:defRPr sz="1200" b="1">
                 <a:solidFill>
                   <a:srgbClr val="526174"/>
@@ -24127,6 +24610,7 @@
           <a:lstStyle xmlns:a="http://schemas.openxmlformats.org/drawingml/2006/main"/>
           <a:p xmlns:a="http://schemas.openxmlformats.org/drawingml/2006/main">
             <a:pPr algn="r">
+              <a:buNone/>
               <a:defRPr sz="1050" b="0">
                 <a:solidFill>
                   <a:srgbClr val="526174"/>
@@ -24183,6 +24667,7 @@
           <a:lstStyle xmlns:a="http://schemas.openxmlformats.org/drawingml/2006/main"/>
           <a:p xmlns:a="http://schemas.openxmlformats.org/drawingml/2006/main">
             <a:pPr algn="l">
+              <a:buNone/>
               <a:defRPr sz="3600" b="1">
                 <a:solidFill>
                   <a:srgbClr val="111827"/>
@@ -24239,6 +24724,7 @@
           <a:lstStyle xmlns:a="http://schemas.openxmlformats.org/drawingml/2006/main"/>
           <a:p xmlns:a="http://schemas.openxmlformats.org/drawingml/2006/main">
             <a:pPr algn="ctr">
+              <a:buNone/>
               <a:defRPr sz="2325" b="1">
                 <a:solidFill>
                   <a:srgbClr val="111827"/>
@@ -24330,6 +24816,7 @@
           <a:lstStyle xmlns:a="http://schemas.openxmlformats.org/drawingml/2006/main"/>
           <a:p xmlns:a="http://schemas.openxmlformats.org/drawingml/2006/main">
             <a:pPr algn="l">
+              <a:buNone/>
               <a:defRPr sz="2100" b="1">
                 <a:solidFill>
                   <a:srgbClr val="111827"/>
@@ -24386,6 +24873,7 @@
           <a:lstStyle xmlns:a="http://schemas.openxmlformats.org/drawingml/2006/main"/>
           <a:p xmlns:a="http://schemas.openxmlformats.org/drawingml/2006/main">
             <a:pPr algn="l">
+              <a:buNone/>
               <a:defRPr sz="1500" b="0">
                 <a:solidFill>
                   <a:srgbClr val="526174"/>
@@ -24477,6 +24965,7 @@
           <a:lstStyle xmlns:a="http://schemas.openxmlformats.org/drawingml/2006/main"/>
           <a:p xmlns:a="http://schemas.openxmlformats.org/drawingml/2006/main">
             <a:pPr algn="l">
+              <a:buNone/>
               <a:defRPr sz="2100" b="1">
                 <a:solidFill>
                   <a:srgbClr val="111827"/>
@@ -24533,6 +25022,7 @@
           <a:lstStyle xmlns:a="http://schemas.openxmlformats.org/drawingml/2006/main"/>
           <a:p xmlns:a="http://schemas.openxmlformats.org/drawingml/2006/main">
             <a:pPr algn="l">
+              <a:buNone/>
               <a:defRPr sz="1500" b="0">
                 <a:solidFill>
                   <a:srgbClr val="526174"/>
@@ -24624,6 +25114,7 @@
           <a:lstStyle xmlns:a="http://schemas.openxmlformats.org/drawingml/2006/main"/>
           <a:p xmlns:a="http://schemas.openxmlformats.org/drawingml/2006/main">
             <a:pPr algn="l">
+              <a:buNone/>
               <a:defRPr sz="2100" b="1">
                 <a:solidFill>
                   <a:srgbClr val="111827"/>
@@ -24680,6 +25171,7 @@
           <a:lstStyle xmlns:a="http://schemas.openxmlformats.org/drawingml/2006/main"/>
           <a:p xmlns:a="http://schemas.openxmlformats.org/drawingml/2006/main">
             <a:pPr algn="l">
+              <a:buNone/>
               <a:defRPr sz="1500" b="0">
                 <a:solidFill>
                   <a:srgbClr val="526174"/>
@@ -24831,6 +25323,7 @@
           <a:lstStyle xmlns:a="http://schemas.openxmlformats.org/drawingml/2006/main"/>
           <a:p xmlns:a="http://schemas.openxmlformats.org/drawingml/2006/main">
             <a:pPr algn="l">
+              <a:buNone/>
               <a:defRPr sz="1200" b="1">
                 <a:solidFill>
                   <a:srgbClr val="526174"/>
@@ -24887,6 +25380,7 @@
           <a:lstStyle xmlns:a="http://schemas.openxmlformats.org/drawingml/2006/main"/>
           <a:p xmlns:a="http://schemas.openxmlformats.org/drawingml/2006/main">
             <a:pPr algn="r">
+              <a:buNone/>
               <a:defRPr sz="1050" b="0">
                 <a:solidFill>
                   <a:srgbClr val="526174"/>
@@ -24943,6 +25437,7 @@
           <a:lstStyle xmlns:a="http://schemas.openxmlformats.org/drawingml/2006/main"/>
           <a:p xmlns:a="http://schemas.openxmlformats.org/drawingml/2006/main">
             <a:pPr algn="l">
+              <a:buNone/>
               <a:defRPr sz="3600" b="1">
                 <a:solidFill>
                   <a:srgbClr val="111827"/>
@@ -25067,6 +25562,7 @@
           <a:lstStyle xmlns:a="http://schemas.openxmlformats.org/drawingml/2006/main"/>
           <a:p xmlns:a="http://schemas.openxmlformats.org/drawingml/2006/main">
             <a:pPr algn="ctr">
+              <a:buNone/>
               <a:defRPr sz="1650" b="1">
                 <a:solidFill>
                   <a:srgbClr val="0891B2"/>
@@ -25123,6 +25619,7 @@
           <a:lstStyle xmlns:a="http://schemas.openxmlformats.org/drawingml/2006/main"/>
           <a:p xmlns:a="http://schemas.openxmlformats.org/drawingml/2006/main">
             <a:pPr algn="ctr">
+              <a:buNone/>
               <a:defRPr sz="1350" b="0">
                 <a:solidFill>
                   <a:srgbClr val="111827"/>
@@ -25247,6 +25744,7 @@
           <a:lstStyle xmlns:a="http://schemas.openxmlformats.org/drawingml/2006/main"/>
           <a:p xmlns:a="http://schemas.openxmlformats.org/drawingml/2006/main">
             <a:pPr algn="ctr">
+              <a:buNone/>
               <a:defRPr sz="1650" b="1">
                 <a:solidFill>
                   <a:srgbClr val="B91C1C"/>
@@ -25303,6 +25801,7 @@
           <a:lstStyle xmlns:a="http://schemas.openxmlformats.org/drawingml/2006/main"/>
           <a:p xmlns:a="http://schemas.openxmlformats.org/drawingml/2006/main">
             <a:pPr algn="ctr">
+              <a:buNone/>
               <a:defRPr sz="1350" b="0">
                 <a:solidFill>
                   <a:srgbClr val="111827"/>
@@ -25427,6 +25926,7 @@
           <a:lstStyle xmlns:a="http://schemas.openxmlformats.org/drawingml/2006/main"/>
           <a:p xmlns:a="http://schemas.openxmlformats.org/drawingml/2006/main">
             <a:pPr algn="ctr">
+              <a:buNone/>
               <a:defRPr sz="1650" b="1">
                 <a:solidFill>
                   <a:srgbClr val="D97706"/>
@@ -25483,6 +25983,7 @@
           <a:lstStyle xmlns:a="http://schemas.openxmlformats.org/drawingml/2006/main"/>
           <a:p xmlns:a="http://schemas.openxmlformats.org/drawingml/2006/main">
             <a:pPr algn="ctr">
+              <a:buNone/>
               <a:defRPr sz="1350" b="0">
                 <a:solidFill>
                   <a:srgbClr val="111827"/>
@@ -25607,6 +26108,7 @@
           <a:lstStyle xmlns:a="http://schemas.openxmlformats.org/drawingml/2006/main"/>
           <a:p xmlns:a="http://schemas.openxmlformats.org/drawingml/2006/main">
             <a:pPr algn="ctr">
+              <a:buNone/>
               <a:defRPr sz="1650" b="1">
                 <a:solidFill>
                   <a:srgbClr val="15803D"/>
@@ -25663,6 +26165,7 @@
           <a:lstStyle xmlns:a="http://schemas.openxmlformats.org/drawingml/2006/main"/>
           <a:p xmlns:a="http://schemas.openxmlformats.org/drawingml/2006/main">
             <a:pPr algn="ctr">
+              <a:buNone/>
               <a:defRPr sz="1350" b="0">
                 <a:solidFill>
                   <a:srgbClr val="111827"/>
@@ -25754,6 +26257,7 @@
           <a:lstStyle xmlns:a="http://schemas.openxmlformats.org/drawingml/2006/main"/>
           <a:p xmlns:a="http://schemas.openxmlformats.org/drawingml/2006/main">
             <a:pPr algn="ctr">
+              <a:buNone/>
               <a:defRPr sz="1650" b="1">
                 <a:solidFill>
                   <a:srgbClr val="0891B2"/>
@@ -25810,6 +26314,7 @@
           <a:lstStyle xmlns:a="http://schemas.openxmlformats.org/drawingml/2006/main"/>
           <a:p xmlns:a="http://schemas.openxmlformats.org/drawingml/2006/main">
             <a:pPr algn="ctr">
+              <a:buNone/>
               <a:defRPr sz="1350" b="0">
                 <a:solidFill>
                   <a:srgbClr val="111827"/>
@@ -25866,6 +26371,7 @@
           <a:lstStyle xmlns:a="http://schemas.openxmlformats.org/drawingml/2006/main"/>
           <a:p xmlns:a="http://schemas.openxmlformats.org/drawingml/2006/main">
             <a:pPr algn="ctr">
+              <a:buNone/>
               <a:defRPr sz="1875" b="1">
                 <a:solidFill>
                   <a:srgbClr val="B91C1C"/>
@@ -25951,6 +26457,7 @@
           <a:lstStyle xmlns:a="http://schemas.openxmlformats.org/drawingml/2006/main"/>
           <a:p xmlns:a="http://schemas.openxmlformats.org/drawingml/2006/main">
             <a:pPr algn="l">
+              <a:buNone/>
               <a:defRPr sz="1200" b="1">
                 <a:solidFill>
                   <a:srgbClr val="526174"/>
@@ -26007,6 +26514,7 @@
           <a:lstStyle xmlns:a="http://schemas.openxmlformats.org/drawingml/2006/main"/>
           <a:p xmlns:a="http://schemas.openxmlformats.org/drawingml/2006/main">
             <a:pPr algn="r">
+              <a:buNone/>
               <a:defRPr sz="1050" b="0">
                 <a:solidFill>
                   <a:srgbClr val="526174"/>
@@ -26063,6 +26571,7 @@
           <a:lstStyle xmlns:a="http://schemas.openxmlformats.org/drawingml/2006/main"/>
           <a:p xmlns:a="http://schemas.openxmlformats.org/drawingml/2006/main">
             <a:pPr algn="l">
+              <a:buNone/>
               <a:defRPr sz="3600" b="1">
                 <a:solidFill>
                   <a:srgbClr val="111827"/>
@@ -26189,6 +26698,7 @@
           <a:lstStyle xmlns:a="http://schemas.openxmlformats.org/drawingml/2006/main"/>
           <a:p xmlns:a="http://schemas.openxmlformats.org/drawingml/2006/main">
             <a:pPr algn="l">
+              <a:buNone/>
               <a:defRPr sz="2250" b="1">
                 <a:solidFill>
                   <a:srgbClr val="111827"/>
@@ -26245,6 +26755,7 @@
           <a:lstStyle xmlns:a="http://schemas.openxmlformats.org/drawingml/2006/main"/>
           <a:p xmlns:a="http://schemas.openxmlformats.org/drawingml/2006/main">
             <a:pPr algn="l">
+              <a:buNone/>
               <a:defRPr sz="1800" b="0">
                 <a:solidFill>
                   <a:srgbClr val="111827"/>
@@ -26268,6 +26779,7 @@
           </a:p>
           <a:p xmlns:a="http://schemas.openxmlformats.org/drawingml/2006/main">
             <a:pPr algn="l">
+              <a:buNone/>
               <a:defRPr sz="1800" b="0">
                 <a:solidFill>
                   <a:srgbClr val="111827"/>
@@ -26291,6 +26803,7 @@
           </a:p>
           <a:p xmlns:a="http://schemas.openxmlformats.org/drawingml/2006/main">
             <a:pPr algn="l">
+              <a:buNone/>
               <a:defRPr sz="1800" b="0">
                 <a:solidFill>
                   <a:srgbClr val="111827"/>
@@ -26319,6 +26832,7 @@
           </a:p>
           <a:p xmlns:a="http://schemas.openxmlformats.org/drawingml/2006/main">
             <a:pPr algn="l">
+              <a:buNone/>
               <a:defRPr sz="1800" b="0">
                 <a:solidFill>
                   <a:srgbClr val="111827"/>
@@ -26375,6 +26889,7 @@
           <a:lstStyle xmlns:a="http://schemas.openxmlformats.org/drawingml/2006/main"/>
           <a:p xmlns:a="http://schemas.openxmlformats.org/drawingml/2006/main">
             <a:pPr algn="l">
+              <a:buNone/>
               <a:defRPr sz="2250" b="1">
                 <a:solidFill>
                   <a:srgbClr val="111827"/>
@@ -26431,6 +26946,7 @@
           <a:lstStyle xmlns:a="http://schemas.openxmlformats.org/drawingml/2006/main"/>
           <a:p xmlns:a="http://schemas.openxmlformats.org/drawingml/2006/main">
             <a:pPr algn="l">
+              <a:buNone/>
               <a:defRPr sz="1800" b="0">
                 <a:solidFill>
                   <a:srgbClr val="111827"/>
@@ -26454,6 +26970,7 @@
           </a:p>
           <a:p xmlns:a="http://schemas.openxmlformats.org/drawingml/2006/main">
             <a:pPr algn="l">
+              <a:buNone/>
               <a:defRPr sz="1800" b="0">
                 <a:solidFill>
                   <a:srgbClr val="111827"/>
@@ -26477,6 +26994,7 @@
           </a:p>
           <a:p xmlns:a="http://schemas.openxmlformats.org/drawingml/2006/main">
             <a:pPr algn="l">
+              <a:buNone/>
               <a:defRPr sz="1800" b="0">
                 <a:solidFill>
                   <a:srgbClr val="111827"/>
@@ -26500,6 +27018,7 @@
           </a:p>
           <a:p xmlns:a="http://schemas.openxmlformats.org/drawingml/2006/main">
             <a:pPr algn="l">
+              <a:buNone/>
               <a:defRPr sz="1800" b="0">
                 <a:solidFill>
                   <a:srgbClr val="111827"/>
@@ -26523,6 +27042,7 @@
           </a:p>
           <a:p xmlns:a="http://schemas.openxmlformats.org/drawingml/2006/main">
             <a:pPr algn="l">
+              <a:buNone/>
               <a:defRPr sz="1800" b="0">
                 <a:solidFill>
                   <a:srgbClr val="111827"/>
@@ -26546,6 +27066,7 @@
           </a:p>
           <a:p xmlns:a="http://schemas.openxmlformats.org/drawingml/2006/main">
             <a:pPr algn="l">
+              <a:buNone/>
               <a:defRPr sz="1800" b="0">
                 <a:solidFill>
                   <a:srgbClr val="111827"/>
@@ -26602,6 +27123,7 @@
           <a:lstStyle xmlns:a="http://schemas.openxmlformats.org/drawingml/2006/main"/>
           <a:p xmlns:a="http://schemas.openxmlformats.org/drawingml/2006/main">
             <a:pPr algn="ctr">
+              <a:buNone/>
               <a:defRPr sz="1950" b="1">
                 <a:solidFill>
                   <a:srgbClr val="111827"/>
@@ -26687,6 +27209,7 @@
           <a:lstStyle xmlns:a="http://schemas.openxmlformats.org/drawingml/2006/main"/>
           <a:p xmlns:a="http://schemas.openxmlformats.org/drawingml/2006/main">
             <a:pPr algn="l">
+              <a:buNone/>
               <a:defRPr sz="1200" b="1">
                 <a:solidFill>
                   <a:srgbClr val="526174"/>
@@ -26743,6 +27266,7 @@
           <a:lstStyle xmlns:a="http://schemas.openxmlformats.org/drawingml/2006/main"/>
           <a:p xmlns:a="http://schemas.openxmlformats.org/drawingml/2006/main">
             <a:pPr algn="r">
+              <a:buNone/>
               <a:defRPr sz="1050" b="0">
                 <a:solidFill>
                   <a:srgbClr val="526174"/>
@@ -26799,17 +27323,21 @@
           <a:lstStyle xmlns:a="http://schemas.openxmlformats.org/drawingml/2006/main"/>
           <a:p xmlns:a="http://schemas.openxmlformats.org/drawingml/2006/main">
             <a:pPr algn="l">
-              <a:defRPr sz="3600" b="1">
-                <a:solidFill>
-                  <a:srgbClr val="111827"/>
-                </a:solidFill>
-                <a:latin typeface="Aptos"/>
-                <a:ea typeface="Aptos"/>
-                <a:cs typeface="Aptos"/>
-              </a:defRPr>
-            </a:pPr>
-            <a:r>
-              <a:rPr sz="3600" b="1">
+              <a:lnSpc>
+                <a:spcPct val="98000"/>
+              </a:lnSpc>
+              <a:buNone/>
+              <a:defRPr sz="3375" b="1">
+                <a:solidFill>
+                  <a:srgbClr val="111827"/>
+                </a:solidFill>
+                <a:latin typeface="Aptos"/>
+                <a:ea typeface="Aptos"/>
+                <a:cs typeface="Aptos"/>
+              </a:defRPr>
+            </a:pPr>
+            <a:r>
+              <a:rPr sz="3375" b="1">
                 <a:solidFill>
                   <a:srgbClr val="111827"/>
                 </a:solidFill>
@@ -26890,7 +27418,11 @@
           <a:lstStyle xmlns:a="http://schemas.openxmlformats.org/drawingml/2006/main"/>
           <a:p xmlns:a="http://schemas.openxmlformats.org/drawingml/2006/main">
             <a:pPr algn="l">
-              <a:defRPr sz="1800" b="1">
+              <a:lnSpc>
+                <a:spcPct val="108000"/>
+              </a:lnSpc>
+              <a:buNone/>
+              <a:defRPr sz="1575" b="1">
                 <a:solidFill>
                   <a:srgbClr val="2563EB"/>
                 </a:solidFill>
@@ -26900,7 +27432,7 @@
               </a:defRPr>
             </a:pPr>
             <a:r>
-              <a:rPr sz="1800" b="1">
+              <a:rPr sz="1575" b="1">
                 <a:solidFill>
                   <a:srgbClr val="2563EB"/>
                 </a:solidFill>
@@ -26946,6 +27478,7 @@
           <a:lstStyle xmlns:a="http://schemas.openxmlformats.org/drawingml/2006/main"/>
           <a:p xmlns:a="http://schemas.openxmlformats.org/drawingml/2006/main">
             <a:pPr algn="l">
+              <a:buNone/>
               <a:defRPr sz="1575" b="0">
                 <a:solidFill>
                   <a:srgbClr val="111827"/>
@@ -27037,7 +27570,11 @@
           <a:lstStyle xmlns:a="http://schemas.openxmlformats.org/drawingml/2006/main"/>
           <a:p xmlns:a="http://schemas.openxmlformats.org/drawingml/2006/main">
             <a:pPr algn="l">
-              <a:defRPr sz="1800" b="1">
+              <a:lnSpc>
+                <a:spcPct val="108000"/>
+              </a:lnSpc>
+              <a:buNone/>
+              <a:defRPr sz="1575" b="1">
                 <a:solidFill>
                   <a:srgbClr val="2563EB"/>
                 </a:solidFill>
@@ -27047,7 +27584,7 @@
               </a:defRPr>
             </a:pPr>
             <a:r>
-              <a:rPr sz="1800" b="1">
+              <a:rPr sz="1575" b="1">
                 <a:solidFill>
                   <a:srgbClr val="2563EB"/>
                 </a:solidFill>
@@ -27093,6 +27630,7 @@
           <a:lstStyle xmlns:a="http://schemas.openxmlformats.org/drawingml/2006/main"/>
           <a:p xmlns:a="http://schemas.openxmlformats.org/drawingml/2006/main">
             <a:pPr algn="l">
+              <a:buNone/>
               <a:defRPr sz="1575" b="0">
                 <a:solidFill>
                   <a:srgbClr val="111827"/>
@@ -27184,7 +27722,11 @@
           <a:lstStyle xmlns:a="http://schemas.openxmlformats.org/drawingml/2006/main"/>
           <a:p xmlns:a="http://schemas.openxmlformats.org/drawingml/2006/main">
             <a:pPr algn="l">
-              <a:defRPr sz="1800" b="1">
+              <a:lnSpc>
+                <a:spcPct val="108000"/>
+              </a:lnSpc>
+              <a:buNone/>
+              <a:defRPr sz="1575" b="1">
                 <a:solidFill>
                   <a:srgbClr val="2563EB"/>
                 </a:solidFill>
@@ -27194,7 +27736,7 @@
               </a:defRPr>
             </a:pPr>
             <a:r>
-              <a:rPr sz="1800" b="1">
+              <a:rPr sz="1575" b="1">
                 <a:solidFill>
                   <a:srgbClr val="2563EB"/>
                 </a:solidFill>
@@ -27240,6 +27782,7 @@
           <a:lstStyle xmlns:a="http://schemas.openxmlformats.org/drawingml/2006/main"/>
           <a:p xmlns:a="http://schemas.openxmlformats.org/drawingml/2006/main">
             <a:pPr algn="l">
+              <a:buNone/>
               <a:defRPr sz="1575" b="0">
                 <a:solidFill>
                   <a:srgbClr val="111827"/>
@@ -27331,7 +27874,11 @@
           <a:lstStyle xmlns:a="http://schemas.openxmlformats.org/drawingml/2006/main"/>
           <a:p xmlns:a="http://schemas.openxmlformats.org/drawingml/2006/main">
             <a:pPr algn="l">
-              <a:defRPr sz="1800" b="1">
+              <a:lnSpc>
+                <a:spcPct val="108000"/>
+              </a:lnSpc>
+              <a:buNone/>
+              <a:defRPr sz="1575" b="1">
                 <a:solidFill>
                   <a:srgbClr val="2563EB"/>
                 </a:solidFill>
@@ -27341,7 +27888,7 @@
               </a:defRPr>
             </a:pPr>
             <a:r>
-              <a:rPr sz="1800" b="1">
+              <a:rPr sz="1575" b="1">
                 <a:solidFill>
                   <a:srgbClr val="2563EB"/>
                 </a:solidFill>
@@ -27387,6 +27934,7 @@
           <a:lstStyle xmlns:a="http://schemas.openxmlformats.org/drawingml/2006/main"/>
           <a:p xmlns:a="http://schemas.openxmlformats.org/drawingml/2006/main">
             <a:pPr algn="l">
+              <a:buNone/>
               <a:defRPr sz="1575" b="0">
                 <a:solidFill>
                   <a:srgbClr val="111827"/>
@@ -27478,7 +28026,11 @@
           <a:lstStyle xmlns:a="http://schemas.openxmlformats.org/drawingml/2006/main"/>
           <a:p xmlns:a="http://schemas.openxmlformats.org/drawingml/2006/main">
             <a:pPr algn="l">
-              <a:defRPr sz="1800" b="1">
+              <a:lnSpc>
+                <a:spcPct val="108000"/>
+              </a:lnSpc>
+              <a:buNone/>
+              <a:defRPr sz="1575" b="1">
                 <a:solidFill>
                   <a:srgbClr val="D97706"/>
                 </a:solidFill>
@@ -27488,7 +28040,7 @@
               </a:defRPr>
             </a:pPr>
             <a:r>
-              <a:rPr sz="1800" b="1">
+              <a:rPr sz="1575" b="1">
                 <a:solidFill>
                   <a:srgbClr val="D97706"/>
                 </a:solidFill>
@@ -27534,6 +28086,7 @@
           <a:lstStyle xmlns:a="http://schemas.openxmlformats.org/drawingml/2006/main"/>
           <a:p xmlns:a="http://schemas.openxmlformats.org/drawingml/2006/main">
             <a:pPr algn="l">
+              <a:buNone/>
               <a:defRPr sz="1575" b="0">
                 <a:solidFill>
                   <a:srgbClr val="111827"/>
@@ -27625,7 +28178,11 @@
           <a:lstStyle xmlns:a="http://schemas.openxmlformats.org/drawingml/2006/main"/>
           <a:p xmlns:a="http://schemas.openxmlformats.org/drawingml/2006/main">
             <a:pPr algn="l">
-              <a:defRPr sz="1800" b="1">
+              <a:lnSpc>
+                <a:spcPct val="108000"/>
+              </a:lnSpc>
+              <a:buNone/>
+              <a:defRPr sz="1575" b="1">
                 <a:solidFill>
                   <a:srgbClr val="D97706"/>
                 </a:solidFill>
@@ -27635,7 +28192,7 @@
               </a:defRPr>
             </a:pPr>
             <a:r>
-              <a:rPr sz="1800" b="1">
+              <a:rPr sz="1575" b="1">
                 <a:solidFill>
                   <a:srgbClr val="D97706"/>
                 </a:solidFill>
@@ -27681,6 +28238,7 @@
           <a:lstStyle xmlns:a="http://schemas.openxmlformats.org/drawingml/2006/main"/>
           <a:p xmlns:a="http://schemas.openxmlformats.org/drawingml/2006/main">
             <a:pPr algn="l">
+              <a:buNone/>
               <a:defRPr sz="1575" b="0">
                 <a:solidFill>
                   <a:srgbClr val="111827"/>
@@ -27772,7 +28330,11 @@
           <a:lstStyle xmlns:a="http://schemas.openxmlformats.org/drawingml/2006/main"/>
           <a:p xmlns:a="http://schemas.openxmlformats.org/drawingml/2006/main">
             <a:pPr algn="l">
-              <a:defRPr sz="1800" b="1">
+              <a:lnSpc>
+                <a:spcPct val="108000"/>
+              </a:lnSpc>
+              <a:buNone/>
+              <a:defRPr sz="1575" b="1">
                 <a:solidFill>
                   <a:srgbClr val="D97706"/>
                 </a:solidFill>
@@ -27782,7 +28344,7 @@
               </a:defRPr>
             </a:pPr>
             <a:r>
-              <a:rPr sz="1800" b="1">
+              <a:rPr sz="1575" b="1">
                 <a:solidFill>
                   <a:srgbClr val="D97706"/>
                 </a:solidFill>
@@ -27828,6 +28390,7 @@
           <a:lstStyle xmlns:a="http://schemas.openxmlformats.org/drawingml/2006/main"/>
           <a:p xmlns:a="http://schemas.openxmlformats.org/drawingml/2006/main">
             <a:pPr algn="l">
+              <a:buNone/>
               <a:defRPr sz="1575" b="0">
                 <a:solidFill>
                   <a:srgbClr val="111827"/>
@@ -27919,7 +28482,11 @@
           <a:lstStyle xmlns:a="http://schemas.openxmlformats.org/drawingml/2006/main"/>
           <a:p xmlns:a="http://schemas.openxmlformats.org/drawingml/2006/main">
             <a:pPr algn="l">
-              <a:defRPr sz="1800" b="1">
+              <a:lnSpc>
+                <a:spcPct val="108000"/>
+              </a:lnSpc>
+              <a:buNone/>
+              <a:defRPr sz="1575" b="1">
                 <a:solidFill>
                   <a:srgbClr val="D97706"/>
                 </a:solidFill>
@@ -27929,7 +28496,7 @@
               </a:defRPr>
             </a:pPr>
             <a:r>
-              <a:rPr sz="1800" b="1">
+              <a:rPr sz="1575" b="1">
                 <a:solidFill>
                   <a:srgbClr val="D97706"/>
                 </a:solidFill>
@@ -27975,6 +28542,7 @@
           <a:lstStyle xmlns:a="http://schemas.openxmlformats.org/drawingml/2006/main"/>
           <a:p xmlns:a="http://schemas.openxmlformats.org/drawingml/2006/main">
             <a:pPr algn="l">
+              <a:buNone/>
               <a:defRPr sz="1575" b="0">
                 <a:solidFill>
                   <a:srgbClr val="111827"/>
@@ -28060,6 +28628,7 @@
           <a:lstStyle xmlns:a="http://schemas.openxmlformats.org/drawingml/2006/main"/>
           <a:p xmlns:a="http://schemas.openxmlformats.org/drawingml/2006/main">
             <a:pPr algn="l">
+              <a:buNone/>
               <a:defRPr sz="1350" b="1">
                 <a:solidFill>
                   <a:srgbClr val="77A7FF"/>
@@ -28116,6 +28685,7 @@
           <a:lstStyle xmlns:a="http://schemas.openxmlformats.org/drawingml/2006/main"/>
           <a:p xmlns:a="http://schemas.openxmlformats.org/drawingml/2006/main">
             <a:pPr algn="l">
+              <a:buNone/>
               <a:defRPr sz="4350" b="1">
                 <a:solidFill>
                   <a:srgbClr val="FFFFFF"/>
@@ -28172,6 +28742,7 @@
           <a:lstStyle xmlns:a="http://schemas.openxmlformats.org/drawingml/2006/main"/>
           <a:p xmlns:a="http://schemas.openxmlformats.org/drawingml/2006/main">
             <a:pPr algn="l">
+              <a:buNone/>
               <a:defRPr sz="2550" b="0">
                 <a:solidFill>
                   <a:srgbClr val="C4D0E0"/>
@@ -28195,6 +28766,7 @@
           </a:p>
           <a:p xmlns:a="http://schemas.openxmlformats.org/drawingml/2006/main">
             <a:pPr algn="l">
+              <a:buNone/>
               <a:defRPr sz="2550" b="0">
                 <a:solidFill>
                   <a:srgbClr val="C4D0E0"/>
@@ -28218,6 +28790,7 @@
           </a:p>
           <a:p xmlns:a="http://schemas.openxmlformats.org/drawingml/2006/main">
             <a:pPr algn="l">
+              <a:buNone/>
               <a:defRPr sz="2550" b="0">
                 <a:solidFill>
                   <a:srgbClr val="C4D0E0"/>
@@ -28241,6 +28814,7 @@
           </a:p>
           <a:p xmlns:a="http://schemas.openxmlformats.org/drawingml/2006/main">
             <a:pPr algn="l">
+              <a:buNone/>
               <a:defRPr sz="2550" b="0">
                 <a:solidFill>
                   <a:srgbClr val="C4D0E0"/>
@@ -28332,6 +28906,7 @@
           <a:lstStyle xmlns:a="http://schemas.openxmlformats.org/drawingml/2006/main"/>
           <a:p xmlns:a="http://schemas.openxmlformats.org/drawingml/2006/main">
             <a:pPr algn="ctr">
+              <a:buNone/>
               <a:defRPr sz="1725" b="1">
                 <a:solidFill>
                   <a:srgbClr val="FFFFFF"/>
@@ -28417,6 +28992,7 @@
           <a:lstStyle xmlns:a="http://schemas.openxmlformats.org/drawingml/2006/main"/>
           <a:p xmlns:a="http://schemas.openxmlformats.org/drawingml/2006/main">
             <a:pPr algn="l">
+              <a:buNone/>
               <a:defRPr sz="1200" b="1">
                 <a:solidFill>
                   <a:srgbClr val="526174"/>
@@ -28473,6 +29049,7 @@
           <a:lstStyle xmlns:a="http://schemas.openxmlformats.org/drawingml/2006/main"/>
           <a:p xmlns:a="http://schemas.openxmlformats.org/drawingml/2006/main">
             <a:pPr algn="r">
+              <a:buNone/>
               <a:defRPr sz="1050" b="0">
                 <a:solidFill>
                   <a:srgbClr val="526174"/>
@@ -28529,17 +29106,21 @@
           <a:lstStyle xmlns:a="http://schemas.openxmlformats.org/drawingml/2006/main"/>
           <a:p xmlns:a="http://schemas.openxmlformats.org/drawingml/2006/main">
             <a:pPr algn="l">
-              <a:defRPr sz="3600" b="1">
-                <a:solidFill>
-                  <a:srgbClr val="111827"/>
-                </a:solidFill>
-                <a:latin typeface="Aptos"/>
-                <a:ea typeface="Aptos"/>
-                <a:cs typeface="Aptos"/>
-              </a:defRPr>
-            </a:pPr>
-            <a:r>
-              <a:rPr sz="3600" b="1">
+              <a:lnSpc>
+                <a:spcPct val="98000"/>
+              </a:lnSpc>
+              <a:buNone/>
+              <a:defRPr sz="3375" b="1">
+                <a:solidFill>
+                  <a:srgbClr val="111827"/>
+                </a:solidFill>
+                <a:latin typeface="Aptos"/>
+                <a:ea typeface="Aptos"/>
+                <a:cs typeface="Aptos"/>
+              </a:defRPr>
+            </a:pPr>
+            <a:r>
+              <a:rPr sz="3375" b="1">
                 <a:solidFill>
                   <a:srgbClr val="111827"/>
                 </a:solidFill>
@@ -28620,17 +29201,21 @@
           <a:lstStyle xmlns:a="http://schemas.openxmlformats.org/drawingml/2006/main"/>
           <a:p xmlns:a="http://schemas.openxmlformats.org/drawingml/2006/main">
             <a:pPr algn="l">
-              <a:defRPr sz="2100" b="1">
-                <a:solidFill>
-                  <a:srgbClr val="111827"/>
-                </a:solidFill>
-                <a:latin typeface="Aptos"/>
-                <a:ea typeface="Aptos"/>
-                <a:cs typeface="Aptos"/>
-              </a:defRPr>
-            </a:pPr>
-            <a:r>
-              <a:rPr sz="2100" b="1">
+              <a:lnSpc>
+                <a:spcPct val="108000"/>
+              </a:lnSpc>
+              <a:buNone/>
+              <a:defRPr sz="1575" b="1">
+                <a:solidFill>
+                  <a:srgbClr val="111827"/>
+                </a:solidFill>
+                <a:latin typeface="Aptos"/>
+                <a:ea typeface="Aptos"/>
+                <a:cs typeface="Aptos"/>
+              </a:defRPr>
+            </a:pPr>
+            <a:r>
+              <a:rPr sz="1575" b="1">
                 <a:solidFill>
                   <a:srgbClr val="111827"/>
                 </a:solidFill>
@@ -28676,17 +29261,21 @@
           <a:lstStyle xmlns:a="http://schemas.openxmlformats.org/drawingml/2006/main"/>
           <a:p xmlns:a="http://schemas.openxmlformats.org/drawingml/2006/main">
             <a:pPr algn="l">
-              <a:defRPr sz="1500" b="0">
-                <a:solidFill>
-                  <a:srgbClr val="526174"/>
-                </a:solidFill>
-                <a:latin typeface="Aptos"/>
-                <a:ea typeface="Aptos"/>
-                <a:cs typeface="Aptos"/>
-              </a:defRPr>
-            </a:pPr>
-            <a:r>
-              <a:rPr sz="1500" b="0">
+              <a:lnSpc>
+                <a:spcPct val="112000"/>
+              </a:lnSpc>
+              <a:buNone/>
+              <a:defRPr sz="1350" b="0">
+                <a:solidFill>
+                  <a:srgbClr val="526174"/>
+                </a:solidFill>
+                <a:latin typeface="Aptos"/>
+                <a:ea typeface="Aptos"/>
+                <a:cs typeface="Aptos"/>
+              </a:defRPr>
+            </a:pPr>
+            <a:r>
+              <a:rPr sz="1350" b="0">
                 <a:solidFill>
                   <a:srgbClr val="526174"/>
                 </a:solidFill>
@@ -28699,17 +29288,21 @@
           </a:p>
           <a:p xmlns:a="http://schemas.openxmlformats.org/drawingml/2006/main">
             <a:pPr algn="l">
-              <a:defRPr sz="1500" b="0">
-                <a:solidFill>
-                  <a:srgbClr val="526174"/>
-                </a:solidFill>
-                <a:latin typeface="Aptos"/>
-                <a:ea typeface="Aptos"/>
-                <a:cs typeface="Aptos"/>
-              </a:defRPr>
-            </a:pPr>
-            <a:r>
-              <a:rPr sz="1500" b="0">
+              <a:lnSpc>
+                <a:spcPct val="112000"/>
+              </a:lnSpc>
+              <a:buNone/>
+              <a:defRPr sz="1350" b="0">
+                <a:solidFill>
+                  <a:srgbClr val="526174"/>
+                </a:solidFill>
+                <a:latin typeface="Aptos"/>
+                <a:ea typeface="Aptos"/>
+                <a:cs typeface="Aptos"/>
+              </a:defRPr>
+            </a:pPr>
+            <a:r>
+              <a:rPr sz="1350" b="0">
                 <a:solidFill>
                   <a:srgbClr val="526174"/>
                 </a:solidFill>
@@ -28722,17 +29315,21 @@
           </a:p>
           <a:p xmlns:a="http://schemas.openxmlformats.org/drawingml/2006/main">
             <a:pPr algn="l">
-              <a:defRPr sz="1500" b="0">
-                <a:solidFill>
-                  <a:srgbClr val="526174"/>
-                </a:solidFill>
-                <a:latin typeface="Aptos"/>
-                <a:ea typeface="Aptos"/>
-                <a:cs typeface="Aptos"/>
-              </a:defRPr>
-            </a:pPr>
-            <a:r>
-              <a:rPr sz="1500" b="0">
+              <a:lnSpc>
+                <a:spcPct val="112000"/>
+              </a:lnSpc>
+              <a:buNone/>
+              <a:defRPr sz="1350" b="0">
+                <a:solidFill>
+                  <a:srgbClr val="526174"/>
+                </a:solidFill>
+                <a:latin typeface="Aptos"/>
+                <a:ea typeface="Aptos"/>
+                <a:cs typeface="Aptos"/>
+              </a:defRPr>
+            </a:pPr>
+            <a:r>
+              <a:rPr sz="1350" b="0">
                 <a:solidFill>
                   <a:srgbClr val="526174"/>
                 </a:solidFill>
@@ -28745,17 +29342,21 @@
           </a:p>
           <a:p xmlns:a="http://schemas.openxmlformats.org/drawingml/2006/main">
             <a:pPr algn="l">
-              <a:defRPr sz="1500" b="0">
-                <a:solidFill>
-                  <a:srgbClr val="526174"/>
-                </a:solidFill>
-                <a:latin typeface="Aptos"/>
-                <a:ea typeface="Aptos"/>
-                <a:cs typeface="Aptos"/>
-              </a:defRPr>
-            </a:pPr>
-            <a:r>
-              <a:rPr sz="1500" b="0">
+              <a:lnSpc>
+                <a:spcPct val="112000"/>
+              </a:lnSpc>
+              <a:buNone/>
+              <a:defRPr sz="1350" b="0">
+                <a:solidFill>
+                  <a:srgbClr val="526174"/>
+                </a:solidFill>
+                <a:latin typeface="Aptos"/>
+                <a:ea typeface="Aptos"/>
+                <a:cs typeface="Aptos"/>
+              </a:defRPr>
+            </a:pPr>
+            <a:r>
+              <a:rPr sz="1350" b="0">
                 <a:solidFill>
                   <a:srgbClr val="526174"/>
                 </a:solidFill>
@@ -28768,17 +29369,21 @@
           </a:p>
           <a:p xmlns:a="http://schemas.openxmlformats.org/drawingml/2006/main">
             <a:pPr algn="l">
-              <a:defRPr sz="1500" b="0">
-                <a:solidFill>
-                  <a:srgbClr val="526174"/>
-                </a:solidFill>
-                <a:latin typeface="Aptos"/>
-                <a:ea typeface="Aptos"/>
-                <a:cs typeface="Aptos"/>
-              </a:defRPr>
-            </a:pPr>
-            <a:r>
-              <a:rPr sz="1500" b="0">
+              <a:lnSpc>
+                <a:spcPct val="112000"/>
+              </a:lnSpc>
+              <a:buNone/>
+              <a:defRPr sz="1350" b="0">
+                <a:solidFill>
+                  <a:srgbClr val="526174"/>
+                </a:solidFill>
+                <a:latin typeface="Aptos"/>
+                <a:ea typeface="Aptos"/>
+                <a:cs typeface="Aptos"/>
+              </a:defRPr>
+            </a:pPr>
+            <a:r>
+              <a:rPr sz="1350" b="0">
                 <a:solidFill>
                   <a:srgbClr val="526174"/>
                 </a:solidFill>
@@ -28892,17 +29497,21 @@
           <a:lstStyle xmlns:a="http://schemas.openxmlformats.org/drawingml/2006/main"/>
           <a:p xmlns:a="http://schemas.openxmlformats.org/drawingml/2006/main">
             <a:pPr algn="l">
-              <a:defRPr sz="2100" b="1">
-                <a:solidFill>
-                  <a:srgbClr val="111827"/>
-                </a:solidFill>
-                <a:latin typeface="Aptos"/>
-                <a:ea typeface="Aptos"/>
-                <a:cs typeface="Aptos"/>
-              </a:defRPr>
-            </a:pPr>
-            <a:r>
-              <a:rPr sz="2100" b="1">
+              <a:lnSpc>
+                <a:spcPct val="108000"/>
+              </a:lnSpc>
+              <a:buNone/>
+              <a:defRPr sz="1575" b="1">
+                <a:solidFill>
+                  <a:srgbClr val="111827"/>
+                </a:solidFill>
+                <a:latin typeface="Aptos"/>
+                <a:ea typeface="Aptos"/>
+                <a:cs typeface="Aptos"/>
+              </a:defRPr>
+            </a:pPr>
+            <a:r>
+              <a:rPr sz="1575" b="1">
                 <a:solidFill>
                   <a:srgbClr val="111827"/>
                 </a:solidFill>
@@ -28948,17 +29557,21 @@
           <a:lstStyle xmlns:a="http://schemas.openxmlformats.org/drawingml/2006/main"/>
           <a:p xmlns:a="http://schemas.openxmlformats.org/drawingml/2006/main">
             <a:pPr algn="l">
-              <a:defRPr sz="1500" b="0">
-                <a:solidFill>
-                  <a:srgbClr val="526174"/>
-                </a:solidFill>
-                <a:latin typeface="Aptos"/>
-                <a:ea typeface="Aptos"/>
-                <a:cs typeface="Aptos"/>
-              </a:defRPr>
-            </a:pPr>
-            <a:r>
-              <a:rPr sz="1500" b="0">
+              <a:lnSpc>
+                <a:spcPct val="112000"/>
+              </a:lnSpc>
+              <a:buNone/>
+              <a:defRPr sz="1350" b="0">
+                <a:solidFill>
+                  <a:srgbClr val="526174"/>
+                </a:solidFill>
+                <a:latin typeface="Aptos"/>
+                <a:ea typeface="Aptos"/>
+                <a:cs typeface="Aptos"/>
+              </a:defRPr>
+            </a:pPr>
+            <a:r>
+              <a:rPr sz="1350" b="0">
                 <a:solidFill>
                   <a:srgbClr val="526174"/>
                 </a:solidFill>
@@ -28971,17 +29584,21 @@
           </a:p>
           <a:p xmlns:a="http://schemas.openxmlformats.org/drawingml/2006/main">
             <a:pPr algn="l">
-              <a:defRPr sz="1500" b="0">
-                <a:solidFill>
-                  <a:srgbClr val="526174"/>
-                </a:solidFill>
-                <a:latin typeface="Aptos"/>
-                <a:ea typeface="Aptos"/>
-                <a:cs typeface="Aptos"/>
-              </a:defRPr>
-            </a:pPr>
-            <a:r>
-              <a:rPr sz="1500" b="0">
+              <a:lnSpc>
+                <a:spcPct val="112000"/>
+              </a:lnSpc>
+              <a:buNone/>
+              <a:defRPr sz="1350" b="0">
+                <a:solidFill>
+                  <a:srgbClr val="526174"/>
+                </a:solidFill>
+                <a:latin typeface="Aptos"/>
+                <a:ea typeface="Aptos"/>
+                <a:cs typeface="Aptos"/>
+              </a:defRPr>
+            </a:pPr>
+            <a:r>
+              <a:rPr sz="1350" b="0">
                 <a:solidFill>
                   <a:srgbClr val="526174"/>
                 </a:solidFill>
@@ -28994,17 +29611,21 @@
           </a:p>
           <a:p xmlns:a="http://schemas.openxmlformats.org/drawingml/2006/main">
             <a:pPr algn="l">
-              <a:defRPr sz="1500" b="0">
-                <a:solidFill>
-                  <a:srgbClr val="526174"/>
-                </a:solidFill>
-                <a:latin typeface="Aptos"/>
-                <a:ea typeface="Aptos"/>
-                <a:cs typeface="Aptos"/>
-              </a:defRPr>
-            </a:pPr>
-            <a:r>
-              <a:rPr sz="1500" b="0">
+              <a:lnSpc>
+                <a:spcPct val="112000"/>
+              </a:lnSpc>
+              <a:buNone/>
+              <a:defRPr sz="1350" b="0">
+                <a:solidFill>
+                  <a:srgbClr val="526174"/>
+                </a:solidFill>
+                <a:latin typeface="Aptos"/>
+                <a:ea typeface="Aptos"/>
+                <a:cs typeface="Aptos"/>
+              </a:defRPr>
+            </a:pPr>
+            <a:r>
+              <a:rPr sz="1350" b="0">
                 <a:solidFill>
                   <a:srgbClr val="526174"/>
                 </a:solidFill>
@@ -29017,17 +29638,21 @@
           </a:p>
           <a:p xmlns:a="http://schemas.openxmlformats.org/drawingml/2006/main">
             <a:pPr algn="l">
-              <a:defRPr sz="1500" b="0">
-                <a:solidFill>
-                  <a:srgbClr val="526174"/>
-                </a:solidFill>
-                <a:latin typeface="Aptos"/>
-                <a:ea typeface="Aptos"/>
-                <a:cs typeface="Aptos"/>
-              </a:defRPr>
-            </a:pPr>
-            <a:r>
-              <a:rPr sz="1500" b="0">
+              <a:lnSpc>
+                <a:spcPct val="112000"/>
+              </a:lnSpc>
+              <a:buNone/>
+              <a:defRPr sz="1350" b="0">
+                <a:solidFill>
+                  <a:srgbClr val="526174"/>
+                </a:solidFill>
+                <a:latin typeface="Aptos"/>
+                <a:ea typeface="Aptos"/>
+                <a:cs typeface="Aptos"/>
+              </a:defRPr>
+            </a:pPr>
+            <a:r>
+              <a:rPr sz="1350" b="0">
                 <a:solidFill>
                   <a:srgbClr val="526174"/>
                 </a:solidFill>
@@ -29040,17 +29665,21 @@
           </a:p>
           <a:p xmlns:a="http://schemas.openxmlformats.org/drawingml/2006/main">
             <a:pPr algn="l">
-              <a:defRPr sz="1500" b="0">
-                <a:solidFill>
-                  <a:srgbClr val="526174"/>
-                </a:solidFill>
-                <a:latin typeface="Aptos"/>
-                <a:ea typeface="Aptos"/>
-                <a:cs typeface="Aptos"/>
-              </a:defRPr>
-            </a:pPr>
-            <a:r>
-              <a:rPr sz="1500" b="0">
+              <a:lnSpc>
+                <a:spcPct val="112000"/>
+              </a:lnSpc>
+              <a:buNone/>
+              <a:defRPr sz="1350" b="0">
+                <a:solidFill>
+                  <a:srgbClr val="526174"/>
+                </a:solidFill>
+                <a:latin typeface="Aptos"/>
+                <a:ea typeface="Aptos"/>
+                <a:cs typeface="Aptos"/>
+              </a:defRPr>
+            </a:pPr>
+            <a:r>
+              <a:rPr sz="1350" b="0">
                 <a:solidFill>
                   <a:srgbClr val="526174"/>
                 </a:solidFill>
@@ -29164,17 +29793,21 @@
           <a:lstStyle xmlns:a="http://schemas.openxmlformats.org/drawingml/2006/main"/>
           <a:p xmlns:a="http://schemas.openxmlformats.org/drawingml/2006/main">
             <a:pPr algn="l">
-              <a:defRPr sz="2100" b="1">
-                <a:solidFill>
-                  <a:srgbClr val="111827"/>
-                </a:solidFill>
-                <a:latin typeface="Aptos"/>
-                <a:ea typeface="Aptos"/>
-                <a:cs typeface="Aptos"/>
-              </a:defRPr>
-            </a:pPr>
-            <a:r>
-              <a:rPr sz="2100" b="1">
+              <a:lnSpc>
+                <a:spcPct val="108000"/>
+              </a:lnSpc>
+              <a:buNone/>
+              <a:defRPr sz="1575" b="1">
+                <a:solidFill>
+                  <a:srgbClr val="111827"/>
+                </a:solidFill>
+                <a:latin typeface="Aptos"/>
+                <a:ea typeface="Aptos"/>
+                <a:cs typeface="Aptos"/>
+              </a:defRPr>
+            </a:pPr>
+            <a:r>
+              <a:rPr sz="1575" b="1">
                 <a:solidFill>
                   <a:srgbClr val="111827"/>
                 </a:solidFill>
@@ -29220,17 +29853,21 @@
           <a:lstStyle xmlns:a="http://schemas.openxmlformats.org/drawingml/2006/main"/>
           <a:p xmlns:a="http://schemas.openxmlformats.org/drawingml/2006/main">
             <a:pPr algn="l">
-              <a:defRPr sz="1500" b="0">
-                <a:solidFill>
-                  <a:srgbClr val="526174"/>
-                </a:solidFill>
-                <a:latin typeface="Aptos"/>
-                <a:ea typeface="Aptos"/>
-                <a:cs typeface="Aptos"/>
-              </a:defRPr>
-            </a:pPr>
-            <a:r>
-              <a:rPr sz="1500" b="0">
+              <a:lnSpc>
+                <a:spcPct val="112000"/>
+              </a:lnSpc>
+              <a:buNone/>
+              <a:defRPr sz="1350" b="0">
+                <a:solidFill>
+                  <a:srgbClr val="526174"/>
+                </a:solidFill>
+                <a:latin typeface="Aptos"/>
+                <a:ea typeface="Aptos"/>
+                <a:cs typeface="Aptos"/>
+              </a:defRPr>
+            </a:pPr>
+            <a:r>
+              <a:rPr sz="1350" b="0">
                 <a:solidFill>
                   <a:srgbClr val="526174"/>
                 </a:solidFill>
@@ -29243,17 +29880,21 @@
           </a:p>
           <a:p xmlns:a="http://schemas.openxmlformats.org/drawingml/2006/main">
             <a:pPr algn="l">
-              <a:defRPr sz="1500" b="0">
-                <a:solidFill>
-                  <a:srgbClr val="526174"/>
-                </a:solidFill>
-                <a:latin typeface="Aptos"/>
-                <a:ea typeface="Aptos"/>
-                <a:cs typeface="Aptos"/>
-              </a:defRPr>
-            </a:pPr>
-            <a:r>
-              <a:rPr sz="1500" b="0">
+              <a:lnSpc>
+                <a:spcPct val="112000"/>
+              </a:lnSpc>
+              <a:buNone/>
+              <a:defRPr sz="1350" b="0">
+                <a:solidFill>
+                  <a:srgbClr val="526174"/>
+                </a:solidFill>
+                <a:latin typeface="Aptos"/>
+                <a:ea typeface="Aptos"/>
+                <a:cs typeface="Aptos"/>
+              </a:defRPr>
+            </a:pPr>
+            <a:r>
+              <a:rPr sz="1350" b="0">
                 <a:solidFill>
                   <a:srgbClr val="526174"/>
                 </a:solidFill>
@@ -29266,17 +29907,21 @@
           </a:p>
           <a:p xmlns:a="http://schemas.openxmlformats.org/drawingml/2006/main">
             <a:pPr algn="l">
-              <a:defRPr sz="1500" b="0">
-                <a:solidFill>
-                  <a:srgbClr val="526174"/>
-                </a:solidFill>
-                <a:latin typeface="Aptos"/>
-                <a:ea typeface="Aptos"/>
-                <a:cs typeface="Aptos"/>
-              </a:defRPr>
-            </a:pPr>
-            <a:r>
-              <a:rPr sz="1500" b="0">
+              <a:lnSpc>
+                <a:spcPct val="112000"/>
+              </a:lnSpc>
+              <a:buNone/>
+              <a:defRPr sz="1350" b="0">
+                <a:solidFill>
+                  <a:srgbClr val="526174"/>
+                </a:solidFill>
+                <a:latin typeface="Aptos"/>
+                <a:ea typeface="Aptos"/>
+                <a:cs typeface="Aptos"/>
+              </a:defRPr>
+            </a:pPr>
+            <a:r>
+              <a:rPr sz="1350" b="0">
                 <a:solidFill>
                   <a:srgbClr val="526174"/>
                 </a:solidFill>
@@ -29289,17 +29934,21 @@
           </a:p>
           <a:p xmlns:a="http://schemas.openxmlformats.org/drawingml/2006/main">
             <a:pPr algn="l">
-              <a:defRPr sz="1500" b="0">
-                <a:solidFill>
-                  <a:srgbClr val="526174"/>
-                </a:solidFill>
-                <a:latin typeface="Aptos"/>
-                <a:ea typeface="Aptos"/>
-                <a:cs typeface="Aptos"/>
-              </a:defRPr>
-            </a:pPr>
-            <a:r>
-              <a:rPr sz="1500" b="0">
+              <a:lnSpc>
+                <a:spcPct val="112000"/>
+              </a:lnSpc>
+              <a:buNone/>
+              <a:defRPr sz="1350" b="0">
+                <a:solidFill>
+                  <a:srgbClr val="526174"/>
+                </a:solidFill>
+                <a:latin typeface="Aptos"/>
+                <a:ea typeface="Aptos"/>
+                <a:cs typeface="Aptos"/>
+              </a:defRPr>
+            </a:pPr>
+            <a:r>
+              <a:rPr sz="1350" b="0">
                 <a:solidFill>
                   <a:srgbClr val="526174"/>
                 </a:solidFill>
@@ -29374,6 +30023,7 @@
           <a:lstStyle xmlns:a="http://schemas.openxmlformats.org/drawingml/2006/main"/>
           <a:p xmlns:a="http://schemas.openxmlformats.org/drawingml/2006/main">
             <a:pPr algn="l">
+              <a:buNone/>
               <a:defRPr sz="1200" b="1">
                 <a:solidFill>
                   <a:srgbClr val="526174"/>
@@ -29430,6 +30080,7 @@
           <a:lstStyle xmlns:a="http://schemas.openxmlformats.org/drawingml/2006/main"/>
           <a:p xmlns:a="http://schemas.openxmlformats.org/drawingml/2006/main">
             <a:pPr algn="r">
+              <a:buNone/>
               <a:defRPr sz="1050" b="0">
                 <a:solidFill>
                   <a:srgbClr val="526174"/>
@@ -29486,17 +30137,21 @@
           <a:lstStyle xmlns:a="http://schemas.openxmlformats.org/drawingml/2006/main"/>
           <a:p xmlns:a="http://schemas.openxmlformats.org/drawingml/2006/main">
             <a:pPr algn="l">
-              <a:defRPr sz="3600" b="1">
-                <a:solidFill>
-                  <a:srgbClr val="111827"/>
-                </a:solidFill>
-                <a:latin typeface="Aptos"/>
-                <a:ea typeface="Aptos"/>
-                <a:cs typeface="Aptos"/>
-              </a:defRPr>
-            </a:pPr>
-            <a:r>
-              <a:rPr sz="3600" b="1">
+              <a:lnSpc>
+                <a:spcPct val="98000"/>
+              </a:lnSpc>
+              <a:buNone/>
+              <a:defRPr sz="3000" b="1">
+                <a:solidFill>
+                  <a:srgbClr val="111827"/>
+                </a:solidFill>
+                <a:latin typeface="Aptos"/>
+                <a:ea typeface="Aptos"/>
+                <a:cs typeface="Aptos"/>
+              </a:defRPr>
+            </a:pPr>
+            <a:r>
+              <a:rPr sz="3000" b="1">
                 <a:solidFill>
                   <a:srgbClr val="111827"/>
                 </a:solidFill>
@@ -29577,17 +30232,21 @@
           <a:lstStyle xmlns:a="http://schemas.openxmlformats.org/drawingml/2006/main"/>
           <a:p xmlns:a="http://schemas.openxmlformats.org/drawingml/2006/main">
             <a:pPr algn="l">
-              <a:defRPr sz="2100" b="1">
-                <a:solidFill>
-                  <a:srgbClr val="111827"/>
-                </a:solidFill>
-                <a:latin typeface="Aptos"/>
-                <a:ea typeface="Aptos"/>
-                <a:cs typeface="Aptos"/>
-              </a:defRPr>
-            </a:pPr>
-            <a:r>
-              <a:rPr sz="2100" b="1">
+              <a:lnSpc>
+                <a:spcPct val="108000"/>
+              </a:lnSpc>
+              <a:buNone/>
+              <a:defRPr sz="1575" b="1">
+                <a:solidFill>
+                  <a:srgbClr val="111827"/>
+                </a:solidFill>
+                <a:latin typeface="Aptos"/>
+                <a:ea typeface="Aptos"/>
+                <a:cs typeface="Aptos"/>
+              </a:defRPr>
+            </a:pPr>
+            <a:r>
+              <a:rPr sz="1575" b="1">
                 <a:solidFill>
                   <a:srgbClr val="111827"/>
                 </a:solidFill>
@@ -29633,17 +30292,21 @@
           <a:lstStyle xmlns:a="http://schemas.openxmlformats.org/drawingml/2006/main"/>
           <a:p xmlns:a="http://schemas.openxmlformats.org/drawingml/2006/main">
             <a:pPr algn="l">
-              <a:defRPr sz="1500" b="0">
-                <a:solidFill>
-                  <a:srgbClr val="526174"/>
-                </a:solidFill>
-                <a:latin typeface="Aptos"/>
-                <a:ea typeface="Aptos"/>
-                <a:cs typeface="Aptos"/>
-              </a:defRPr>
-            </a:pPr>
-            <a:r>
-              <a:rPr sz="1500" b="0">
+              <a:lnSpc>
+                <a:spcPct val="112000"/>
+              </a:lnSpc>
+              <a:buNone/>
+              <a:defRPr sz="1350" b="0">
+                <a:solidFill>
+                  <a:srgbClr val="526174"/>
+                </a:solidFill>
+                <a:latin typeface="Aptos"/>
+                <a:ea typeface="Aptos"/>
+                <a:cs typeface="Aptos"/>
+              </a:defRPr>
+            </a:pPr>
+            <a:r>
+              <a:rPr sz="1350" b="0">
                 <a:solidFill>
                   <a:srgbClr val="526174"/>
                 </a:solidFill>
@@ -29656,17 +30319,21 @@
           </a:p>
           <a:p xmlns:a="http://schemas.openxmlformats.org/drawingml/2006/main">
             <a:pPr algn="l">
-              <a:defRPr sz="1500" b="0">
-                <a:solidFill>
-                  <a:srgbClr val="526174"/>
-                </a:solidFill>
-                <a:latin typeface="Aptos"/>
-                <a:ea typeface="Aptos"/>
-                <a:cs typeface="Aptos"/>
-              </a:defRPr>
-            </a:pPr>
-            <a:r>
-              <a:rPr sz="1500" b="0">
+              <a:lnSpc>
+                <a:spcPct val="112000"/>
+              </a:lnSpc>
+              <a:buNone/>
+              <a:defRPr sz="1350" b="0">
+                <a:solidFill>
+                  <a:srgbClr val="526174"/>
+                </a:solidFill>
+                <a:latin typeface="Aptos"/>
+                <a:ea typeface="Aptos"/>
+                <a:cs typeface="Aptos"/>
+              </a:defRPr>
+            </a:pPr>
+            <a:r>
+              <a:rPr sz="1350" b="0">
                 <a:solidFill>
                   <a:srgbClr val="526174"/>
                 </a:solidFill>
@@ -29679,17 +30346,21 @@
           </a:p>
           <a:p xmlns:a="http://schemas.openxmlformats.org/drawingml/2006/main">
             <a:pPr algn="l">
-              <a:defRPr sz="1500" b="0">
-                <a:solidFill>
-                  <a:srgbClr val="526174"/>
-                </a:solidFill>
-                <a:latin typeface="Aptos"/>
-                <a:ea typeface="Aptos"/>
-                <a:cs typeface="Aptos"/>
-              </a:defRPr>
-            </a:pPr>
-            <a:r>
-              <a:rPr sz="1500" b="0">
+              <a:lnSpc>
+                <a:spcPct val="112000"/>
+              </a:lnSpc>
+              <a:buNone/>
+              <a:defRPr sz="1350" b="0">
+                <a:solidFill>
+                  <a:srgbClr val="526174"/>
+                </a:solidFill>
+                <a:latin typeface="Aptos"/>
+                <a:ea typeface="Aptos"/>
+                <a:cs typeface="Aptos"/>
+              </a:defRPr>
+            </a:pPr>
+            <a:r>
+              <a:rPr sz="1350" b="0">
                 <a:solidFill>
                   <a:srgbClr val="526174"/>
                 </a:solidFill>
@@ -29803,17 +30474,21 @@
           <a:lstStyle xmlns:a="http://schemas.openxmlformats.org/drawingml/2006/main"/>
           <a:p xmlns:a="http://schemas.openxmlformats.org/drawingml/2006/main">
             <a:pPr algn="l">
-              <a:defRPr sz="2100" b="1">
-                <a:solidFill>
-                  <a:srgbClr val="111827"/>
-                </a:solidFill>
-                <a:latin typeface="Aptos"/>
-                <a:ea typeface="Aptos"/>
-                <a:cs typeface="Aptos"/>
-              </a:defRPr>
-            </a:pPr>
-            <a:r>
-              <a:rPr sz="2100" b="1">
+              <a:lnSpc>
+                <a:spcPct val="108000"/>
+              </a:lnSpc>
+              <a:buNone/>
+              <a:defRPr sz="1575" b="1">
+                <a:solidFill>
+                  <a:srgbClr val="111827"/>
+                </a:solidFill>
+                <a:latin typeface="Aptos"/>
+                <a:ea typeface="Aptos"/>
+                <a:cs typeface="Aptos"/>
+              </a:defRPr>
+            </a:pPr>
+            <a:r>
+              <a:rPr sz="1575" b="1">
                 <a:solidFill>
                   <a:srgbClr val="111827"/>
                 </a:solidFill>
@@ -29859,17 +30534,21 @@
           <a:lstStyle xmlns:a="http://schemas.openxmlformats.org/drawingml/2006/main"/>
           <a:p xmlns:a="http://schemas.openxmlformats.org/drawingml/2006/main">
             <a:pPr algn="l">
-              <a:defRPr sz="1500" b="0">
-                <a:solidFill>
-                  <a:srgbClr val="526174"/>
-                </a:solidFill>
-                <a:latin typeface="Aptos"/>
-                <a:ea typeface="Aptos"/>
-                <a:cs typeface="Aptos"/>
-              </a:defRPr>
-            </a:pPr>
-            <a:r>
-              <a:rPr sz="1500" b="0">
+              <a:lnSpc>
+                <a:spcPct val="112000"/>
+              </a:lnSpc>
+              <a:buNone/>
+              <a:defRPr sz="1350" b="0">
+                <a:solidFill>
+                  <a:srgbClr val="526174"/>
+                </a:solidFill>
+                <a:latin typeface="Aptos"/>
+                <a:ea typeface="Aptos"/>
+                <a:cs typeface="Aptos"/>
+              </a:defRPr>
+            </a:pPr>
+            <a:r>
+              <a:rPr sz="1350" b="0">
                 <a:solidFill>
                   <a:srgbClr val="526174"/>
                 </a:solidFill>
@@ -29882,17 +30561,21 @@
           </a:p>
           <a:p xmlns:a="http://schemas.openxmlformats.org/drawingml/2006/main">
             <a:pPr algn="l">
-              <a:defRPr sz="1500" b="0">
-                <a:solidFill>
-                  <a:srgbClr val="526174"/>
-                </a:solidFill>
-                <a:latin typeface="Aptos"/>
-                <a:ea typeface="Aptos"/>
-                <a:cs typeface="Aptos"/>
-              </a:defRPr>
-            </a:pPr>
-            <a:r>
-              <a:rPr sz="1500" b="0">
+              <a:lnSpc>
+                <a:spcPct val="112000"/>
+              </a:lnSpc>
+              <a:buNone/>
+              <a:defRPr sz="1350" b="0">
+                <a:solidFill>
+                  <a:srgbClr val="526174"/>
+                </a:solidFill>
+                <a:latin typeface="Aptos"/>
+                <a:ea typeface="Aptos"/>
+                <a:cs typeface="Aptos"/>
+              </a:defRPr>
+            </a:pPr>
+            <a:r>
+              <a:rPr sz="1350" b="0">
                 <a:solidFill>
                   <a:srgbClr val="526174"/>
                 </a:solidFill>
@@ -29905,17 +30588,21 @@
           </a:p>
           <a:p xmlns:a="http://schemas.openxmlformats.org/drawingml/2006/main">
             <a:pPr algn="l">
-              <a:defRPr sz="1500" b="0">
-                <a:solidFill>
-                  <a:srgbClr val="526174"/>
-                </a:solidFill>
-                <a:latin typeface="Aptos"/>
-                <a:ea typeface="Aptos"/>
-                <a:cs typeface="Aptos"/>
-              </a:defRPr>
-            </a:pPr>
-            <a:r>
-              <a:rPr sz="1500" b="0">
+              <a:lnSpc>
+                <a:spcPct val="112000"/>
+              </a:lnSpc>
+              <a:buNone/>
+              <a:defRPr sz="1350" b="0">
+                <a:solidFill>
+                  <a:srgbClr val="526174"/>
+                </a:solidFill>
+                <a:latin typeface="Aptos"/>
+                <a:ea typeface="Aptos"/>
+                <a:cs typeface="Aptos"/>
+              </a:defRPr>
+            </a:pPr>
+            <a:r>
+              <a:rPr sz="1350" b="0">
                 <a:solidFill>
                   <a:srgbClr val="526174"/>
                 </a:solidFill>
@@ -29928,17 +30615,21 @@
           </a:p>
           <a:p xmlns:a="http://schemas.openxmlformats.org/drawingml/2006/main">
             <a:pPr algn="l">
-              <a:defRPr sz="1500" b="0">
-                <a:solidFill>
-                  <a:srgbClr val="526174"/>
-                </a:solidFill>
-                <a:latin typeface="Aptos"/>
-                <a:ea typeface="Aptos"/>
-                <a:cs typeface="Aptos"/>
-              </a:defRPr>
-            </a:pPr>
-            <a:r>
-              <a:rPr sz="1500" b="0">
+              <a:lnSpc>
+                <a:spcPct val="112000"/>
+              </a:lnSpc>
+              <a:buNone/>
+              <a:defRPr sz="1350" b="0">
+                <a:solidFill>
+                  <a:srgbClr val="526174"/>
+                </a:solidFill>
+                <a:latin typeface="Aptos"/>
+                <a:ea typeface="Aptos"/>
+                <a:cs typeface="Aptos"/>
+              </a:defRPr>
+            </a:pPr>
+            <a:r>
+              <a:rPr sz="1350" b="0">
                 <a:solidFill>
                   <a:srgbClr val="526174"/>
                 </a:solidFill>
@@ -29951,17 +30642,21 @@
           </a:p>
           <a:p xmlns:a="http://schemas.openxmlformats.org/drawingml/2006/main">
             <a:pPr algn="l">
-              <a:defRPr sz="1500" b="0">
-                <a:solidFill>
-                  <a:srgbClr val="526174"/>
-                </a:solidFill>
-                <a:latin typeface="Aptos"/>
-                <a:ea typeface="Aptos"/>
-                <a:cs typeface="Aptos"/>
-              </a:defRPr>
-            </a:pPr>
-            <a:r>
-              <a:rPr sz="1500" b="0">
+              <a:lnSpc>
+                <a:spcPct val="112000"/>
+              </a:lnSpc>
+              <a:buNone/>
+              <a:defRPr sz="1350" b="0">
+                <a:solidFill>
+                  <a:srgbClr val="526174"/>
+                </a:solidFill>
+                <a:latin typeface="Aptos"/>
+                <a:ea typeface="Aptos"/>
+                <a:cs typeface="Aptos"/>
+              </a:defRPr>
+            </a:pPr>
+            <a:r>
+              <a:rPr sz="1350" b="0">
                 <a:solidFill>
                   <a:srgbClr val="526174"/>
                 </a:solidFill>
@@ -30075,17 +30770,21 @@
           <a:lstStyle xmlns:a="http://schemas.openxmlformats.org/drawingml/2006/main"/>
           <a:p xmlns:a="http://schemas.openxmlformats.org/drawingml/2006/main">
             <a:pPr algn="l">
-              <a:defRPr sz="2100" b="1">
-                <a:solidFill>
-                  <a:srgbClr val="111827"/>
-                </a:solidFill>
-                <a:latin typeface="Aptos"/>
-                <a:ea typeface="Aptos"/>
-                <a:cs typeface="Aptos"/>
-              </a:defRPr>
-            </a:pPr>
-            <a:r>
-              <a:rPr sz="2100" b="1">
+              <a:lnSpc>
+                <a:spcPct val="108000"/>
+              </a:lnSpc>
+              <a:buNone/>
+              <a:defRPr sz="1575" b="1">
+                <a:solidFill>
+                  <a:srgbClr val="111827"/>
+                </a:solidFill>
+                <a:latin typeface="Aptos"/>
+                <a:ea typeface="Aptos"/>
+                <a:cs typeface="Aptos"/>
+              </a:defRPr>
+            </a:pPr>
+            <a:r>
+              <a:rPr sz="1575" b="1">
                 <a:solidFill>
                   <a:srgbClr val="111827"/>
                 </a:solidFill>
@@ -30131,17 +30830,21 @@
           <a:lstStyle xmlns:a="http://schemas.openxmlformats.org/drawingml/2006/main"/>
           <a:p xmlns:a="http://schemas.openxmlformats.org/drawingml/2006/main">
             <a:pPr algn="l">
-              <a:defRPr sz="1500" b="0">
-                <a:solidFill>
-                  <a:srgbClr val="526174"/>
-                </a:solidFill>
-                <a:latin typeface="Aptos"/>
-                <a:ea typeface="Aptos"/>
-                <a:cs typeface="Aptos"/>
-              </a:defRPr>
-            </a:pPr>
-            <a:r>
-              <a:rPr sz="1500" b="0">
+              <a:lnSpc>
+                <a:spcPct val="112000"/>
+              </a:lnSpc>
+              <a:buNone/>
+              <a:defRPr sz="1350" b="0">
+                <a:solidFill>
+                  <a:srgbClr val="526174"/>
+                </a:solidFill>
+                <a:latin typeface="Aptos"/>
+                <a:ea typeface="Aptos"/>
+                <a:cs typeface="Aptos"/>
+              </a:defRPr>
+            </a:pPr>
+            <a:r>
+              <a:rPr sz="1350" b="0">
                 <a:solidFill>
                   <a:srgbClr val="526174"/>
                 </a:solidFill>
@@ -30154,17 +30857,21 @@
           </a:p>
           <a:p xmlns:a="http://schemas.openxmlformats.org/drawingml/2006/main">
             <a:pPr algn="l">
-              <a:defRPr sz="1500" b="0">
-                <a:solidFill>
-                  <a:srgbClr val="526174"/>
-                </a:solidFill>
-                <a:latin typeface="Aptos"/>
-                <a:ea typeface="Aptos"/>
-                <a:cs typeface="Aptos"/>
-              </a:defRPr>
-            </a:pPr>
-            <a:r>
-              <a:rPr sz="1500" b="0">
+              <a:lnSpc>
+                <a:spcPct val="112000"/>
+              </a:lnSpc>
+              <a:buNone/>
+              <a:defRPr sz="1350" b="0">
+                <a:solidFill>
+                  <a:srgbClr val="526174"/>
+                </a:solidFill>
+                <a:latin typeface="Aptos"/>
+                <a:ea typeface="Aptos"/>
+                <a:cs typeface="Aptos"/>
+              </a:defRPr>
+            </a:pPr>
+            <a:r>
+              <a:rPr sz="1350" b="0">
                 <a:solidFill>
                   <a:srgbClr val="526174"/>
                 </a:solidFill>
@@ -30177,17 +30884,21 @@
           </a:p>
           <a:p xmlns:a="http://schemas.openxmlformats.org/drawingml/2006/main">
             <a:pPr algn="l">
-              <a:defRPr sz="1500" b="0">
-                <a:solidFill>
-                  <a:srgbClr val="526174"/>
-                </a:solidFill>
-                <a:latin typeface="Aptos"/>
-                <a:ea typeface="Aptos"/>
-                <a:cs typeface="Aptos"/>
-              </a:defRPr>
-            </a:pPr>
-            <a:r>
-              <a:rPr sz="1500" b="0">
+              <a:lnSpc>
+                <a:spcPct val="112000"/>
+              </a:lnSpc>
+              <a:buNone/>
+              <a:defRPr sz="1350" b="0">
+                <a:solidFill>
+                  <a:srgbClr val="526174"/>
+                </a:solidFill>
+                <a:latin typeface="Aptos"/>
+                <a:ea typeface="Aptos"/>
+                <a:cs typeface="Aptos"/>
+              </a:defRPr>
+            </a:pPr>
+            <a:r>
+              <a:rPr sz="1350" b="0">
                 <a:solidFill>
                   <a:srgbClr val="526174"/>
                 </a:solidFill>
@@ -30200,17 +30911,21 @@
           </a:p>
           <a:p xmlns:a="http://schemas.openxmlformats.org/drawingml/2006/main">
             <a:pPr algn="l">
-              <a:defRPr sz="1500" b="0">
-                <a:solidFill>
-                  <a:srgbClr val="526174"/>
-                </a:solidFill>
-                <a:latin typeface="Aptos"/>
-                <a:ea typeface="Aptos"/>
-                <a:cs typeface="Aptos"/>
-              </a:defRPr>
-            </a:pPr>
-            <a:r>
-              <a:rPr sz="1500" b="0">
+              <a:lnSpc>
+                <a:spcPct val="112000"/>
+              </a:lnSpc>
+              <a:buNone/>
+              <a:defRPr sz="1350" b="0">
+                <a:solidFill>
+                  <a:srgbClr val="526174"/>
+                </a:solidFill>
+                <a:latin typeface="Aptos"/>
+                <a:ea typeface="Aptos"/>
+                <a:cs typeface="Aptos"/>
+              </a:defRPr>
+            </a:pPr>
+            <a:r>
+              <a:rPr sz="1350" b="0">
                 <a:solidFill>
                   <a:srgbClr val="526174"/>
                 </a:solidFill>
@@ -30223,17 +30938,21 @@
           </a:p>
           <a:p xmlns:a="http://schemas.openxmlformats.org/drawingml/2006/main">
             <a:pPr algn="l">
-              <a:defRPr sz="1500" b="0">
-                <a:solidFill>
-                  <a:srgbClr val="526174"/>
-                </a:solidFill>
-                <a:latin typeface="Aptos"/>
-                <a:ea typeface="Aptos"/>
-                <a:cs typeface="Aptos"/>
-              </a:defRPr>
-            </a:pPr>
-            <a:r>
-              <a:rPr sz="1500" b="0">
+              <a:lnSpc>
+                <a:spcPct val="112000"/>
+              </a:lnSpc>
+              <a:buNone/>
+              <a:defRPr sz="1350" b="0">
+                <a:solidFill>
+                  <a:srgbClr val="526174"/>
+                </a:solidFill>
+                <a:latin typeface="Aptos"/>
+                <a:ea typeface="Aptos"/>
+                <a:cs typeface="Aptos"/>
+              </a:defRPr>
+            </a:pPr>
+            <a:r>
+              <a:rPr sz="1350" b="0">
                 <a:solidFill>
                   <a:srgbClr val="526174"/>
                 </a:solidFill>
@@ -30308,6 +31027,7 @@
           <a:lstStyle xmlns:a="http://schemas.openxmlformats.org/drawingml/2006/main"/>
           <a:p xmlns:a="http://schemas.openxmlformats.org/drawingml/2006/main">
             <a:pPr algn="l">
+              <a:buNone/>
               <a:defRPr sz="1200" b="1">
                 <a:solidFill>
                   <a:srgbClr val="526174"/>
@@ -30364,6 +31084,7 @@
           <a:lstStyle xmlns:a="http://schemas.openxmlformats.org/drawingml/2006/main"/>
           <a:p xmlns:a="http://schemas.openxmlformats.org/drawingml/2006/main">
             <a:pPr algn="r">
+              <a:buNone/>
               <a:defRPr sz="1050" b="0">
                 <a:solidFill>
                   <a:srgbClr val="526174"/>
@@ -30420,6 +31141,7 @@
           <a:lstStyle xmlns:a="http://schemas.openxmlformats.org/drawingml/2006/main"/>
           <a:p xmlns:a="http://schemas.openxmlformats.org/drawingml/2006/main">
             <a:pPr algn="l">
+              <a:buNone/>
               <a:defRPr sz="3600" b="1">
                 <a:solidFill>
                   <a:srgbClr val="111827"/>
@@ -30546,6 +31268,7 @@
           <a:lstStyle xmlns:a="http://schemas.openxmlformats.org/drawingml/2006/main"/>
           <a:p xmlns:a="http://schemas.openxmlformats.org/drawingml/2006/main">
             <a:pPr algn="l">
+              <a:buNone/>
               <a:defRPr sz="2250" b="1">
                 <a:solidFill>
                   <a:srgbClr val="111827"/>
@@ -30602,6 +31325,7 @@
           <a:lstStyle xmlns:a="http://schemas.openxmlformats.org/drawingml/2006/main"/>
           <a:p xmlns:a="http://schemas.openxmlformats.org/drawingml/2006/main">
             <a:pPr algn="l">
+              <a:buNone/>
               <a:defRPr sz="1800" b="0">
                 <a:solidFill>
                   <a:srgbClr val="111827"/>
@@ -30625,6 +31349,7 @@
           </a:p>
           <a:p xmlns:a="http://schemas.openxmlformats.org/drawingml/2006/main">
             <a:pPr algn="l">
+              <a:buNone/>
               <a:defRPr sz="1800" b="0">
                 <a:solidFill>
                   <a:srgbClr val="111827"/>
@@ -30648,6 +31373,7 @@
           </a:p>
           <a:p xmlns:a="http://schemas.openxmlformats.org/drawingml/2006/main">
             <a:pPr algn="l">
+              <a:buNone/>
               <a:defRPr sz="1800" b="0">
                 <a:solidFill>
                   <a:srgbClr val="111827"/>
@@ -30671,6 +31397,7 @@
           </a:p>
           <a:p xmlns:a="http://schemas.openxmlformats.org/drawingml/2006/main">
             <a:pPr algn="l">
+              <a:buNone/>
               <a:defRPr sz="1800" b="0">
                 <a:solidFill>
                   <a:srgbClr val="111827"/>
@@ -30694,6 +31421,7 @@
           </a:p>
           <a:p xmlns:a="http://schemas.openxmlformats.org/drawingml/2006/main">
             <a:pPr algn="l">
+              <a:buNone/>
               <a:defRPr sz="1800" b="0">
                 <a:solidFill>
                   <a:srgbClr val="111827"/>
@@ -30717,6 +31445,7 @@
           </a:p>
           <a:p xmlns:a="http://schemas.openxmlformats.org/drawingml/2006/main">
             <a:pPr algn="l">
+              <a:buNone/>
               <a:defRPr sz="1800" b="0">
                 <a:solidFill>
                   <a:srgbClr val="111827"/>
@@ -30773,6 +31502,7 @@
           <a:lstStyle xmlns:a="http://schemas.openxmlformats.org/drawingml/2006/main"/>
           <a:p xmlns:a="http://schemas.openxmlformats.org/drawingml/2006/main">
             <a:pPr algn="l">
+              <a:buNone/>
               <a:defRPr sz="2250" b="1">
                 <a:solidFill>
                   <a:srgbClr val="111827"/>
@@ -30829,6 +31559,7 @@
           <a:lstStyle xmlns:a="http://schemas.openxmlformats.org/drawingml/2006/main"/>
           <a:p xmlns:a="http://schemas.openxmlformats.org/drawingml/2006/main">
             <a:pPr algn="l">
+              <a:buNone/>
               <a:defRPr sz="1800" b="0">
                 <a:solidFill>
                   <a:srgbClr val="111827"/>
@@ -30852,6 +31583,7 @@
           </a:p>
           <a:p xmlns:a="http://schemas.openxmlformats.org/drawingml/2006/main">
             <a:pPr algn="l">
+              <a:buNone/>
               <a:defRPr sz="1800" b="0">
                 <a:solidFill>
                   <a:srgbClr val="111827"/>
@@ -30875,6 +31607,7 @@
           </a:p>
           <a:p xmlns:a="http://schemas.openxmlformats.org/drawingml/2006/main">
             <a:pPr algn="l">
+              <a:buNone/>
               <a:defRPr sz="1800" b="0">
                 <a:solidFill>
                   <a:srgbClr val="111827"/>
@@ -30898,6 +31631,7 @@
           </a:p>
           <a:p xmlns:a="http://schemas.openxmlformats.org/drawingml/2006/main">
             <a:pPr algn="l">
+              <a:buNone/>
               <a:defRPr sz="1800" b="0">
                 <a:solidFill>
                   <a:srgbClr val="111827"/>
@@ -30921,6 +31655,7 @@
           </a:p>
           <a:p xmlns:a="http://schemas.openxmlformats.org/drawingml/2006/main">
             <a:pPr algn="l">
+              <a:buNone/>
               <a:defRPr sz="1800" b="0">
                 <a:solidFill>
                   <a:srgbClr val="111827"/>
@@ -30944,6 +31679,7 @@
           </a:p>
           <a:p xmlns:a="http://schemas.openxmlformats.org/drawingml/2006/main">
             <a:pPr algn="l">
+              <a:buNone/>
               <a:defRPr sz="1800" b="0">
                 <a:solidFill>
                   <a:srgbClr val="111827"/>
@@ -31000,6 +31736,7 @@
           <a:lstStyle xmlns:a="http://schemas.openxmlformats.org/drawingml/2006/main"/>
           <a:p xmlns:a="http://schemas.openxmlformats.org/drawingml/2006/main">
             <a:pPr algn="ctr">
+              <a:buNone/>
               <a:defRPr sz="1800" b="1">
                 <a:solidFill>
                   <a:srgbClr val="15803D"/>
@@ -31085,6 +31822,7 @@
           <a:lstStyle xmlns:a="http://schemas.openxmlformats.org/drawingml/2006/main"/>
           <a:p xmlns:a="http://schemas.openxmlformats.org/drawingml/2006/main">
             <a:pPr algn="l">
+              <a:buNone/>
               <a:defRPr sz="1200" b="1">
                 <a:solidFill>
                   <a:srgbClr val="526174"/>
@@ -31141,6 +31879,7 @@
           <a:lstStyle xmlns:a="http://schemas.openxmlformats.org/drawingml/2006/main"/>
           <a:p xmlns:a="http://schemas.openxmlformats.org/drawingml/2006/main">
             <a:pPr algn="r">
+              <a:buNone/>
               <a:defRPr sz="1050" b="0">
                 <a:solidFill>
                   <a:srgbClr val="526174"/>
@@ -31197,6 +31936,7 @@
           <a:lstStyle xmlns:a="http://schemas.openxmlformats.org/drawingml/2006/main"/>
           <a:p xmlns:a="http://schemas.openxmlformats.org/drawingml/2006/main">
             <a:pPr algn="l">
+              <a:buNone/>
               <a:defRPr sz="3600" b="1">
                 <a:solidFill>
                   <a:srgbClr val="111827"/>
@@ -31323,6 +32063,7 @@
           <a:lstStyle xmlns:a="http://schemas.openxmlformats.org/drawingml/2006/main"/>
           <a:p xmlns:a="http://schemas.openxmlformats.org/drawingml/2006/main">
             <a:pPr algn="l">
+              <a:buNone/>
               <a:defRPr sz="2250" b="1">
                 <a:solidFill>
                   <a:srgbClr val="111827"/>
@@ -31379,6 +32120,7 @@
           <a:lstStyle xmlns:a="http://schemas.openxmlformats.org/drawingml/2006/main"/>
           <a:p xmlns:a="http://schemas.openxmlformats.org/drawingml/2006/main">
             <a:pPr algn="l">
+              <a:buNone/>
               <a:defRPr sz="1800" b="0">
                 <a:solidFill>
                   <a:srgbClr val="111827"/>
@@ -31407,6 +32149,7 @@
           </a:p>
           <a:p xmlns:a="http://schemas.openxmlformats.org/drawingml/2006/main">
             <a:pPr algn="l">
+              <a:buNone/>
               <a:defRPr sz="1800" b="0">
                 <a:solidFill>
                   <a:srgbClr val="111827"/>
@@ -31430,6 +32173,7 @@
           </a:p>
           <a:p xmlns:a="http://schemas.openxmlformats.org/drawingml/2006/main">
             <a:pPr algn="l">
+              <a:buNone/>
               <a:defRPr sz="1800" b="0">
                 <a:solidFill>
                   <a:srgbClr val="111827"/>
@@ -31453,6 +32197,7 @@
           </a:p>
           <a:p xmlns:a="http://schemas.openxmlformats.org/drawingml/2006/main">
             <a:pPr algn="l">
+              <a:buNone/>
               <a:defRPr sz="1800" b="0">
                 <a:solidFill>
                   <a:srgbClr val="111827"/>
@@ -31476,6 +32221,7 @@
           </a:p>
           <a:p xmlns:a="http://schemas.openxmlformats.org/drawingml/2006/main">
             <a:pPr algn="l">
+              <a:buNone/>
               <a:defRPr sz="1800" b="0">
                 <a:solidFill>
                   <a:srgbClr val="111827"/>
@@ -31532,6 +32278,7 @@
           <a:lstStyle xmlns:a="http://schemas.openxmlformats.org/drawingml/2006/main"/>
           <a:p xmlns:a="http://schemas.openxmlformats.org/drawingml/2006/main">
             <a:pPr algn="l">
+              <a:buNone/>
               <a:defRPr sz="2250" b="1">
                 <a:solidFill>
                   <a:srgbClr val="111827"/>
@@ -31588,6 +32335,7 @@
           <a:lstStyle xmlns:a="http://schemas.openxmlformats.org/drawingml/2006/main"/>
           <a:p xmlns:a="http://schemas.openxmlformats.org/drawingml/2006/main">
             <a:pPr algn="l">
+              <a:buNone/>
               <a:defRPr sz="1800" b="0">
                 <a:solidFill>
                   <a:srgbClr val="111827"/>
@@ -31616,6 +32364,7 @@
           </a:p>
           <a:p xmlns:a="http://schemas.openxmlformats.org/drawingml/2006/main">
             <a:pPr algn="l">
+              <a:buNone/>
               <a:defRPr sz="1800" b="0">
                 <a:solidFill>
                   <a:srgbClr val="111827"/>
@@ -31639,6 +32388,7 @@
           </a:p>
           <a:p xmlns:a="http://schemas.openxmlformats.org/drawingml/2006/main">
             <a:pPr algn="l">
+              <a:buNone/>
               <a:defRPr sz="1800" b="0">
                 <a:solidFill>
                   <a:srgbClr val="111827"/>
@@ -31662,6 +32412,7 @@
           </a:p>
           <a:p xmlns:a="http://schemas.openxmlformats.org/drawingml/2006/main">
             <a:pPr algn="l">
+              <a:buNone/>
               <a:defRPr sz="1800" b="0">
                 <a:solidFill>
                   <a:srgbClr val="111827"/>
@@ -31685,6 +32436,7 @@
           </a:p>
           <a:p xmlns:a="http://schemas.openxmlformats.org/drawingml/2006/main">
             <a:pPr algn="l">
+              <a:buNone/>
               <a:defRPr sz="1800" b="0">
                 <a:solidFill>
                   <a:srgbClr val="111827"/>
@@ -31708,6 +32460,7 @@
           </a:p>
           <a:p xmlns:a="http://schemas.openxmlformats.org/drawingml/2006/main">
             <a:pPr algn="l">
+              <a:buNone/>
               <a:defRPr sz="1800" b="0">
                 <a:solidFill>
                   <a:srgbClr val="111827"/>
@@ -31793,6 +32546,7 @@
           <a:lstStyle xmlns:a="http://schemas.openxmlformats.org/drawingml/2006/main"/>
           <a:p xmlns:a="http://schemas.openxmlformats.org/drawingml/2006/main">
             <a:pPr algn="l">
+              <a:buNone/>
               <a:defRPr sz="1350" b="1">
                 <a:solidFill>
                   <a:srgbClr val="67E8F9"/>
@@ -31849,6 +32603,7 @@
           <a:lstStyle xmlns:a="http://schemas.openxmlformats.org/drawingml/2006/main"/>
           <a:p xmlns:a="http://schemas.openxmlformats.org/drawingml/2006/main">
             <a:pPr algn="l">
+              <a:buNone/>
               <a:defRPr sz="5100" b="1">
                 <a:solidFill>
                   <a:srgbClr val="FFFFFF"/>
@@ -31905,6 +32660,7 @@
           <a:lstStyle xmlns:a="http://schemas.openxmlformats.org/drawingml/2006/main"/>
           <a:p xmlns:a="http://schemas.openxmlformats.org/drawingml/2006/main">
             <a:pPr algn="l">
+              <a:buNone/>
               <a:defRPr sz="2100" b="0">
                 <a:solidFill>
                   <a:srgbClr val="B8C5D6"/>
@@ -31990,6 +32746,7 @@
           <a:lstStyle xmlns:a="http://schemas.openxmlformats.org/drawingml/2006/main"/>
           <a:p xmlns:a="http://schemas.openxmlformats.org/drawingml/2006/main">
             <a:pPr algn="l">
+              <a:buNone/>
               <a:defRPr sz="1200" b="1">
                 <a:solidFill>
                   <a:srgbClr val="526174"/>
@@ -32046,6 +32803,7 @@
           <a:lstStyle xmlns:a="http://schemas.openxmlformats.org/drawingml/2006/main"/>
           <a:p xmlns:a="http://schemas.openxmlformats.org/drawingml/2006/main">
             <a:pPr algn="r">
+              <a:buNone/>
               <a:defRPr sz="1050" b="0">
                 <a:solidFill>
                   <a:srgbClr val="526174"/>
@@ -32102,6 +32860,7 @@
           <a:lstStyle xmlns:a="http://schemas.openxmlformats.org/drawingml/2006/main"/>
           <a:p xmlns:a="http://schemas.openxmlformats.org/drawingml/2006/main">
             <a:pPr algn="l">
+              <a:buNone/>
               <a:defRPr sz="3600" b="1">
                 <a:solidFill>
                   <a:srgbClr val="111827"/>
@@ -32193,6 +32952,7 @@
           <a:lstStyle xmlns:a="http://schemas.openxmlformats.org/drawingml/2006/main"/>
           <a:p xmlns:a="http://schemas.openxmlformats.org/drawingml/2006/main">
             <a:pPr algn="l">
+              <a:buNone/>
               <a:defRPr sz="2100" b="1">
                 <a:solidFill>
                   <a:srgbClr val="111827"/>
@@ -32249,6 +33009,7 @@
           <a:lstStyle xmlns:a="http://schemas.openxmlformats.org/drawingml/2006/main"/>
           <a:p xmlns:a="http://schemas.openxmlformats.org/drawingml/2006/main">
             <a:pPr algn="l">
+              <a:buNone/>
               <a:defRPr sz="1500" b="0">
                 <a:solidFill>
                   <a:srgbClr val="526174"/>
@@ -32272,6 +33033,7 @@
           </a:p>
           <a:p xmlns:a="http://schemas.openxmlformats.org/drawingml/2006/main">
             <a:pPr algn="l">
+              <a:buNone/>
               <a:defRPr sz="1500" b="0">
                 <a:solidFill>
                   <a:srgbClr val="526174"/>
@@ -32295,6 +33057,7 @@
           </a:p>
           <a:p xmlns:a="http://schemas.openxmlformats.org/drawingml/2006/main">
             <a:pPr algn="l">
+              <a:buNone/>
               <a:defRPr sz="1500" b="0">
                 <a:solidFill>
                   <a:srgbClr val="526174"/>
@@ -32419,6 +33182,7 @@
           <a:lstStyle xmlns:a="http://schemas.openxmlformats.org/drawingml/2006/main"/>
           <a:p xmlns:a="http://schemas.openxmlformats.org/drawingml/2006/main">
             <a:pPr algn="l">
+              <a:buNone/>
               <a:defRPr sz="2100" b="1">
                 <a:solidFill>
                   <a:srgbClr val="111827"/>
@@ -32475,6 +33239,7 @@
           <a:lstStyle xmlns:a="http://schemas.openxmlformats.org/drawingml/2006/main"/>
           <a:p xmlns:a="http://schemas.openxmlformats.org/drawingml/2006/main">
             <a:pPr algn="l">
+              <a:buNone/>
               <a:defRPr sz="1500" b="0">
                 <a:solidFill>
                   <a:srgbClr val="526174"/>
@@ -32498,6 +33263,7 @@
           </a:p>
           <a:p xmlns:a="http://schemas.openxmlformats.org/drawingml/2006/main">
             <a:pPr algn="l">
+              <a:buNone/>
               <a:defRPr sz="1500" b="0">
                 <a:solidFill>
                   <a:srgbClr val="526174"/>
@@ -32521,6 +33287,7 @@
           </a:p>
           <a:p xmlns:a="http://schemas.openxmlformats.org/drawingml/2006/main">
             <a:pPr algn="l">
+              <a:buNone/>
               <a:defRPr sz="1500" b="0">
                 <a:solidFill>
                   <a:srgbClr val="526174"/>
@@ -32577,6 +33344,7 @@
           <a:lstStyle xmlns:a="http://schemas.openxmlformats.org/drawingml/2006/main"/>
           <a:p xmlns:a="http://schemas.openxmlformats.org/drawingml/2006/main">
             <a:pPr algn="l">
+              <a:buNone/>
               <a:defRPr sz="1950" b="1">
                 <a:solidFill>
                   <a:srgbClr val="7C3AED"/>
